--- a/entregables/presentacion-alivia/Alivia_Presentacion_Sistema_v3.pptx
+++ b/entregables/presentacion-alivia/Alivia_Presentacion_Sistema_v3.pptx
@@ -4,6 +4,9 @@
   <p:sldMasterIdLst>
     <p:sldMasterId id="2147483648" r:id="rId1"/>
   </p:sldMasterIdLst>
+  <p:notesMasterIdLst>
+    <p:notesMasterId r:id="rId22"/>
+  </p:notesMasterIdLst>
   <p:sldIdLst>
     <p:sldId id="256" r:id="rId2"/>
     <p:sldId id="257" r:id="rId3"/>
@@ -26,9 +29,6 @@
     <p:sldId id="274" r:id="rId20"/>
     <p:sldId id="275" r:id="rId21"/>
   </p:sldIdLst>
-  <p:notesMasterIdLst>
-    <p:notesMasterId r:id="rId22"/>
-  </p:notesMasterIdLst>
   <p:sldSz cx="14630400" cy="8229600"/>
   <p:notesSz cx="8229600" cy="14630400"/>
   <p:defaultTextStyle>
@@ -123,6 +123,11 @@
       </a:defRPr>
     </a:lvl9pPr>
   </p:defaultTextStyle>
+  <p:extLst>
+    <p:ext uri="{EFAFB233-063F-42B5-8137-9DF3F51BA10A}">
+      <p15:sldGuideLst xmlns:p15="http://schemas.microsoft.com/office/powerpoint/2012/main"/>
+    </p:ext>
+  </p:extLst>
 </p:presentation>
 </file>
 
@@ -148,234 +153,10 @@
           <a:chExt cx="0" cy="0"/>
         </a:xfrm>
       </p:grpSpPr>
-      <p:sp>
-        <p:nvSpPr>
-          <p:cNvPr id="2" name="Header Placeholder 1"/>
-          <p:cNvSpPr>
-            <a:spLocks noGrp="1"/>
-          </p:cNvSpPr>
-          <p:nvPr>
-            <p:ph type="hdr" sz="quarter"/>
-          </p:nvPr>
-        </p:nvSpPr>
-        <p:spPr>
-          <a:xfrm>
-            <a:off x="0" y="0"/>
-            <a:ext cx="2971800" cy="458788"/>
-          </a:xfrm>
-          <a:prstGeom prst="rect">
-            <a:avLst/>
-          </a:prstGeom>
-        </p:spPr>
-        <p:txBody>
-          <a:bodyPr vert="horz" lIns="91440" tIns="45720" rIns="91440" bIns="45720" rtlCol="0"/>
-          <a:lstStyle>
-            <a:lvl1pPr algn="l">
-              <a:defRPr sz="1200"/>
-            </a:lvl1pPr>
-          </a:lstStyle>
-          <a:p>
-            <a:endParaRPr lang="en-US"/>
-          </a:p>
-        </p:txBody>
-      </p:sp>
-      <p:sp>
-        <p:nvSpPr>
-          <p:cNvPr id="3" name="Date Placeholder 2"/>
-          <p:cNvSpPr>
-            <a:spLocks noGrp="1"/>
-          </p:cNvSpPr>
-          <p:nvPr>
-            <p:ph type="dt" idx="1"/>
-          </p:nvPr>
-        </p:nvSpPr>
-        <p:spPr>
-          <a:xfrm>
-            <a:off x="3884613" y="0"/>
-            <a:ext cx="2971800" cy="458788"/>
-          </a:xfrm>
-          <a:prstGeom prst="rect">
-            <a:avLst/>
-          </a:prstGeom>
-        </p:spPr>
-        <p:txBody>
-          <a:bodyPr vert="horz" lIns="91440" tIns="45720" rIns="91440" bIns="45720" rtlCol="0"/>
-          <a:lstStyle>
-            <a:lvl1pPr algn="r">
-              <a:defRPr sz="1200"/>
-            </a:lvl1pPr>
-          </a:lstStyle>
-          <a:p>
-            <a:fld id="{5282F153-3F37-0F45-9E97-73ACFA13230C}" type="datetimeFigureOut">
-              <a:rPr lang="en-US"/>
-              <a:t>7/23/19</a:t>
-            </a:fld>
-            <a:endParaRPr lang="en-US"/>
-          </a:p>
-        </p:txBody>
-      </p:sp>
-      <p:sp>
-        <p:nvSpPr>
-          <p:cNvPr id="4" name="Slide Image Placeholder 3"/>
-          <p:cNvSpPr>
-            <a:spLocks noGrp="1" noRot="1" noChangeAspect="1"/>
-          </p:cNvSpPr>
-          <p:nvPr>
-            <p:ph type="sldImg" idx="2"/>
-          </p:nvPr>
-        </p:nvSpPr>
-        <p:spPr>
-          <a:xfrm>
-            <a:off x="685800" y="1143000"/>
-            <a:ext cx="5486400" cy="3086100"/>
-          </a:xfrm>
-          <a:prstGeom prst="rect">
-            <a:avLst/>
-          </a:prstGeom>
-          <a:noFill/>
-          <a:ln w="12700">
-            <a:solidFill>
-              <a:prstClr val="black"/>
-            </a:solidFill>
-          </a:ln>
-        </p:spPr>
-        <p:txBody>
-          <a:bodyPr vert="horz" lIns="91440" tIns="45720" rIns="91440" bIns="45720" rtlCol="0" anchor="ctr"/>
-          <a:lstStyle/>
-          <a:p>
-            <a:endParaRPr lang="en-US"/>
-          </a:p>
-        </p:txBody>
-      </p:sp>
-      <p:sp>
-        <p:nvSpPr>
-          <p:cNvPr id="5" name="Notes Placeholder 4"/>
-          <p:cNvSpPr>
-            <a:spLocks noGrp="1"/>
-          </p:cNvSpPr>
-          <p:nvPr>
-            <p:ph type="body" sz="quarter" idx="3"/>
-          </p:nvPr>
-        </p:nvSpPr>
-        <p:spPr>
-          <a:xfrm>
-            <a:off x="685800" y="4400550"/>
-            <a:ext cx="5486400" cy="3600450"/>
-          </a:xfrm>
-          <a:prstGeom prst="rect">
-            <a:avLst/>
-          </a:prstGeom>
-        </p:spPr>
-        <p:txBody>
-          <a:bodyPr vert="horz" lIns="91440" tIns="45720" rIns="91440" bIns="45720" rtlCol="0"/>
-          <a:lstStyle/>
-          <a:p>
-            <a:pPr lvl="0"/>
-            <a:r>
-              <a:rPr lang="en-US"/>
-              <a:t>Click to edit Master text styles</a:t>
-            </a:r>
-          </a:p>
-          <a:p>
-            <a:pPr lvl="1"/>
-            <a:r>
-              <a:rPr lang="en-US"/>
-              <a:t>Second level</a:t>
-            </a:r>
-          </a:p>
-          <a:p>
-            <a:pPr lvl="2"/>
-            <a:r>
-              <a:rPr lang="en-US"/>
-              <a:t>Third level</a:t>
-            </a:r>
-          </a:p>
-          <a:p>
-            <a:pPr lvl="3"/>
-            <a:r>
-              <a:rPr lang="en-US"/>
-              <a:t>Fourth level</a:t>
-            </a:r>
-          </a:p>
-          <a:p>
-            <a:pPr lvl="4"/>
-            <a:r>
-              <a:rPr lang="en-US"/>
-              <a:t>Fifth level</a:t>
-            </a:r>
-          </a:p>
-        </p:txBody>
-      </p:sp>
-      <p:sp>
-        <p:nvSpPr>
-          <p:cNvPr id="6" name="Footer Placeholder 5"/>
-          <p:cNvSpPr>
-            <a:spLocks noGrp="1"/>
-          </p:cNvSpPr>
-          <p:nvPr>
-            <p:ph type="ftr" sz="quarter" idx="4"/>
-          </p:nvPr>
-        </p:nvSpPr>
-        <p:spPr>
-          <a:xfrm>
-            <a:off x="0" y="8685213"/>
-            <a:ext cx="2971800" cy="458787"/>
-          </a:xfrm>
-          <a:prstGeom prst="rect">
-            <a:avLst/>
-          </a:prstGeom>
-        </p:spPr>
-        <p:txBody>
-          <a:bodyPr vert="horz" lIns="91440" tIns="45720" rIns="91440" bIns="45720" rtlCol="0" anchor="b"/>
-          <a:lstStyle>
-            <a:lvl1pPr algn="l">
-              <a:defRPr sz="1200"/>
-            </a:lvl1pPr>
-          </a:lstStyle>
-          <a:p>
-            <a:endParaRPr lang="en-US"/>
-          </a:p>
-        </p:txBody>
-      </p:sp>
-      <p:sp>
-        <p:nvSpPr>
-          <p:cNvPr id="7" name="Slide Number Placeholder 6"/>
-          <p:cNvSpPr>
-            <a:spLocks noGrp="1"/>
-          </p:cNvSpPr>
-          <p:nvPr>
-            <p:ph type="sldNum" sz="quarter" idx="5"/>
-          </p:nvPr>
-        </p:nvSpPr>
-        <p:spPr>
-          <a:xfrm>
-            <a:off x="3884613" y="8685213"/>
-            <a:ext cx="2971800" cy="458787"/>
-          </a:xfrm>
-          <a:prstGeom prst="rect">
-            <a:avLst/>
-          </a:prstGeom>
-        </p:spPr>
-        <p:txBody>
-          <a:bodyPr vert="horz" lIns="91440" tIns="45720" rIns="91440" bIns="45720" rtlCol="0" anchor="b"/>
-          <a:lstStyle>
-            <a:lvl1pPr algn="r">
-              <a:defRPr sz="1200"/>
-            </a:lvl1pPr>
-          </a:lstStyle>
-          <a:p>
-            <a:fld id="{CE5E9CC1-C706-0F49-92D6-E571CC5EEA8F}" type="slidenum">
-              <a:rPr lang="en-US"/>
-              <a:t>‹#›</a:t>
-            </a:fld>
-            <a:endParaRPr lang="en-US"/>
-          </a:p>
-        </p:txBody>
-      </p:sp>
     </p:spTree>
     <p:extLst>
       <p:ext uri="{BB962C8B-B14F-4D97-AF65-F5344CB8AC3E}">
-        <p14:creationId xmlns:p14="http://schemas.microsoft.com/office/powerpoint/2010/main" val="1024086991"/>
+        <p14:creationId xmlns:p14="http://schemas.microsoft.com/office/powerpoint/2010/main" val="3739670410"/>
       </p:ext>
     </p:extLst>
   </p:cSld>
@@ -524,7 +305,6 @@
               <a:t>Fuentes locales: T06, información académica; prototipos/00-sistema-diseno/identidad-visual.md
 Revisión T06: se conserva y consolida el contenido de v2. Diseño de referencia; prototipos locales con datos ficticios. Fecha académica: 13 de octubre de 2026. Los cortes de demostración son del 18 y 20 de octubre.</a:t>
             </a:r>
-            <a:endParaRPr lang="en-US" dirty="0"/>
           </a:p>
         </p:txBody>
       </p:sp>
@@ -614,7 +394,6 @@
 Disponibilidad = stock físico utilizable − compromisos autorizados pendientes de retiro
 Revisión T06: se conserva y consolida el contenido de v2. Diseño de referencia; prototipos locales con datos ficticios. Fecha académica: 13 de octubre de 2026. Los cortes de demostración son del 18 y 20 de octubre.</a:t>
             </a:r>
-            <a:endParaRPr lang="en-US" dirty="0"/>
           </a:p>
         </p:txBody>
       </p:sp>
@@ -704,7 +483,6 @@
 Monolito modular NestJS en capas: simplifica desarrollo y despliegue, manteniendo límites funcionales
 Revisión T06: se conserva y consolida el contenido de v2. Diseño de referencia; prototipos locales con datos ficticios. Fecha académica: 13 de octubre de 2026. Los cortes de demostración son del 18 y 20 de octubre.</a:t>
             </a:r>
-            <a:endParaRPr lang="en-US" dirty="0"/>
           </a:p>
         </p:txBody>
       </p:sp>
@@ -794,7 +572,6 @@
 Las flechas representan coordinación de casos de uso, no dependencias circulares entre implementaciones
 Revisión T06: se conserva y consolida el contenido de v2. Diseño de referencia; prototipos locales con datos ficticios. Fecha académica: 13 de octubre de 2026. Los cortes de demostración son del 18 y 20 de octubre.</a:t>
             </a:r>
-            <a:endParaRPr lang="en-US" dirty="0"/>
           </a:p>
         </p:txBody>
       </p:sp>
@@ -884,7 +661,6 @@
 Referencia propuesta: Vercel para Next.js, Render para NestJS y Supabase para PostgreSQL
 Revisión T06: se conserva y consolida el contenido de v2. Diseño de referencia; prototipos locales con datos ficticios. Fecha académica: 13 de octubre de 2026. Los cortes de demostración son del 18 y 20 de octubre.</a:t>
             </a:r>
-            <a:endParaRPr lang="en-US" dirty="0"/>
           </a:p>
         </p:txBody>
       </p:sp>
@@ -974,7 +750,6 @@
 PostgreSQL administrado, acceso exclusivo del backend y continuidad planificada
 Revisión T06: se conserva y consolida el contenido de v2. Diseño de referencia; prototipos locales con datos ficticios. Fecha académica: 13 de octubre de 2026. Los cortes de demostración son del 18 y 20 de octubre.</a:t>
             </a:r>
-            <a:endParaRPr lang="en-US" dirty="0"/>
           </a:p>
         </p:txBody>
       </p:sp>
@@ -1064,7 +839,6 @@
 HTTPS protege el transporte; la API verifica identidad, permisos y datos antes de persistir
 Revisión T06: se conserva y consolida el contenido de v2. Diseño de referencia; prototipos locales con datos ficticios. Fecha académica: 13 de octubre de 2026. Los cortes de demostración son del 18 y 20 de octubre.</a:t>
             </a:r>
-            <a:endParaRPr lang="en-US" dirty="0"/>
           </a:p>
         </p:txBody>
       </p:sp>
@@ -1154,7 +928,6 @@
 Se conserva Segoe UI, fondo blanco, azul oscuro y cyan. Navegación por rol, estados expresados también en texto, etiquetas y unidades visibles. El menú no determina permisos; los aplica el backend. La confirmación comunitaria vuelve inmutable la solicitud.
 Revisión T06: se conserva y consolida el contenido de v2. Diseño de referencia; prototipos locales con datos ficticios. Fecha académica: 13 de octubre de 2026. Los cortes de demostración son del 18 y 20 de octubre.</a:t>
             </a:r>
-            <a:endParaRPr lang="en-US" dirty="0"/>
           </a:p>
         </p:txBody>
       </p:sp>
@@ -1244,7 +1017,6 @@
 Matching usa producto y unidad coincidentes, stock USABLE y FEFO cuando corresponde. El rechazo requiere motivo y deja elegible lo nunca autorizado. Confirmar o reducir no reserva. Autorizar no aumenta cantidades y revalida en transacción lotes y demanda pendiente. El recorte MK-05 conserva su estado previo a la autorización y no altera datos ni controles.
 Revisión T06: se conserva y consolida el contenido de v2. Diseño de referencia; prototipos locales con datos ficticios. Fecha académica: 13 de octubre de 2026. Los cortes de demostración son del 18 y 20 de octubre.</a:t>
             </a:r>
-            <a:endParaRPr lang="en-US" dirty="0"/>
           </a:p>
         </p:txBody>
       </p:sp>
@@ -1334,7 +1106,6 @@
 El mapa es esquemático, sin escala ni GPS. El retiro es completo y exige verificación de ruta menor de 30 minutos, sin UNKNOWN ni IMPASSABLE; no garantiza transitabilidad física. Brigada registra llegada. Comuna valida después una recepción única. Recibido físico puede diferir de conforme; missing = enviado − recibido. El ejemplo final conserva 2 bidones faltantes y 2 frazadas dañadas. Las discrepancias no reactivan matching ni descuentan inventario otra vez. Documentos únicos XLSX/PDF tras finalizar, fuera de TX y reintentables.
 Revisión T06: se conserva y consolida el contenido de v2. Diseño de referencia; prototipos locales con datos ficticios. Fecha académica: 13 de octubre de 2026. Los cortes de demostración son del 18 y 20 de octubre.</a:t>
             </a:r>
-            <a:endParaRPr lang="en-US" dirty="0"/>
           </a:p>
         </p:txBody>
       </p:sp>
@@ -1425,7 +1196,6 @@
 MK-09 · Una misma comunidad conserva dimensiones territoriales independientes
 Revisión T06: se conserva y consolida el contenido de v2. Diseño de referencia; prototipos locales con datos ficticios. Fecha académica: 13 de octubre de 2026. Los cortes de demostración son del 18 y 20 de octubre.</a:t>
             </a:r>
-            <a:endParaRPr lang="en-US" dirty="0"/>
           </a:p>
         </p:txBody>
       </p:sp>
@@ -1515,7 +1285,6 @@
 Lluvias intensas asociadas a El Niño en Piura
 Revisión T06: se conserva y consolida el contenido de v2. Diseño de referencia; prototipos locales con datos ficticios. Fecha académica: 13 de octubre de 2026. Los cortes de demostración son del 18 y 20 de octubre.</a:t>
             </a:r>
-            <a:endParaRPr lang="en-US" dirty="0"/>
           </a:p>
         </p:txBody>
       </p:sp>
@@ -1606,7 +1375,6 @@
 MK-10 · La instantánea final consolida las etapas y conserva las brechas de satisfacción
 Revisión T06: se conserva y consolida el contenido de v2. Diseño de referencia; prototipos locales con datos ficticios. Fecha académica: 13 de octubre de 2026. Los cortes de demostración son del 18 y 20 de octubre.</a:t>
             </a:r>
-            <a:endParaRPr lang="en-US" dirty="0"/>
           </a:p>
         </p:txBody>
       </p:sp>
@@ -1696,7 +1464,6 @@
 Plataforma web de coordinación y trazabilidad de ayuda humanitaria
 Revisión T06: se conserva y consolida el contenido de v2. Diseño de referencia; prototipos locales con datos ficticios. Fecha académica: 13 de octubre de 2026. Los cortes de demostración son del 18 y 20 de octubre.</a:t>
             </a:r>
-            <a:endParaRPr lang="en-US" dirty="0"/>
           </a:p>
         </p:txBody>
       </p:sp>
@@ -1786,7 +1553,6 @@
 Cada responsable opera sobre su entidad; la supervisión territorial mantiene acceso de lectura
 Revisión T06: se conserva y consolida el contenido de v2. Diseño de referencia; prototipos locales con datos ficticios. Fecha académica: 13 de octubre de 2026. Los cortes de demostración son del 18 y 20 de octubre.</a:t>
             </a:r>
-            <a:endParaRPr lang="en-US" dirty="0"/>
           </a:p>
         </p:txBody>
       </p:sp>
@@ -1876,7 +1642,6 @@
 Seis macroprocesos; la supervisión acompaña toda la operación
 Revisión T06: se conserva y consolida el contenido de v2. Diseño de referencia; prototipos locales con datos ficticios. Fecha académica: 13 de octubre de 2026. Los cortes de demostración son del 18 y 20 de octubre.</a:t>
             </a:r>
-            <a:endParaRPr lang="en-US" dirty="0"/>
           </a:p>
         </p:txBody>
       </p:sp>
@@ -1966,7 +1731,6 @@
 PROPOSED puede pasar a REJECTED solo con motivo. Confirmar o reducir no compromete stock. Autorizar revalida lotes USABLE y demanda pendiente. Retiro completo exige ruta vigente, sin UNKNOWN ni IMPASSABLE y verificación menor de 30 minutos. FINALIZED exige recepción única, conforme o con observaciones. Las discrepancias cerradas no reactivan matching. SENAMHI es una fuente considerada; no se acredita integración activa ni boletín oficial.
 Revisión T06: se conserva y consolida el contenido de v2. Diseño de referencia; prototipos locales con datos ficticios. Fecha académica: 13 de octubre de 2026. Los cortes de demostración son del 18 y 20 de octubre.</a:t>
             </a:r>
-            <a:endParaRPr lang="en-US" dirty="0"/>
           </a:p>
         </p:txBody>
       </p:sp>
@@ -2056,7 +1820,6 @@
 Modelo conceptual sin PK/FK. Identity: usuario con un rol y pertenencia exclusiva; ONG administra almacenes y Brigada ejecuta traslados. Shelter: comunidad, emergencia, solicitud, líneas, recepción e informe final. Inventory: productos, almacenes, lotes, propuestas y autorizaciones. Logistics: despachos, rutas y documentos. Territory: observaciones y evaluaciones por comunidad, desastre, nivel, fuente y fecha. El informe final es una instantánea al cierre.
 Revisión T06: se conserva y consolida el contenido de v2. Diseño de referencia; prototipos locales con datos ficticios. Fecha académica: 13 de octubre de 2026. Los cortes de demostración son del 18 y 20 de octubre.</a:t>
             </a:r>
-            <a:endParaRPr lang="en-US" dirty="0"/>
           </a:p>
         </p:txBody>
       </p:sp>
@@ -2147,7 +1910,6 @@
 Vista 1: una línea de matching conecta una línea solicitada con un lote concreto
 Revisión T06: se conserva y consolida el contenido de v2. Diseño de referencia; prototipos locales con datos ficticios. Fecha académica: 13 de octubre de 2026. Los cortes de demostración son del 18 y 20 de octubre.</a:t>
             </a:r>
-            <a:endParaRPr lang="en-US" dirty="0"/>
           </a:p>
         </p:txBody>
       </p:sp>
@@ -2237,7 +1999,6 @@
 Vista 2: las referencias enlazan los módulos sin convertirlas en FK físicas entre schemas
 Revisión T06: se conserva y consolida el contenido de v2. Diseño de referencia; prototipos locales con datos ficticios. Fecha académica: 13 de octubre de 2026. Los cortes de demostración son del 18 y 20 de octubre.</a:t>
             </a:r>
-            <a:endParaRPr lang="en-US" dirty="0"/>
           </a:p>
         </p:txBody>
       </p:sp>
@@ -2310,6 +2071,11 @@
 <file path=ppt/slideMasters/slideMaster1.xml><?xml version="1.0" encoding="utf-8"?>
 <p:sldMaster xmlns:a="http://schemas.openxmlformats.org/drawingml/2006/main" xmlns:r="http://schemas.openxmlformats.org/officeDocument/2006/relationships" xmlns:p="http://schemas.openxmlformats.org/presentationml/2006/main">
   <p:cSld>
+    <p:bg>
+      <p:bgRef idx="1001">
+        <a:schemeClr val="bg1"/>
+      </p:bgRef>
+    </p:bg>
     <p:spTree>
       <p:nvGrpSpPr>
         <p:cNvPr id="1" name=""/>
@@ -2592,6 +2358,7 @@
         <a:solidFill>
           <a:srgbClr val="FFFFFF"/>
         </a:solidFill>
+        <a:effectLst/>
       </p:bgPr>
     </p:bg>
     <p:spTree>
@@ -2629,7 +2396,7 @@
           <a:bodyPr wrap="square" lIns="0" tIns="0" rIns="0" bIns="0" rtlCol="0" anchor="t"/>
           <a:lstStyle/>
           <a:p>
-            <a:pPr algn="r" indent="0" marL="0">
+            <a:pPr marL="0" indent="0" algn="r">
               <a:buNone/>
             </a:pPr>
             <a:r>
@@ -2668,7 +2435,7 @@
           <a:bodyPr wrap="square" lIns="0" tIns="0" rIns="0" bIns="0" rtlCol="0" anchor="t"/>
           <a:lstStyle/>
           <a:p>
-            <a:pPr indent="0" marL="0">
+            <a:pPr marL="0" indent="0">
               <a:buNone/>
             </a:pPr>
             <a:r>
@@ -2707,7 +2474,7 @@
           <a:bodyPr wrap="square" lIns="0" tIns="0" rIns="0" bIns="0" rtlCol="0" anchor="t"/>
           <a:lstStyle/>
           <a:p>
-            <a:pPr indent="0" marL="0">
+            <a:pPr marL="0" indent="0">
               <a:buNone/>
             </a:pPr>
             <a:r>
@@ -2727,17 +2494,17 @@
       </p:sp>
       <p:pic>
         <p:nvPicPr>
-          <p:cNvPr id="6" name="Image 0" descr="Escudo de Alivía">    </p:cNvPr>
+          <p:cNvPr id="6" name="Image 0" descr="Escudo de Alivía"/>
           <p:cNvPicPr>
             <a:picLocks noChangeAspect="1"/>
           </p:cNvPicPr>
           <p:nvPr/>
         </p:nvPicPr>
         <p:blipFill>
-          <a:blip r:embed="rId1">
+          <a:blip r:embed="rId3">
             <a:extLst>
               <a:ext uri="{96DAC541-7B7A-43D3-8B79-37D633B846F1}">
-                <asvg:svgBlip xmlns:asvg="http://schemas.microsoft.com/office/drawing/2016/SVG/main" r:embed="rId2"/>
+                <asvg:svgBlip xmlns:asvg="http://schemas.microsoft.com/office/drawing/2016/SVG/main" r:embed="rId4"/>
               </a:ext>
             </a:extLst>
           </a:blip>
@@ -2776,7 +2543,7 @@
           <a:bodyPr wrap="square" lIns="0" tIns="0" rIns="0" bIns="0" rtlCol="0" anchor="t"/>
           <a:lstStyle/>
           <a:p>
-            <a:pPr indent="0" marL="0">
+            <a:pPr marL="0" indent="0">
               <a:buNone/>
             </a:pPr>
             <a:r>
@@ -2815,7 +2582,7 @@
           <a:bodyPr wrap="square" lIns="0" tIns="0" rIns="0" bIns="0" rtlCol="0" anchor="t"/>
           <a:lstStyle/>
           <a:p>
-            <a:pPr indent="0" marL="0">
+            <a:pPr marL="0" indent="0">
               <a:buNone/>
             </a:pPr>
             <a:r>
@@ -2832,7 +2599,7 @@
             <a:endParaRPr lang="es-PE" sz="3200" dirty="0"/>
           </a:p>
           <a:p>
-            <a:pPr indent="0" marL="0">
+            <a:pPr marL="0" indent="0">
               <a:buNone/>
             </a:pPr>
             <a:r>
@@ -2894,7 +2661,7 @@
           <a:bodyPr wrap="square" lIns="0" tIns="0" rIns="0" bIns="0" rtlCol="0" anchor="t"/>
           <a:lstStyle/>
           <a:p>
-            <a:pPr indent="0" marL="0">
+            <a:pPr marL="0" indent="0">
               <a:buNone/>
             </a:pPr>
             <a:r>
@@ -2906,7 +2673,7 @@
                 <a:ea typeface="Segoe UI" pitchFamily="34" charset="-122"/>
                 <a:cs typeface="Segoe UI" pitchFamily="34" charset="-120"/>
               </a:rPr>
-              <a:t>Tarea grupal — Análisis y diseño del sistema</a:t>
+              <a:t>Análisis y diseño del sistema</a:t>
             </a:r>
             <a:endParaRPr lang="es-PE" sz="2300" dirty="0"/>
           </a:p>
@@ -2933,7 +2700,7 @@
           <a:bodyPr wrap="square" lIns="0" tIns="0" rIns="0" bIns="0" rtlCol="0" anchor="t"/>
           <a:lstStyle/>
           <a:p>
-            <a:pPr indent="0" marL="0">
+            <a:pPr marL="0" indent="0">
               <a:buNone/>
             </a:pPr>
             <a:r>
@@ -2972,12 +2739,22 @@
           <a:bodyPr wrap="square" lIns="0" tIns="0" rIns="0" bIns="0" rtlCol="0" anchor="t"/>
           <a:lstStyle/>
           <a:p>
-            <a:pPr indent="0" marL="0">
+            <a:pPr>
               <a:lnSpc>
                 <a:spcPct val="110000"/>
               </a:lnSpc>
-              <a:buNone/>
-            </a:pPr>
+            </a:pPr>
+            <a:r>
+              <a:rPr lang="es-PE" altLang="en-US" sz="2200" dirty="0" err="1">
+                <a:solidFill>
+                  <a:srgbClr val="183B4A"/>
+                </a:solidFill>
+                <a:latin typeface="Segoe UI" pitchFamily="34" charset="0"/>
+                <a:ea typeface="Segoe UI" pitchFamily="34" charset="-122"/>
+                <a:cs typeface="Segoe UI" pitchFamily="34" charset="-120"/>
+              </a:rPr>
+              <a:t>Inoñan</a:t>
+            </a:r>
             <a:r>
               <a:rPr lang="es-PE" altLang="en-US" sz="2200" dirty="0">
                 <a:solidFill>
@@ -2987,12 +2764,11 @@
                 <a:ea typeface="Segoe UI" pitchFamily="34" charset="-122"/>
                 <a:cs typeface="Segoe UI" pitchFamily="34" charset="-120"/>
               </a:rPr>
-              <a:t>Paucar Campoverder Kenyi Yair</a:t>
-            </a:r>
-            <a:endParaRPr lang="es-PE" sz="2200" dirty="0"/>
-          </a:p>
-          <a:p>
-            <a:pPr indent="0" marL="0">
+              <a:t> González Justin Hafid</a:t>
+            </a:r>
+          </a:p>
+          <a:p>
+            <a:pPr marL="0" indent="0">
               <a:lnSpc>
                 <a:spcPct val="110000"/>
               </a:lnSpc>
@@ -3007,17 +2783,26 @@
                 <a:ea typeface="Segoe UI" pitchFamily="34" charset="-122"/>
                 <a:cs typeface="Segoe UI" pitchFamily="34" charset="-120"/>
               </a:rPr>
-              <a:t>Villegas Saavedra Axel Alberto</a:t>
-            </a:r>
-            <a:endParaRPr lang="es-PE" sz="2200" dirty="0"/>
-          </a:p>
-          <a:p>
-            <a:pPr indent="0" marL="0">
+              <a:t>Panta Sanchez Eder Daniel</a:t>
+            </a:r>
+          </a:p>
+          <a:p>
+            <a:pPr>
               <a:lnSpc>
                 <a:spcPct val="110000"/>
               </a:lnSpc>
-              <a:buNone/>
-            </a:pPr>
+            </a:pPr>
+            <a:r>
+              <a:rPr lang="es-PE" altLang="en-US" sz="2200" dirty="0" err="1">
+                <a:solidFill>
+                  <a:srgbClr val="183B4A"/>
+                </a:solidFill>
+                <a:latin typeface="Segoe UI" pitchFamily="34" charset="0"/>
+                <a:ea typeface="Segoe UI" pitchFamily="34" charset="-122"/>
+                <a:cs typeface="Segoe UI" pitchFamily="34" charset="-120"/>
+              </a:rPr>
+              <a:t>Paucar</a:t>
+            </a:r>
             <a:r>
               <a:rPr lang="es-PE" altLang="en-US" sz="2200" dirty="0">
                 <a:solidFill>
@@ -3027,16 +2812,36 @@
                 <a:ea typeface="Segoe UI" pitchFamily="34" charset="-122"/>
                 <a:cs typeface="Segoe UI" pitchFamily="34" charset="-120"/>
               </a:rPr>
-              <a:t>Panta Sanchez Eder Daniel</a:t>
-            </a:r>
-            <a:endParaRPr lang="es-PE" sz="2200" dirty="0"/>
-          </a:p>
-          <a:p>
-            <a:pPr indent="0" marL="0">
+              <a:t> </a:t>
+            </a:r>
+            <a:r>
+              <a:rPr lang="es-PE" altLang="en-US" sz="2200" dirty="0" err="1">
+                <a:solidFill>
+                  <a:srgbClr val="183B4A"/>
+                </a:solidFill>
+                <a:latin typeface="Segoe UI" pitchFamily="34" charset="0"/>
+                <a:ea typeface="Segoe UI" pitchFamily="34" charset="-122"/>
+                <a:cs typeface="Segoe UI" pitchFamily="34" charset="-120"/>
+              </a:rPr>
+              <a:t>Campoverder</a:t>
+            </a:r>
+            <a:r>
+              <a:rPr lang="es-PE" altLang="en-US" sz="2200" dirty="0">
+                <a:solidFill>
+                  <a:srgbClr val="183B4A"/>
+                </a:solidFill>
+                <a:latin typeface="Segoe UI" pitchFamily="34" charset="0"/>
+                <a:ea typeface="Segoe UI" pitchFamily="34" charset="-122"/>
+                <a:cs typeface="Segoe UI" pitchFamily="34" charset="-120"/>
+              </a:rPr>
+              <a:t> Kenyi Yair</a:t>
+            </a:r>
+          </a:p>
+          <a:p>
+            <a:pPr>
               <a:lnSpc>
                 <a:spcPct val="110000"/>
               </a:lnSpc>
-              <a:buNone/>
             </a:pPr>
             <a:r>
               <a:rPr lang="es-PE" altLang="en-US" sz="2200" dirty="0">
@@ -3047,7 +2852,7 @@
                 <a:ea typeface="Segoe UI" pitchFamily="34" charset="-122"/>
                 <a:cs typeface="Segoe UI" pitchFamily="34" charset="-120"/>
               </a:rPr>
-              <a:t>Inoñan González Justin Hafid</a:t>
+              <a:t>Villegas Saavedra Axel Alberto</a:t>
             </a:r>
             <a:endParaRPr lang="es-PE" sz="2200" dirty="0"/>
           </a:p>
@@ -3074,7 +2879,7 @@
           <a:bodyPr wrap="square" lIns="0" tIns="0" rIns="0" bIns="0" rtlCol="0" anchor="t"/>
           <a:lstStyle/>
           <a:p>
-            <a:pPr indent="0" marL="0">
+            <a:pPr marL="0" indent="0">
               <a:buNone/>
             </a:pPr>
             <a:r>
@@ -3108,6 +2913,7 @@
         <a:solidFill>
           <a:srgbClr val="FFFFFF"/>
         </a:solidFill>
+        <a:effectLst/>
       </p:bgPr>
     </p:bg>
     <p:spTree>
@@ -3145,7 +2951,7 @@
           <a:bodyPr wrap="square" lIns="0" tIns="0" rIns="0" bIns="0" rtlCol="0" anchor="t"/>
           <a:lstStyle/>
           <a:p>
-            <a:pPr indent="0" marL="0">
+            <a:pPr marL="0" indent="0">
               <a:buNone/>
             </a:pPr>
             <a:r>
@@ -3184,7 +2990,7 @@
           <a:bodyPr wrap="square" lIns="0" tIns="0" rIns="0" bIns="0" rtlCol="0" anchor="t"/>
           <a:lstStyle/>
           <a:p>
-            <a:pPr indent="0" marL="0">
+            <a:pPr marL="0" indent="0">
               <a:buNone/>
             </a:pPr>
             <a:r>
@@ -3223,7 +3029,7 @@
           <a:bodyPr wrap="square" lIns="0" tIns="0" rIns="0" bIns="0" rtlCol="0" anchor="t"/>
           <a:lstStyle/>
           <a:p>
-            <a:pPr indent="0" marL="0">
+            <a:pPr marL="0" indent="0">
               <a:buNone/>
             </a:pPr>
             <a:r>
@@ -3285,7 +3091,7 @@
           <a:bodyPr wrap="square" lIns="0" tIns="0" rIns="0" bIns="0" rtlCol="0" anchor="t"/>
           <a:lstStyle/>
           <a:p>
-            <a:pPr algn="r" indent="0" marL="0">
+            <a:pPr marL="0" indent="0" algn="r">
               <a:buNone/>
             </a:pPr>
             <a:r>
@@ -3324,7 +3130,7 @@
           <a:bodyPr wrap="square" lIns="0" tIns="0" rIns="0" bIns="0" rtlCol="0" anchor="t"/>
           <a:lstStyle/>
           <a:p>
-            <a:pPr indent="0" marL="0">
+            <a:pPr marL="0" indent="0">
               <a:buNone/>
             </a:pPr>
             <a:r>
@@ -3363,7 +3169,7 @@
           <a:bodyPr wrap="square" lIns="0" tIns="0" rIns="0" bIns="0" rtlCol="0" anchor="t"/>
           <a:lstStyle/>
           <a:p>
-            <a:pPr indent="0" marL="0">
+            <a:pPr marL="0" indent="0">
               <a:buNone/>
             </a:pPr>
             <a:r>
@@ -3402,7 +3208,7 @@
           <a:bodyPr wrap="square" lIns="0" tIns="0" rIns="0" bIns="0" rtlCol="0" anchor="t"/>
           <a:lstStyle/>
           <a:p>
-            <a:pPr indent="0" marL="0">
+            <a:pPr marL="0" indent="0">
               <a:buNone/>
             </a:pPr>
             <a:r>
@@ -3464,7 +3270,7 @@
           <a:bodyPr wrap="square" lIns="0" tIns="0" rIns="0" bIns="0" rtlCol="0" anchor="t"/>
           <a:lstStyle/>
           <a:p>
-            <a:pPr indent="0" marL="0">
+            <a:pPr marL="0" indent="0">
               <a:buNone/>
             </a:pPr>
             <a:r>
@@ -3503,7 +3309,7 @@
           <a:bodyPr wrap="square" lIns="0" tIns="0" rIns="0" bIns="0" rtlCol="0" anchor="t"/>
           <a:lstStyle/>
           <a:p>
-            <a:pPr indent="0" marL="0">
+            <a:pPr marL="0" indent="0">
               <a:buNone/>
             </a:pPr>
             <a:r>
@@ -3542,7 +3348,7 @@
           <a:bodyPr wrap="square" lIns="0" tIns="0" rIns="0" bIns="0" rtlCol="0" anchor="t"/>
           <a:lstStyle/>
           <a:p>
-            <a:pPr indent="0" marL="0">
+            <a:pPr marL="0" indent="0">
               <a:buNone/>
             </a:pPr>
             <a:r>
@@ -3604,7 +3410,7 @@
           <a:bodyPr wrap="square" lIns="0" tIns="0" rIns="0" bIns="0" rtlCol="0" anchor="t"/>
           <a:lstStyle/>
           <a:p>
-            <a:pPr indent="0" marL="0">
+            <a:pPr marL="0" indent="0">
               <a:buNone/>
             </a:pPr>
             <a:r>
@@ -3643,7 +3449,7 @@
           <a:bodyPr wrap="square" lIns="0" tIns="0" rIns="0" bIns="0" rtlCol="0" anchor="t"/>
           <a:lstStyle/>
           <a:p>
-            <a:pPr indent="0" marL="0">
+            <a:pPr marL="0" indent="0">
               <a:buNone/>
             </a:pPr>
             <a:r>
@@ -3682,7 +3488,7 @@
           <a:bodyPr wrap="square" lIns="0" tIns="0" rIns="0" bIns="0" rtlCol="0" anchor="t"/>
           <a:lstStyle/>
           <a:p>
-            <a:pPr indent="0" marL="0">
+            <a:pPr marL="0" indent="0">
               <a:buNone/>
             </a:pPr>
             <a:r>
@@ -3699,7 +3505,7 @@
             <a:endParaRPr lang="es-PE" sz="2000" dirty="0"/>
           </a:p>
           <a:p>
-            <a:pPr indent="0" marL="0">
+            <a:pPr marL="0" indent="0">
               <a:buNone/>
             </a:pPr>
             <a:r>
@@ -3761,7 +3567,7 @@
           <a:bodyPr wrap="square" lIns="0" tIns="0" rIns="0" bIns="0" rtlCol="0" anchor="t"/>
           <a:lstStyle/>
           <a:p>
-            <a:pPr indent="0" marL="0">
+            <a:pPr marL="0" indent="0">
               <a:buNone/>
             </a:pPr>
             <a:r>
@@ -3800,7 +3606,7 @@
           <a:bodyPr wrap="square" lIns="0" tIns="0" rIns="0" bIns="0" rtlCol="0" anchor="t"/>
           <a:lstStyle/>
           <a:p>
-            <a:pPr indent="0" marL="0">
+            <a:pPr marL="0" indent="0">
               <a:buNone/>
             </a:pPr>
             <a:r>
@@ -3839,7 +3645,7 @@
           <a:bodyPr wrap="square" lIns="0" tIns="0" rIns="0" bIns="0" rtlCol="0" anchor="t"/>
           <a:lstStyle/>
           <a:p>
-            <a:pPr indent="0" marL="0">
+            <a:pPr marL="0" indent="0">
               <a:buNone/>
             </a:pPr>
             <a:r>
@@ -3856,7 +3662,7 @@
             <a:endParaRPr lang="es-PE" sz="2000" dirty="0"/>
           </a:p>
           <a:p>
-            <a:pPr indent="0" marL="0">
+            <a:pPr marL="0" indent="0">
               <a:buNone/>
             </a:pPr>
             <a:r>
@@ -3918,7 +3724,7 @@
           <a:bodyPr wrap="square" lIns="0" tIns="0" rIns="0" bIns="0" rtlCol="0" anchor="t"/>
           <a:lstStyle/>
           <a:p>
-            <a:pPr indent="0" marL="0">
+            <a:pPr marL="0" indent="0">
               <a:buNone/>
             </a:pPr>
             <a:r>
@@ -3957,7 +3763,7 @@
           <a:bodyPr wrap="square" lIns="0" tIns="0" rIns="0" bIns="0" rtlCol="0" anchor="t"/>
           <a:lstStyle/>
           <a:p>
-            <a:pPr indent="0" marL="0">
+            <a:pPr marL="0" indent="0">
               <a:buNone/>
             </a:pPr>
             <a:r>
@@ -3974,7 +3780,7 @@
             <a:endParaRPr lang="es-PE" sz="1900" dirty="0"/>
           </a:p>
           <a:p>
-            <a:pPr indent="0" marL="0">
+            <a:pPr marL="0" indent="0">
               <a:buNone/>
             </a:pPr>
             <a:r>
@@ -3991,7 +3797,7 @@
             <a:endParaRPr lang="es-PE" sz="1900" dirty="0"/>
           </a:p>
           <a:p>
-            <a:pPr indent="0" marL="0">
+            <a:pPr marL="0" indent="0">
               <a:buNone/>
             </a:pPr>
             <a:r>
@@ -4030,7 +3836,7 @@
           <a:bodyPr wrap="square" lIns="0" tIns="0" rIns="0" bIns="0" rtlCol="0" anchor="t"/>
           <a:lstStyle/>
           <a:p>
-            <a:pPr indent="0" marL="0">
+            <a:pPr marL="0" indent="0">
               <a:buNone/>
             </a:pPr>
             <a:r>
@@ -4069,7 +3875,7 @@
           <a:bodyPr wrap="square" lIns="0" tIns="0" rIns="0" bIns="0" rtlCol="0" anchor="t"/>
           <a:lstStyle/>
           <a:p>
-            <a:pPr indent="0" marL="0">
+            <a:pPr marL="0" indent="0">
               <a:buNone/>
             </a:pPr>
             <a:r>
@@ -4086,7 +3892,7 @@
             <a:endParaRPr lang="es-PE" sz="1900" dirty="0"/>
           </a:p>
           <a:p>
-            <a:pPr indent="0" marL="0">
+            <a:pPr marL="0" indent="0">
               <a:buNone/>
             </a:pPr>
             <a:r>
@@ -4103,7 +3909,7 @@
             <a:endParaRPr lang="es-PE" sz="1900" dirty="0"/>
           </a:p>
           <a:p>
-            <a:pPr indent="0" marL="0">
+            <a:pPr marL="0" indent="0">
               <a:buNone/>
             </a:pPr>
             <a:r>
@@ -4142,7 +3948,7 @@
           <a:bodyPr wrap="square" lIns="0" tIns="0" rIns="0" bIns="0" rtlCol="0" anchor="t"/>
           <a:lstStyle/>
           <a:p>
-            <a:pPr indent="0" marL="0">
+            <a:pPr marL="0" indent="0">
               <a:buNone/>
             </a:pPr>
             <a:r>
@@ -4181,7 +3987,7 @@
           <a:bodyPr wrap="square" lIns="0" tIns="0" rIns="0" bIns="0" rtlCol="0" anchor="t"/>
           <a:lstStyle/>
           <a:p>
-            <a:pPr indent="0" marL="0">
+            <a:pPr marL="0" indent="0">
               <a:buNone/>
             </a:pPr>
             <a:r>
@@ -4198,7 +4004,7 @@
             <a:endParaRPr lang="es-PE" sz="1900" dirty="0"/>
           </a:p>
           <a:p>
-            <a:pPr indent="0" marL="0">
+            <a:pPr marL="0" indent="0">
               <a:buNone/>
             </a:pPr>
             <a:r>
@@ -4215,7 +4021,7 @@
             <a:endParaRPr lang="es-PE" sz="1900" dirty="0"/>
           </a:p>
           <a:p>
-            <a:pPr indent="0" marL="0">
+            <a:pPr marL="0" indent="0">
               <a:buNone/>
             </a:pPr>
             <a:r>
@@ -4254,7 +4060,7 @@
           <a:bodyPr wrap="square" lIns="0" tIns="0" rIns="0" bIns="0" rtlCol="0" anchor="t"/>
           <a:lstStyle/>
           <a:p>
-            <a:pPr indent="0" marL="0">
+            <a:pPr marL="0" indent="0">
               <a:buNone/>
             </a:pPr>
             <a:r>
@@ -4293,7 +4099,7 @@
           <a:bodyPr wrap="square" lIns="0" tIns="0" rIns="0" bIns="0" rtlCol="0" anchor="t"/>
           <a:lstStyle/>
           <a:p>
-            <a:pPr indent="0" marL="0">
+            <a:pPr marL="0" indent="0">
               <a:buNone/>
             </a:pPr>
             <a:r>
@@ -4327,6 +4133,7 @@
         <a:solidFill>
           <a:srgbClr val="FFFFFF"/>
         </a:solidFill>
+        <a:effectLst/>
       </p:bgPr>
     </p:bg>
     <p:spTree>
@@ -4364,7 +4171,7 @@
           <a:bodyPr wrap="square" lIns="0" tIns="0" rIns="0" bIns="0" rtlCol="0" anchor="t"/>
           <a:lstStyle/>
           <a:p>
-            <a:pPr indent="0" marL="0">
+            <a:pPr marL="0" indent="0">
               <a:buNone/>
             </a:pPr>
             <a:r>
@@ -4403,7 +4210,7 @@
           <a:bodyPr wrap="square" lIns="0" tIns="0" rIns="0" bIns="0" rtlCol="0" anchor="t"/>
           <a:lstStyle/>
           <a:p>
-            <a:pPr indent="0" marL="0">
+            <a:pPr marL="0" indent="0">
               <a:buNone/>
             </a:pPr>
             <a:r>
@@ -4442,7 +4249,7 @@
           <a:bodyPr wrap="square" lIns="0" tIns="0" rIns="0" bIns="0" rtlCol="0" anchor="t"/>
           <a:lstStyle/>
           <a:p>
-            <a:pPr indent="0" marL="0">
+            <a:pPr marL="0" indent="0">
               <a:buNone/>
             </a:pPr>
             <a:r>
@@ -4504,7 +4311,7 @@
           <a:bodyPr wrap="square" lIns="0" tIns="0" rIns="0" bIns="0" rtlCol="0" anchor="t"/>
           <a:lstStyle/>
           <a:p>
-            <a:pPr algn="r" indent="0" marL="0">
+            <a:pPr marL="0" indent="0" algn="r">
               <a:buNone/>
             </a:pPr>
             <a:r>
@@ -4568,7 +4375,7 @@
           <a:bodyPr wrap="square" lIns="0" tIns="0" rIns="0" bIns="0" rtlCol="0" anchor="t"/>
           <a:lstStyle/>
           <a:p>
-            <a:pPr indent="0" marL="0">
+            <a:pPr marL="0" indent="0">
               <a:buNone/>
             </a:pPr>
             <a:r>
@@ -4607,7 +4414,7 @@
           <a:bodyPr wrap="square" lIns="0" tIns="0" rIns="0" bIns="0" rtlCol="0" anchor="t"/>
           <a:lstStyle/>
           <a:p>
-            <a:pPr indent="0" marL="0">
+            <a:pPr marL="0" indent="0">
               <a:buNone/>
             </a:pPr>
             <a:r>
@@ -4646,7 +4453,7 @@
           <a:bodyPr wrap="square" lIns="0" tIns="0" rIns="0" bIns="0" rtlCol="0" anchor="t"/>
           <a:lstStyle/>
           <a:p>
-            <a:pPr indent="0" marL="0">
+            <a:pPr marL="0" indent="0">
               <a:buNone/>
             </a:pPr>
             <a:r>
@@ -4710,7 +4517,7 @@
           <a:bodyPr wrap="square" lIns="0" tIns="0" rIns="0" bIns="0" rtlCol="0" anchor="t"/>
           <a:lstStyle/>
           <a:p>
-            <a:pPr indent="0" marL="0">
+            <a:pPr marL="0" indent="0">
               <a:buNone/>
             </a:pPr>
             <a:r>
@@ -4774,7 +4581,7 @@
           <a:bodyPr wrap="square" lIns="0" tIns="0" rIns="0" bIns="0" rtlCol="0" anchor="t"/>
           <a:lstStyle/>
           <a:p>
-            <a:pPr indent="0" marL="0">
+            <a:pPr marL="0" indent="0">
               <a:buNone/>
             </a:pPr>
             <a:r>
@@ -4813,7 +4620,7 @@
           <a:bodyPr wrap="square" lIns="0" tIns="0" rIns="0" bIns="0" rtlCol="0" anchor="t"/>
           <a:lstStyle/>
           <a:p>
-            <a:pPr indent="0" marL="0">
+            <a:pPr marL="0" indent="0">
               <a:buNone/>
             </a:pPr>
             <a:r>
@@ -4877,7 +4684,7 @@
           <a:bodyPr wrap="square" lIns="0" tIns="0" rIns="0" bIns="0" rtlCol="0" anchor="t"/>
           <a:lstStyle/>
           <a:p>
-            <a:pPr indent="0" marL="0">
+            <a:pPr marL="0" indent="0">
               <a:buNone/>
             </a:pPr>
             <a:r>
@@ -4916,7 +4723,7 @@
           <a:bodyPr wrap="square" lIns="0" tIns="0" rIns="0" bIns="0" rtlCol="0" anchor="t"/>
           <a:lstStyle/>
           <a:p>
-            <a:pPr indent="0" marL="0">
+            <a:pPr marL="0" indent="0">
               <a:buNone/>
             </a:pPr>
             <a:r>
@@ -4980,7 +4787,7 @@
           <a:bodyPr wrap="square" lIns="0" tIns="0" rIns="0" bIns="0" rtlCol="0" anchor="t"/>
           <a:lstStyle/>
           <a:p>
-            <a:pPr indent="0" marL="0">
+            <a:pPr marL="0" indent="0">
               <a:buNone/>
             </a:pPr>
             <a:r>
@@ -5019,7 +4826,7 @@
           <a:bodyPr wrap="square" lIns="0" tIns="0" rIns="0" bIns="0" rtlCol="0" anchor="t"/>
           <a:lstStyle/>
           <a:p>
-            <a:pPr indent="0" marL="0">
+            <a:pPr marL="0" indent="0">
               <a:buNone/>
             </a:pPr>
             <a:r>
@@ -5083,7 +4890,7 @@
           <a:bodyPr wrap="square" lIns="0" tIns="0" rIns="0" bIns="0" rtlCol="0" anchor="t"/>
           <a:lstStyle/>
           <a:p>
-            <a:pPr indent="0" marL="0">
+            <a:pPr marL="0" indent="0">
               <a:buNone/>
             </a:pPr>
             <a:r>
@@ -5122,7 +4929,7 @@
           <a:bodyPr wrap="square" lIns="0" tIns="0" rIns="0" bIns="0" rtlCol="0" anchor="t"/>
           <a:lstStyle/>
           <a:p>
-            <a:pPr indent="0" marL="0">
+            <a:pPr marL="0" indent="0">
               <a:buNone/>
             </a:pPr>
             <a:r>
@@ -5185,7 +4992,7 @@
           <a:bodyPr wrap="square" lIns="0" tIns="0" rIns="0" bIns="0" rtlCol="0" anchor="t"/>
           <a:lstStyle/>
           <a:p>
-            <a:pPr indent="0" marL="0">
+            <a:pPr marL="0" indent="0">
               <a:buNone/>
             </a:pPr>
             <a:r>
@@ -5320,7 +5127,7 @@
           <a:bodyPr wrap="square" lIns="0" tIns="0" rIns="0" bIns="0" rtlCol="0" anchor="t"/>
           <a:lstStyle/>
           <a:p>
-            <a:pPr indent="0" marL="0">
+            <a:pPr marL="0" indent="0">
               <a:buNone/>
             </a:pPr>
             <a:r>
@@ -5359,7 +5166,7 @@
           <a:bodyPr wrap="square" lIns="0" tIns="0" rIns="0" bIns="0" rtlCol="0" anchor="t"/>
           <a:lstStyle/>
           <a:p>
-            <a:pPr indent="0" marL="0">
+            <a:pPr marL="0" indent="0">
               <a:buNone/>
             </a:pPr>
             <a:r>
@@ -5398,7 +5205,7 @@
           <a:bodyPr wrap="square" lIns="0" tIns="0" rIns="0" bIns="0" rtlCol="0" anchor="t"/>
           <a:lstStyle/>
           <a:p>
-            <a:pPr indent="0" marL="0">
+            <a:pPr marL="0" indent="0">
               <a:buNone/>
             </a:pPr>
             <a:r>
@@ -5437,7 +5244,7 @@
           <a:bodyPr wrap="square" lIns="0" tIns="0" rIns="0" bIns="0" rtlCol="0" anchor="t"/>
           <a:lstStyle/>
           <a:p>
-            <a:pPr indent="0" marL="0">
+            <a:pPr marL="0" indent="0">
               <a:buNone/>
             </a:pPr>
             <a:r>
@@ -5471,6 +5278,7 @@
         <a:solidFill>
           <a:srgbClr val="FFFFFF"/>
         </a:solidFill>
+        <a:effectLst/>
       </p:bgPr>
     </p:bg>
     <p:spTree>
@@ -5508,7 +5316,7 @@
           <a:bodyPr wrap="square" lIns="0" tIns="0" rIns="0" bIns="0" rtlCol="0" anchor="t"/>
           <a:lstStyle/>
           <a:p>
-            <a:pPr indent="0" marL="0">
+            <a:pPr marL="0" indent="0">
               <a:buNone/>
             </a:pPr>
             <a:r>
@@ -5547,7 +5355,7 @@
           <a:bodyPr wrap="square" lIns="0" tIns="0" rIns="0" bIns="0" rtlCol="0" anchor="t"/>
           <a:lstStyle/>
           <a:p>
-            <a:pPr indent="0" marL="0">
+            <a:pPr marL="0" indent="0">
               <a:buNone/>
             </a:pPr>
             <a:r>
@@ -5586,7 +5394,7 @@
           <a:bodyPr wrap="square" lIns="0" tIns="0" rIns="0" bIns="0" rtlCol="0" anchor="t"/>
           <a:lstStyle/>
           <a:p>
-            <a:pPr indent="0" marL="0">
+            <a:pPr marL="0" indent="0">
               <a:buNone/>
             </a:pPr>
             <a:r>
@@ -5648,7 +5456,7 @@
           <a:bodyPr wrap="square" lIns="0" tIns="0" rIns="0" bIns="0" rtlCol="0" anchor="t"/>
           <a:lstStyle/>
           <a:p>
-            <a:pPr algn="r" indent="0" marL="0">
+            <a:pPr marL="0" indent="0" algn="r">
               <a:buNone/>
             </a:pPr>
             <a:r>
@@ -5712,7 +5520,7 @@
           <a:bodyPr wrap="square" lIns="0" tIns="0" rIns="0" bIns="0" rtlCol="0" anchor="t"/>
           <a:lstStyle/>
           <a:p>
-            <a:pPr indent="0" marL="0">
+            <a:pPr marL="0" indent="0">
               <a:buNone/>
             </a:pPr>
             <a:r>
@@ -5751,7 +5559,7 @@
           <a:bodyPr wrap="square" lIns="0" tIns="0" rIns="0" bIns="0" rtlCol="0" anchor="t"/>
           <a:lstStyle/>
           <a:p>
-            <a:pPr indent="0" marL="0">
+            <a:pPr marL="0" indent="0">
               <a:buNone/>
             </a:pPr>
             <a:r>
@@ -5790,7 +5598,7 @@
           <a:bodyPr wrap="square" lIns="0" tIns="0" rIns="0" bIns="0" rtlCol="0" anchor="t"/>
           <a:lstStyle/>
           <a:p>
-            <a:pPr indent="0" marL="0">
+            <a:pPr marL="0" indent="0">
               <a:buNone/>
             </a:pPr>
             <a:r>
@@ -5854,7 +5662,7 @@
           <a:bodyPr wrap="square" lIns="0" tIns="0" rIns="0" bIns="0" rtlCol="0" anchor="t"/>
           <a:lstStyle/>
           <a:p>
-            <a:pPr indent="0" marL="0">
+            <a:pPr marL="0" indent="0">
               <a:buNone/>
             </a:pPr>
             <a:r>
@@ -5893,7 +5701,7 @@
           <a:bodyPr wrap="square" lIns="0" tIns="0" rIns="0" bIns="0" rtlCol="0" anchor="t"/>
           <a:lstStyle/>
           <a:p>
-            <a:pPr indent="0" marL="0">
+            <a:pPr marL="0" indent="0">
               <a:buNone/>
             </a:pPr>
             <a:r>
@@ -5957,7 +5765,7 @@
           <a:bodyPr wrap="square" lIns="0" tIns="0" rIns="0" bIns="0" rtlCol="0" anchor="t"/>
           <a:lstStyle/>
           <a:p>
-            <a:pPr indent="0" marL="0">
+            <a:pPr marL="0" indent="0">
               <a:buNone/>
             </a:pPr>
             <a:r>
@@ -5996,7 +5804,7 @@
           <a:bodyPr wrap="square" lIns="0" tIns="0" rIns="0" bIns="0" rtlCol="0" anchor="t"/>
           <a:lstStyle/>
           <a:p>
-            <a:pPr indent="0" marL="0">
+            <a:pPr marL="0" indent="0">
               <a:buNone/>
             </a:pPr>
             <a:r>
@@ -6060,7 +5868,7 @@
           <a:bodyPr wrap="square" lIns="0" tIns="0" rIns="0" bIns="0" rtlCol="0" anchor="t"/>
           <a:lstStyle/>
           <a:p>
-            <a:pPr indent="0" marL="0">
+            <a:pPr marL="0" indent="0">
               <a:buNone/>
             </a:pPr>
             <a:r>
@@ -6099,7 +5907,7 @@
           <a:bodyPr wrap="square" lIns="0" tIns="0" rIns="0" bIns="0" rtlCol="0" anchor="t"/>
           <a:lstStyle/>
           <a:p>
-            <a:pPr indent="0" marL="0">
+            <a:pPr marL="0" indent="0">
               <a:buNone/>
             </a:pPr>
             <a:r>
@@ -6116,7 +5924,7 @@
             <a:endParaRPr lang="es-PE" sz="1800" dirty="0"/>
           </a:p>
           <a:p>
-            <a:pPr indent="0" marL="0">
+            <a:pPr marL="0" indent="0">
               <a:buNone/>
             </a:pPr>
             <a:r>
@@ -6179,7 +5987,7 @@
           <a:bodyPr wrap="square" lIns="0" tIns="0" rIns="0" bIns="0" rtlCol="0" anchor="t"/>
           <a:lstStyle/>
           <a:p>
-            <a:pPr indent="0" marL="0">
+            <a:pPr marL="0" indent="0">
               <a:buNone/>
             </a:pPr>
             <a:r>
@@ -6242,7 +6050,7 @@
           <a:bodyPr wrap="square" lIns="0" tIns="0" rIns="0" bIns="0" rtlCol="0" anchor="t"/>
           <a:lstStyle/>
           <a:p>
-            <a:pPr indent="0" marL="0">
+            <a:pPr marL="0" indent="0">
               <a:buNone/>
             </a:pPr>
             <a:r>
@@ -6328,7 +6136,7 @@
           <a:bodyPr wrap="square" lIns="0" tIns="0" rIns="0" bIns="0" rtlCol="0" anchor="t"/>
           <a:lstStyle/>
           <a:p>
-            <a:pPr indent="0" marL="0">
+            <a:pPr marL="0" indent="0">
               <a:buNone/>
             </a:pPr>
             <a:r>
@@ -6437,7 +6245,7 @@
           <a:bodyPr wrap="square" lIns="0" tIns="0" rIns="0" bIns="0" rtlCol="0" anchor="t"/>
           <a:lstStyle/>
           <a:p>
-            <a:pPr indent="0" marL="0">
+            <a:pPr marL="0" indent="0">
               <a:buNone/>
             </a:pPr>
             <a:r>
@@ -6501,7 +6309,7 @@
           <a:bodyPr wrap="square" lIns="0" tIns="0" rIns="0" bIns="0" rtlCol="0" anchor="t"/>
           <a:lstStyle/>
           <a:p>
-            <a:pPr indent="0" marL="0">
+            <a:pPr marL="0" indent="0">
               <a:buNone/>
             </a:pPr>
             <a:r>
@@ -6540,7 +6348,7 @@
           <a:bodyPr wrap="square" lIns="0" tIns="0" rIns="0" bIns="0" rtlCol="0" anchor="t"/>
           <a:lstStyle/>
           <a:p>
-            <a:pPr indent="0" marL="0">
+            <a:pPr marL="0" indent="0">
               <a:buNone/>
             </a:pPr>
             <a:r>
@@ -6604,7 +6412,7 @@
           <a:bodyPr wrap="square" lIns="0" tIns="0" rIns="0" bIns="0" rtlCol="0" anchor="t"/>
           <a:lstStyle/>
           <a:p>
-            <a:pPr indent="0" marL="0">
+            <a:pPr marL="0" indent="0">
               <a:buNone/>
             </a:pPr>
             <a:r>
@@ -6643,7 +6451,7 @@
           <a:bodyPr wrap="square" lIns="0" tIns="0" rIns="0" bIns="0" rtlCol="0" anchor="t"/>
           <a:lstStyle/>
           <a:p>
-            <a:pPr indent="0" marL="0">
+            <a:pPr marL="0" indent="0">
               <a:buNone/>
             </a:pPr>
             <a:r>
@@ -6706,7 +6514,7 @@
           <a:bodyPr wrap="square" lIns="0" tIns="0" rIns="0" bIns="0" rtlCol="0" anchor="t"/>
           <a:lstStyle/>
           <a:p>
-            <a:pPr indent="0" marL="0">
+            <a:pPr marL="0" indent="0">
               <a:buNone/>
             </a:pPr>
             <a:r>
@@ -6740,6 +6548,7 @@
         <a:solidFill>
           <a:srgbClr val="FFFFFF"/>
         </a:solidFill>
+        <a:effectLst/>
       </p:bgPr>
     </p:bg>
     <p:spTree>
@@ -6777,7 +6586,7 @@
           <a:bodyPr wrap="square" lIns="0" tIns="0" rIns="0" bIns="0" rtlCol="0" anchor="t"/>
           <a:lstStyle/>
           <a:p>
-            <a:pPr indent="0" marL="0">
+            <a:pPr marL="0" indent="0">
               <a:buNone/>
             </a:pPr>
             <a:r>
@@ -6816,7 +6625,7 @@
           <a:bodyPr wrap="square" lIns="0" tIns="0" rIns="0" bIns="0" rtlCol="0" anchor="t"/>
           <a:lstStyle/>
           <a:p>
-            <a:pPr indent="0" marL="0">
+            <a:pPr marL="0" indent="0">
               <a:buNone/>
             </a:pPr>
             <a:r>
@@ -6855,7 +6664,7 @@
           <a:bodyPr wrap="square" lIns="0" tIns="0" rIns="0" bIns="0" rtlCol="0" anchor="t"/>
           <a:lstStyle/>
           <a:p>
-            <a:pPr indent="0" marL="0">
+            <a:pPr marL="0" indent="0">
               <a:buNone/>
             </a:pPr>
             <a:r>
@@ -6917,7 +6726,7 @@
           <a:bodyPr wrap="square" lIns="0" tIns="0" rIns="0" bIns="0" rtlCol="0" anchor="t"/>
           <a:lstStyle/>
           <a:p>
-            <a:pPr algn="r" indent="0" marL="0">
+            <a:pPr marL="0" indent="0" algn="r">
               <a:buNone/>
             </a:pPr>
             <a:r>
@@ -6981,7 +6790,7 @@
           <a:bodyPr wrap="square" lIns="0" tIns="0" rIns="0" bIns="0" rtlCol="0" anchor="t"/>
           <a:lstStyle/>
           <a:p>
-            <a:pPr indent="0" marL="0">
+            <a:pPr marL="0" indent="0">
               <a:buNone/>
             </a:pPr>
             <a:r>
@@ -7020,7 +6829,7 @@
           <a:bodyPr wrap="square" lIns="0" tIns="0" rIns="0" bIns="0" rtlCol="0" anchor="t"/>
           <a:lstStyle/>
           <a:p>
-            <a:pPr indent="0" marL="0">
+            <a:pPr marL="0" indent="0">
               <a:buNone/>
             </a:pPr>
             <a:r>
@@ -7084,7 +6893,7 @@
           <a:bodyPr wrap="square" lIns="0" tIns="0" rIns="0" bIns="0" rtlCol="0" anchor="t"/>
           <a:lstStyle/>
           <a:p>
-            <a:pPr indent="0" marL="0">
+            <a:pPr marL="0" indent="0">
               <a:buNone/>
             </a:pPr>
             <a:r>
@@ -7148,7 +6957,7 @@
           <a:bodyPr wrap="square" lIns="0" tIns="0" rIns="0" bIns="0" rtlCol="0" anchor="t"/>
           <a:lstStyle/>
           <a:p>
-            <a:pPr indent="0" marL="0">
+            <a:pPr marL="0" indent="0">
               <a:buNone/>
             </a:pPr>
             <a:r>
@@ -7187,7 +6996,7 @@
           <a:bodyPr wrap="square" lIns="0" tIns="0" rIns="0" bIns="0" rtlCol="0" anchor="t"/>
           <a:lstStyle/>
           <a:p>
-            <a:pPr indent="0" marL="0">
+            <a:pPr marL="0" indent="0">
               <a:buNone/>
             </a:pPr>
             <a:r>
@@ -7251,7 +7060,7 @@
           <a:bodyPr wrap="square" lIns="0" tIns="0" rIns="0" bIns="0" rtlCol="0" anchor="t"/>
           <a:lstStyle/>
           <a:p>
-            <a:pPr indent="0" marL="0">
+            <a:pPr marL="0" indent="0">
               <a:buNone/>
             </a:pPr>
             <a:r>
@@ -7315,7 +7124,7 @@
           <a:bodyPr wrap="square" lIns="0" tIns="0" rIns="0" bIns="0" rtlCol="0" anchor="t"/>
           <a:lstStyle/>
           <a:p>
-            <a:pPr indent="0" marL="0">
+            <a:pPr marL="0" indent="0">
               <a:buNone/>
             </a:pPr>
             <a:r>
@@ -7354,7 +7163,7 @@
           <a:bodyPr wrap="square" lIns="0" tIns="0" rIns="0" bIns="0" rtlCol="0" anchor="t"/>
           <a:lstStyle/>
           <a:p>
-            <a:pPr indent="0" marL="0">
+            <a:pPr marL="0" indent="0">
               <a:buNone/>
             </a:pPr>
             <a:r>
@@ -7441,7 +7250,7 @@
           <a:bodyPr wrap="square" lIns="0" tIns="0" rIns="0" bIns="0" rtlCol="0" anchor="t"/>
           <a:lstStyle/>
           <a:p>
-            <a:pPr indent="0" marL="0">
+            <a:pPr marL="0" indent="0">
               <a:buNone/>
             </a:pPr>
             <a:r>
@@ -7480,7 +7289,7 @@
           <a:bodyPr wrap="square" lIns="0" tIns="0" rIns="0" bIns="0" rtlCol="0" anchor="t"/>
           <a:lstStyle/>
           <a:p>
-            <a:pPr indent="0" marL="0">
+            <a:pPr marL="0" indent="0">
               <a:buNone/>
             </a:pPr>
             <a:r>
@@ -7544,7 +7353,7 @@
           <a:bodyPr wrap="square" lIns="0" tIns="0" rIns="0" bIns="0" rtlCol="0" anchor="t"/>
           <a:lstStyle/>
           <a:p>
-            <a:pPr indent="0" marL="0">
+            <a:pPr marL="0" indent="0">
               <a:buNone/>
             </a:pPr>
             <a:r>
@@ -7608,7 +7417,7 @@
           <a:bodyPr wrap="square" lIns="0" tIns="0" rIns="0" bIns="0" rtlCol="0" anchor="t"/>
           <a:lstStyle/>
           <a:p>
-            <a:pPr indent="0" marL="0">
+            <a:pPr marL="0" indent="0">
               <a:buNone/>
             </a:pPr>
             <a:r>
@@ -7647,7 +7456,7 @@
           <a:bodyPr wrap="square" lIns="0" tIns="0" rIns="0" bIns="0" rtlCol="0" anchor="t"/>
           <a:lstStyle/>
           <a:p>
-            <a:pPr indent="0" marL="0">
+            <a:pPr marL="0" indent="0">
               <a:buNone/>
             </a:pPr>
             <a:r>
@@ -7711,7 +7520,7 @@
           <a:bodyPr wrap="square" lIns="0" tIns="0" rIns="0" bIns="0" rtlCol="0" anchor="t"/>
           <a:lstStyle/>
           <a:p>
-            <a:pPr indent="0" marL="0">
+            <a:pPr marL="0" indent="0">
               <a:buNone/>
             </a:pPr>
             <a:r>
@@ -7750,7 +7559,7 @@
           <a:bodyPr wrap="square" lIns="0" tIns="0" rIns="0" bIns="0" rtlCol="0" anchor="t"/>
           <a:lstStyle/>
           <a:p>
-            <a:pPr indent="0" marL="0">
+            <a:pPr marL="0" indent="0">
               <a:buNone/>
             </a:pPr>
             <a:r>
@@ -7837,7 +7646,7 @@
           <a:bodyPr wrap="square" lIns="0" tIns="0" rIns="0" bIns="0" rtlCol="0" anchor="t"/>
           <a:lstStyle/>
           <a:p>
-            <a:pPr indent="0" marL="0">
+            <a:pPr marL="0" indent="0">
               <a:buNone/>
             </a:pPr>
             <a:r>
@@ -7876,7 +7685,7 @@
           <a:bodyPr wrap="square" lIns="0" tIns="0" rIns="0" bIns="0" rtlCol="0" anchor="t"/>
           <a:lstStyle/>
           <a:p>
-            <a:pPr indent="0" marL="0">
+            <a:pPr marL="0" indent="0">
               <a:buNone/>
             </a:pPr>
             <a:r>
@@ -7915,7 +7724,7 @@
           <a:bodyPr wrap="square" lIns="0" tIns="0" rIns="0" bIns="0" rtlCol="0" anchor="t"/>
           <a:lstStyle/>
           <a:p>
-            <a:pPr indent="0" marL="0">
+            <a:pPr marL="0" indent="0">
               <a:buNone/>
             </a:pPr>
             <a:r>
@@ -7954,7 +7763,7 @@
           <a:bodyPr wrap="square" lIns="0" tIns="0" rIns="0" bIns="0" rtlCol="0" anchor="t"/>
           <a:lstStyle/>
           <a:p>
-            <a:pPr indent="0" marL="0">
+            <a:pPr marL="0" indent="0">
               <a:buNone/>
             </a:pPr>
             <a:r>
@@ -7993,7 +7802,7 @@
           <a:bodyPr wrap="square" lIns="0" tIns="0" rIns="0" bIns="0" rtlCol="0" anchor="t"/>
           <a:lstStyle/>
           <a:p>
-            <a:pPr indent="0" marL="0">
+            <a:pPr marL="0" indent="0">
               <a:buNone/>
             </a:pPr>
             <a:r>
@@ -8027,6 +7836,7 @@
         <a:solidFill>
           <a:srgbClr val="FFFFFF"/>
         </a:solidFill>
+        <a:effectLst/>
       </p:bgPr>
     </p:bg>
     <p:spTree>
@@ -8064,7 +7874,7 @@
           <a:bodyPr wrap="square" lIns="0" tIns="0" rIns="0" bIns="0" rtlCol="0" anchor="t"/>
           <a:lstStyle/>
           <a:p>
-            <a:pPr indent="0" marL="0">
+            <a:pPr marL="0" indent="0">
               <a:buNone/>
             </a:pPr>
             <a:r>
@@ -8103,7 +7913,7 @@
           <a:bodyPr wrap="square" lIns="0" tIns="0" rIns="0" bIns="0" rtlCol="0" anchor="t"/>
           <a:lstStyle/>
           <a:p>
-            <a:pPr indent="0" marL="0">
+            <a:pPr marL="0" indent="0">
               <a:buNone/>
             </a:pPr>
             <a:r>
@@ -8142,7 +7952,7 @@
           <a:bodyPr wrap="square" lIns="0" tIns="0" rIns="0" bIns="0" rtlCol="0" anchor="t"/>
           <a:lstStyle/>
           <a:p>
-            <a:pPr indent="0" marL="0">
+            <a:pPr marL="0" indent="0">
               <a:buNone/>
             </a:pPr>
             <a:r>
@@ -8204,7 +8014,7 @@
           <a:bodyPr wrap="square" lIns="0" tIns="0" rIns="0" bIns="0" rtlCol="0" anchor="t"/>
           <a:lstStyle/>
           <a:p>
-            <a:pPr algn="r" indent="0" marL="0">
+            <a:pPr marL="0" indent="0" algn="r">
               <a:buNone/>
             </a:pPr>
             <a:r>
@@ -8243,7 +8053,7 @@
           <a:bodyPr wrap="square" lIns="0" tIns="0" rIns="0" bIns="0" rtlCol="0" anchor="t"/>
           <a:lstStyle/>
           <a:p>
-            <a:pPr indent="0" marL="0">
+            <a:pPr marL="0" indent="0">
               <a:buNone/>
             </a:pPr>
             <a:r>
@@ -8282,7 +8092,7 @@
           <a:bodyPr wrap="square" lIns="0" tIns="0" rIns="0" bIns="0" rtlCol="0" anchor="t"/>
           <a:lstStyle/>
           <a:p>
-            <a:pPr indent="0" marL="0">
+            <a:pPr marL="0" indent="0">
               <a:buNone/>
             </a:pPr>
             <a:r>
@@ -8346,7 +8156,7 @@
           <a:bodyPr wrap="square" lIns="0" tIns="0" rIns="0" bIns="0" rtlCol="0" anchor="t"/>
           <a:lstStyle/>
           <a:p>
-            <a:pPr algn="ctr" indent="0" marL="0">
+            <a:pPr marL="0" indent="0" algn="ctr">
               <a:buNone/>
             </a:pPr>
             <a:r>
@@ -8363,7 +8173,7 @@
             <a:endParaRPr lang="es-PE" sz="2500" dirty="0"/>
           </a:p>
           <a:p>
-            <a:pPr algn="ctr" indent="0" marL="0">
+            <a:pPr marL="0" indent="0" algn="ctr">
               <a:buNone/>
             </a:pPr>
             <a:r>
@@ -8402,7 +8212,7 @@
           <a:bodyPr wrap="square" lIns="0" tIns="0" rIns="0" bIns="0" rtlCol="0" anchor="t"/>
           <a:lstStyle/>
           <a:p>
-            <a:pPr algn="ctr" indent="0" marL="0">
+            <a:pPr marL="0" indent="0" algn="ctr">
               <a:buNone/>
             </a:pPr>
             <a:r>
@@ -8419,7 +8229,7 @@
             <a:endParaRPr lang="es-PE" sz="1800" dirty="0"/>
           </a:p>
           <a:p>
-            <a:pPr algn="ctr" indent="0" marL="0">
+            <a:pPr marL="0" indent="0" algn="ctr">
               <a:buNone/>
             </a:pPr>
             <a:r>
@@ -8458,7 +8268,7 @@
           <a:bodyPr wrap="square" lIns="0" tIns="0" rIns="0" bIns="0" rtlCol="0" anchor="t"/>
           <a:lstStyle/>
           <a:p>
-            <a:pPr indent="0" marL="0">
+            <a:pPr marL="0" indent="0">
               <a:buNone/>
             </a:pPr>
             <a:r>
@@ -8497,7 +8307,7 @@
           <a:bodyPr wrap="square" lIns="0" tIns="0" rIns="0" bIns="0" rtlCol="0" anchor="t"/>
           <a:lstStyle/>
           <a:p>
-            <a:pPr indent="0" marL="0">
+            <a:pPr marL="0" indent="0">
               <a:buNone/>
             </a:pPr>
             <a:r>
@@ -8536,7 +8346,7 @@
           <a:bodyPr wrap="square" lIns="0" tIns="0" rIns="0" bIns="0" rtlCol="0" anchor="t"/>
           <a:lstStyle/>
           <a:p>
-            <a:pPr indent="0" marL="0">
+            <a:pPr marL="0" indent="0">
               <a:buNone/>
             </a:pPr>
             <a:r>
@@ -8575,7 +8385,7 @@
           <a:bodyPr wrap="square" lIns="0" tIns="0" rIns="0" bIns="0" rtlCol="0" anchor="t"/>
           <a:lstStyle/>
           <a:p>
-            <a:pPr indent="0" marL="0">
+            <a:pPr marL="0" indent="0">
               <a:buNone/>
             </a:pPr>
             <a:r>
@@ -8592,7 +8402,7 @@
             <a:endParaRPr lang="es-PE" sz="2000" dirty="0"/>
           </a:p>
           <a:p>
-            <a:pPr indent="0" marL="0">
+            <a:pPr marL="0" indent="0">
               <a:buNone/>
             </a:pPr>
             <a:r>
@@ -8609,7 +8419,7 @@
             <a:endParaRPr lang="es-PE" sz="2000" dirty="0"/>
           </a:p>
           <a:p>
-            <a:pPr indent="0" marL="0">
+            <a:pPr marL="0" indent="0">
               <a:buNone/>
             </a:pPr>
             <a:r>
@@ -8673,7 +8483,7 @@
           <a:bodyPr wrap="square" lIns="0" tIns="0" rIns="0" bIns="0" rtlCol="0" anchor="t"/>
           <a:lstStyle/>
           <a:p>
-            <a:pPr indent="0" marL="0">
+            <a:pPr marL="0" indent="0">
               <a:buNone/>
             </a:pPr>
             <a:r>
@@ -8761,7 +8571,7 @@
           <a:bodyPr wrap="square" lIns="0" tIns="0" rIns="0" bIns="0" rtlCol="0" anchor="t"/>
           <a:lstStyle/>
           <a:p>
-            <a:pPr indent="0" marL="0">
+            <a:pPr marL="0" indent="0">
               <a:buNone/>
             </a:pPr>
             <a:r>
@@ -8849,7 +8659,7 @@
           <a:bodyPr wrap="square" lIns="0" tIns="0" rIns="0" bIns="0" rtlCol="0" anchor="t"/>
           <a:lstStyle/>
           <a:p>
-            <a:pPr indent="0" marL="0">
+            <a:pPr marL="0" indent="0">
               <a:buNone/>
             </a:pPr>
             <a:r>
@@ -8937,7 +8747,7 @@
           <a:bodyPr wrap="square" lIns="0" tIns="0" rIns="0" bIns="0" rtlCol="0" anchor="t"/>
           <a:lstStyle/>
           <a:p>
-            <a:pPr indent="0" marL="0">
+            <a:pPr marL="0" indent="0">
               <a:buNone/>
             </a:pPr>
             <a:r>
@@ -8976,7 +8786,7 @@
           <a:bodyPr wrap="square" lIns="0" tIns="0" rIns="0" bIns="0" rtlCol="0" anchor="t"/>
           <a:lstStyle/>
           <a:p>
-            <a:pPr indent="0" marL="0">
+            <a:pPr marL="0" indent="0">
               <a:buNone/>
             </a:pPr>
             <a:r>
@@ -9010,6 +8820,7 @@
         <a:solidFill>
           <a:srgbClr val="FFFFFF"/>
         </a:solidFill>
+        <a:effectLst/>
       </p:bgPr>
     </p:bg>
     <p:spTree>
@@ -9047,7 +8858,7 @@
           <a:bodyPr wrap="square" lIns="0" tIns="0" rIns="0" bIns="0" rtlCol="0" anchor="t"/>
           <a:lstStyle/>
           <a:p>
-            <a:pPr indent="0" marL="0">
+            <a:pPr marL="0" indent="0">
               <a:buNone/>
             </a:pPr>
             <a:r>
@@ -9086,7 +8897,7 @@
           <a:bodyPr wrap="square" lIns="0" tIns="0" rIns="0" bIns="0" rtlCol="0" anchor="t"/>
           <a:lstStyle/>
           <a:p>
-            <a:pPr indent="0" marL="0">
+            <a:pPr marL="0" indent="0">
               <a:buNone/>
             </a:pPr>
             <a:r>
@@ -9125,7 +8936,7 @@
           <a:bodyPr wrap="square" lIns="0" tIns="0" rIns="0" bIns="0" rtlCol="0" anchor="t"/>
           <a:lstStyle/>
           <a:p>
-            <a:pPr indent="0" marL="0">
+            <a:pPr marL="0" indent="0">
               <a:buNone/>
             </a:pPr>
             <a:r>
@@ -9187,7 +8998,7 @@
           <a:bodyPr wrap="square" lIns="0" tIns="0" rIns="0" bIns="0" rtlCol="0" anchor="t"/>
           <a:lstStyle/>
           <a:p>
-            <a:pPr algn="r" indent="0" marL="0">
+            <a:pPr marL="0" indent="0" algn="r">
               <a:buNone/>
             </a:pPr>
             <a:r>
@@ -9251,7 +9062,7 @@
           <a:bodyPr wrap="square" lIns="0" tIns="0" rIns="0" bIns="0" rtlCol="0" anchor="t"/>
           <a:lstStyle/>
           <a:p>
-            <a:pPr indent="0" marL="0">
+            <a:pPr marL="0" indent="0">
               <a:buNone/>
             </a:pPr>
             <a:r>
@@ -9338,7 +9149,7 @@
           <a:bodyPr wrap="square" lIns="0" tIns="0" rIns="0" bIns="0" rtlCol="0" anchor="t"/>
           <a:lstStyle/>
           <a:p>
-            <a:pPr indent="0" marL="0">
+            <a:pPr marL="0" indent="0">
               <a:buNone/>
             </a:pPr>
             <a:r>
@@ -9425,7 +9236,7 @@
           <a:bodyPr wrap="square" lIns="0" tIns="0" rIns="0" bIns="0" rtlCol="0" anchor="t"/>
           <a:lstStyle/>
           <a:p>
-            <a:pPr indent="0" marL="0">
+            <a:pPr marL="0" indent="0">
               <a:buNone/>
             </a:pPr>
             <a:r>
@@ -9512,7 +9323,7 @@
           <a:bodyPr wrap="square" lIns="0" tIns="0" rIns="0" bIns="0" rtlCol="0" anchor="t"/>
           <a:lstStyle/>
           <a:p>
-            <a:pPr indent="0" marL="0">
+            <a:pPr marL="0" indent="0">
               <a:buNone/>
             </a:pPr>
             <a:r>
@@ -9598,7 +9409,7 @@
           <a:bodyPr wrap="square" lIns="0" tIns="0" rIns="0" bIns="0" rtlCol="0" anchor="t"/>
           <a:lstStyle/>
           <a:p>
-            <a:pPr indent="0" marL="0">
+            <a:pPr marL="0" indent="0">
               <a:buNone/>
             </a:pPr>
             <a:r>
@@ -9661,7 +9472,7 @@
           <a:bodyPr wrap="square" lIns="0" tIns="0" rIns="0" bIns="0" rtlCol="0" anchor="t"/>
           <a:lstStyle/>
           <a:p>
-            <a:pPr indent="0" marL="0">
+            <a:pPr marL="0" indent="0">
               <a:buNone/>
             </a:pPr>
             <a:r>
@@ -9725,7 +9536,7 @@
           <a:bodyPr wrap="square" lIns="0" tIns="0" rIns="0" bIns="0" rtlCol="0" anchor="t"/>
           <a:lstStyle/>
           <a:p>
-            <a:pPr indent="0" marL="0">
+            <a:pPr marL="0" indent="0">
               <a:buNone/>
             </a:pPr>
             <a:r>
@@ -9742,7 +9553,7 @@
             <a:endParaRPr lang="es-PE" sz="1600" dirty="0"/>
           </a:p>
           <a:p>
-            <a:pPr indent="0" marL="0">
+            <a:pPr marL="0" indent="0">
               <a:buNone/>
             </a:pPr>
             <a:r>
@@ -9805,7 +9616,7 @@
           <a:bodyPr wrap="square" lIns="0" tIns="0" rIns="0" bIns="0" rtlCol="0" anchor="t"/>
           <a:lstStyle/>
           <a:p>
-            <a:pPr indent="0" marL="0">
+            <a:pPr marL="0" indent="0">
               <a:buNone/>
             </a:pPr>
             <a:r>
@@ -9916,7 +9727,7 @@
           <a:bodyPr wrap="square" lIns="0" tIns="0" rIns="0" bIns="0" rtlCol="0" anchor="t"/>
           <a:lstStyle/>
           <a:p>
-            <a:pPr indent="0" marL="0">
+            <a:pPr marL="0" indent="0">
               <a:buNone/>
             </a:pPr>
             <a:r>
@@ -9955,7 +9766,7 @@
           <a:bodyPr wrap="square" lIns="0" tIns="0" rIns="0" bIns="0" rtlCol="0" anchor="t"/>
           <a:lstStyle/>
           <a:p>
-            <a:pPr indent="0" marL="0">
+            <a:pPr marL="0" indent="0">
               <a:buNone/>
             </a:pPr>
             <a:r>
@@ -9994,7 +9805,7 @@
           <a:bodyPr wrap="square" lIns="0" tIns="0" rIns="0" bIns="0" rtlCol="0" anchor="t"/>
           <a:lstStyle/>
           <a:p>
-            <a:pPr indent="0" marL="0">
+            <a:pPr marL="0" indent="0">
               <a:buNone/>
             </a:pPr>
             <a:r>
@@ -10033,7 +9844,7 @@
           <a:bodyPr wrap="square" lIns="0" tIns="0" rIns="0" bIns="0" rtlCol="0" anchor="t"/>
           <a:lstStyle/>
           <a:p>
-            <a:pPr indent="0" marL="0">
+            <a:pPr marL="0" indent="0">
               <a:buNone/>
             </a:pPr>
             <a:r>
@@ -10072,7 +9883,7 @@
           <a:bodyPr wrap="square" lIns="0" tIns="0" rIns="0" bIns="0" rtlCol="0" anchor="t"/>
           <a:lstStyle/>
           <a:p>
-            <a:pPr indent="0" marL="0">
+            <a:pPr marL="0" indent="0">
               <a:buNone/>
             </a:pPr>
             <a:r>
@@ -10111,7 +9922,7 @@
           <a:bodyPr wrap="square" lIns="0" tIns="0" rIns="0" bIns="0" rtlCol="0" anchor="t"/>
           <a:lstStyle/>
           <a:p>
-            <a:pPr indent="0" marL="0">
+            <a:pPr marL="0" indent="0">
               <a:buNone/>
             </a:pPr>
             <a:r>
@@ -10150,7 +9961,7 @@
           <a:bodyPr wrap="square" lIns="0" tIns="0" rIns="0" bIns="0" rtlCol="0" anchor="t"/>
           <a:lstStyle/>
           <a:p>
-            <a:pPr indent="0" marL="0">
+            <a:pPr marL="0" indent="0">
               <a:buNone/>
             </a:pPr>
             <a:r>
@@ -10184,6 +9995,7 @@
         <a:solidFill>
           <a:srgbClr val="FFFFFF"/>
         </a:solidFill>
+        <a:effectLst/>
       </p:bgPr>
     </p:bg>
     <p:spTree>
@@ -10221,7 +10033,7 @@
           <a:bodyPr wrap="square" lIns="0" tIns="0" rIns="0" bIns="0" rtlCol="0" anchor="t"/>
           <a:lstStyle/>
           <a:p>
-            <a:pPr indent="0" marL="0">
+            <a:pPr marL="0" indent="0">
               <a:buNone/>
             </a:pPr>
             <a:r>
@@ -10260,7 +10072,7 @@
           <a:bodyPr wrap="square" lIns="0" tIns="0" rIns="0" bIns="0" rtlCol="0" anchor="t"/>
           <a:lstStyle/>
           <a:p>
-            <a:pPr indent="0" marL="0">
+            <a:pPr marL="0" indent="0">
               <a:buNone/>
             </a:pPr>
             <a:r>
@@ -10299,7 +10111,7 @@
           <a:bodyPr wrap="square" lIns="0" tIns="0" rIns="0" bIns="0" rtlCol="0" anchor="t"/>
           <a:lstStyle/>
           <a:p>
-            <a:pPr indent="0" marL="0">
+            <a:pPr marL="0" indent="0">
               <a:buNone/>
             </a:pPr>
             <a:r>
@@ -10361,7 +10173,7 @@
           <a:bodyPr wrap="square" lIns="0" tIns="0" rIns="0" bIns="0" rtlCol="0" anchor="t"/>
           <a:lstStyle/>
           <a:p>
-            <a:pPr algn="r" indent="0" marL="0">
+            <a:pPr marL="0" indent="0" algn="r">
               <a:buNone/>
             </a:pPr>
             <a:r>
@@ -10381,14 +10193,14 @@
       </p:sp>
       <p:pic>
         <p:nvPicPr>
-          <p:cNvPr id="8" name="Image 0" descr="Recorte fiel de 01-solicitud/MK-02-registro-solicitud.png">    </p:cNvPr>
+          <p:cNvPr id="8" name="Image 0" descr="Recorte fiel de 01-solicitud/MK-02-registro-solicitud.png"/>
           <p:cNvPicPr>
             <a:picLocks noChangeAspect="1"/>
           </p:cNvPicPr>
           <p:nvPr/>
         </p:nvPicPr>
         <p:blipFill>
-          <a:blip r:embed="rId1"/>
+          <a:blip r:embed="rId3"/>
           <a:stretch>
             <a:fillRect/>
           </a:stretch>
@@ -10424,7 +10236,7 @@
           <a:bodyPr wrap="square" lIns="0" tIns="0" rIns="0" bIns="0" rtlCol="0" anchor="t"/>
           <a:lstStyle/>
           <a:p>
-            <a:pPr indent="0" marL="0">
+            <a:pPr marL="0" indent="0">
               <a:buNone/>
             </a:pPr>
             <a:r>
@@ -10463,7 +10275,7 @@
           <a:bodyPr wrap="square" lIns="0" tIns="0" rIns="0" bIns="0" rtlCol="0" anchor="t"/>
           <a:lstStyle/>
           <a:p>
-            <a:pPr indent="0" marL="0">
+            <a:pPr marL="0" indent="0">
               <a:buNone/>
             </a:pPr>
             <a:r>
@@ -10483,14 +10295,14 @@
       </p:sp>
       <p:pic>
         <p:nvPicPr>
-          <p:cNvPr id="11" name="Image 1" descr="Recorte fiel de 01-solicitud/MK-02-registro-solicitud.png">    </p:cNvPr>
+          <p:cNvPr id="11" name="Image 1" descr="Recorte fiel de 01-solicitud/MK-02-registro-solicitud.png"/>
           <p:cNvPicPr>
             <a:picLocks noChangeAspect="1"/>
           </p:cNvPicPr>
           <p:nvPr/>
         </p:nvPicPr>
         <p:blipFill>
-          <a:blip r:embed="rId2"/>
+          <a:blip r:embed="rId4"/>
           <a:stretch>
             <a:fillRect/>
           </a:stretch>
@@ -10526,7 +10338,7 @@
           <a:bodyPr wrap="square" lIns="0" tIns="0" rIns="0" bIns="0" rtlCol="0" anchor="t"/>
           <a:lstStyle/>
           <a:p>
-            <a:pPr indent="0" marL="0">
+            <a:pPr marL="0" indent="0">
               <a:buNone/>
             </a:pPr>
             <a:r>
@@ -10590,7 +10402,7 @@
           <a:bodyPr wrap="square" lIns="0" tIns="0" rIns="0" bIns="0" rtlCol="0" anchor="t"/>
           <a:lstStyle/>
           <a:p>
-            <a:pPr algn="ctr" indent="0" marL="0">
+            <a:pPr marL="0" indent="0" algn="ctr">
               <a:buNone/>
             </a:pPr>
             <a:r>
@@ -10629,7 +10441,7 @@
           <a:bodyPr wrap="square" lIns="0" tIns="0" rIns="0" bIns="0" rtlCol="0" anchor="t"/>
           <a:lstStyle/>
           <a:p>
-            <a:pPr indent="0" marL="0">
+            <a:pPr marL="0" indent="0">
               <a:buNone/>
             </a:pPr>
             <a:r>
@@ -10668,7 +10480,7 @@
           <a:bodyPr wrap="square" lIns="0" tIns="0" rIns="0" bIns="0" rtlCol="0" anchor="t"/>
           <a:lstStyle/>
           <a:p>
-            <a:pPr indent="0" marL="0">
+            <a:pPr marL="0" indent="0">
               <a:buNone/>
             </a:pPr>
             <a:r>
@@ -10707,7 +10519,7 @@
           <a:bodyPr wrap="square" lIns="0" tIns="0" rIns="0" bIns="0" rtlCol="0" anchor="t"/>
           <a:lstStyle/>
           <a:p>
-            <a:pPr indent="0" marL="0">
+            <a:pPr marL="0" indent="0">
               <a:buNone/>
             </a:pPr>
             <a:r>
@@ -10771,7 +10583,7 @@
           <a:bodyPr wrap="square" lIns="0" tIns="0" rIns="0" bIns="0" rtlCol="0" anchor="t"/>
           <a:lstStyle/>
           <a:p>
-            <a:pPr algn="ctr" indent="0" marL="0">
+            <a:pPr marL="0" indent="0" algn="ctr">
               <a:buNone/>
             </a:pPr>
             <a:r>
@@ -10805,6 +10617,7 @@
         <a:solidFill>
           <a:srgbClr val="FFFFFF"/>
         </a:solidFill>
+        <a:effectLst/>
       </p:bgPr>
     </p:bg>
     <p:spTree>
@@ -10842,7 +10655,7 @@
           <a:bodyPr wrap="square" lIns="0" tIns="0" rIns="0" bIns="0" rtlCol="0" anchor="t"/>
           <a:lstStyle/>
           <a:p>
-            <a:pPr indent="0" marL="0">
+            <a:pPr marL="0" indent="0">
               <a:buNone/>
             </a:pPr>
             <a:r>
@@ -10881,7 +10694,7 @@
           <a:bodyPr wrap="square" lIns="0" tIns="0" rIns="0" bIns="0" rtlCol="0" anchor="t"/>
           <a:lstStyle/>
           <a:p>
-            <a:pPr indent="0" marL="0">
+            <a:pPr marL="0" indent="0">
               <a:buNone/>
             </a:pPr>
             <a:r>
@@ -10920,7 +10733,7 @@
           <a:bodyPr wrap="square" lIns="0" tIns="0" rIns="0" bIns="0" rtlCol="0" anchor="t"/>
           <a:lstStyle/>
           <a:p>
-            <a:pPr indent="0" marL="0">
+            <a:pPr marL="0" indent="0">
               <a:buNone/>
             </a:pPr>
             <a:r>
@@ -10982,7 +10795,7 @@
           <a:bodyPr wrap="square" lIns="0" tIns="0" rIns="0" bIns="0" rtlCol="0" anchor="t"/>
           <a:lstStyle/>
           <a:p>
-            <a:pPr algn="r" indent="0" marL="0">
+            <a:pPr marL="0" indent="0" algn="r">
               <a:buNone/>
             </a:pPr>
             <a:r>
@@ -11021,7 +10834,7 @@
           <a:bodyPr wrap="square" lIns="0" tIns="0" rIns="0" bIns="0" rtlCol="0" anchor="t"/>
           <a:lstStyle/>
           <a:p>
-            <a:pPr indent="0" marL="0">
+            <a:pPr marL="0" indent="0">
               <a:buNone/>
             </a:pPr>
             <a:r>
@@ -11041,14 +10854,14 @@
       </p:sp>
       <p:pic>
         <p:nvPicPr>
-          <p:cNvPr id="9" name="Image 0" descr="Recorte fiel de 02-matching/MK-04-propuesta.png">    </p:cNvPr>
+          <p:cNvPr id="9" name="Image 0" descr="Recorte fiel de 02-matching/MK-04-propuesta.png"/>
           <p:cNvPicPr>
             <a:picLocks noChangeAspect="1"/>
           </p:cNvPicPr>
           <p:nvPr/>
         </p:nvPicPr>
         <p:blipFill>
-          <a:blip r:embed="rId1"/>
+          <a:blip r:embed="rId3"/>
           <a:stretch>
             <a:fillRect/>
           </a:stretch>
@@ -11084,7 +10897,7 @@
           <a:bodyPr wrap="square" lIns="0" tIns="0" rIns="0" bIns="0" rtlCol="0" anchor="t"/>
           <a:lstStyle/>
           <a:p>
-            <a:pPr indent="0" marL="0">
+            <a:pPr marL="0" indent="0">
               <a:buNone/>
             </a:pPr>
             <a:r>
@@ -11123,7 +10936,7 @@
           <a:bodyPr wrap="square" lIns="0" tIns="0" rIns="0" bIns="0" rtlCol="0" anchor="t"/>
           <a:lstStyle/>
           <a:p>
-            <a:pPr indent="0" marL="0">
+            <a:pPr marL="0" indent="0">
               <a:buNone/>
             </a:pPr>
             <a:r>
@@ -11162,7 +10975,7 @@
           <a:bodyPr wrap="square" lIns="0" tIns="0" rIns="0" bIns="0" rtlCol="0" anchor="t"/>
           <a:lstStyle/>
           <a:p>
-            <a:pPr indent="0" marL="0">
+            <a:pPr marL="0" indent="0">
               <a:buNone/>
             </a:pPr>
             <a:r>
@@ -11201,7 +11014,7 @@
           <a:bodyPr wrap="square" lIns="0" tIns="0" rIns="0" bIns="0" rtlCol="0" anchor="t"/>
           <a:lstStyle/>
           <a:p>
-            <a:pPr indent="0" marL="0">
+            <a:pPr marL="0" indent="0">
               <a:buNone/>
             </a:pPr>
             <a:r>
@@ -11240,7 +11053,7 @@
           <a:bodyPr wrap="square" lIns="0" tIns="0" rIns="0" bIns="0" rtlCol="0" anchor="t"/>
           <a:lstStyle/>
           <a:p>
-            <a:pPr indent="0" marL="0">
+            <a:pPr marL="0" indent="0">
               <a:buNone/>
             </a:pPr>
             <a:r>
@@ -11260,14 +11073,14 @@
       </p:sp>
       <p:pic>
         <p:nvPicPr>
-          <p:cNvPr id="15" name="Image 1" descr="Recorte fiel de 03-autorizacion/MK-05-autorizacion.png">    </p:cNvPr>
+          <p:cNvPr id="15" name="Image 1" descr="Recorte fiel de 03-autorizacion/MK-05-autorizacion.png"/>
           <p:cNvPicPr>
             <a:picLocks noChangeAspect="1"/>
           </p:cNvPicPr>
           <p:nvPr/>
         </p:nvPicPr>
         <p:blipFill>
-          <a:blip r:embed="rId2"/>
+          <a:blip r:embed="rId4"/>
           <a:stretch>
             <a:fillRect/>
           </a:stretch>
@@ -11303,7 +11116,7 @@
           <a:bodyPr wrap="square" lIns="0" tIns="0" rIns="0" bIns="0" rtlCol="0" anchor="t"/>
           <a:lstStyle/>
           <a:p>
-            <a:pPr indent="0" marL="0">
+            <a:pPr marL="0" indent="0">
               <a:buNone/>
             </a:pPr>
             <a:r>
@@ -11367,7 +11180,7 @@
           <a:bodyPr wrap="square" lIns="0" tIns="0" rIns="0" bIns="0" rtlCol="0" anchor="t"/>
           <a:lstStyle/>
           <a:p>
-            <a:pPr algn="ctr" indent="0" marL="0">
+            <a:pPr marL="0" indent="0" algn="ctr">
               <a:buNone/>
             </a:pPr>
             <a:r>
@@ -11431,7 +11244,7 @@
           <a:bodyPr wrap="square" lIns="0" tIns="0" rIns="0" bIns="0" rtlCol="0" anchor="t"/>
           <a:lstStyle/>
           <a:p>
-            <a:pPr algn="ctr" indent="0" marL="0">
+            <a:pPr marL="0" indent="0" algn="ctr">
               <a:buNone/>
             </a:pPr>
             <a:r>
@@ -11465,6 +11278,7 @@
         <a:solidFill>
           <a:srgbClr val="FFFFFF"/>
         </a:solidFill>
+        <a:effectLst/>
       </p:bgPr>
     </p:bg>
     <p:spTree>
@@ -11502,7 +11316,7 @@
           <a:bodyPr wrap="square" lIns="0" tIns="0" rIns="0" bIns="0" rtlCol="0" anchor="t"/>
           <a:lstStyle/>
           <a:p>
-            <a:pPr indent="0" marL="0">
+            <a:pPr marL="0" indent="0">
               <a:buNone/>
             </a:pPr>
             <a:r>
@@ -11541,7 +11355,7 @@
           <a:bodyPr wrap="square" lIns="0" tIns="0" rIns="0" bIns="0" rtlCol="0" anchor="t"/>
           <a:lstStyle/>
           <a:p>
-            <a:pPr indent="0" marL="0">
+            <a:pPr marL="0" indent="0">
               <a:buNone/>
             </a:pPr>
             <a:r>
@@ -11580,7 +11394,7 @@
           <a:bodyPr wrap="square" lIns="0" tIns="0" rIns="0" bIns="0" rtlCol="0" anchor="t"/>
           <a:lstStyle/>
           <a:p>
-            <a:pPr indent="0" marL="0">
+            <a:pPr marL="0" indent="0">
               <a:buNone/>
             </a:pPr>
             <a:r>
@@ -11642,7 +11456,7 @@
           <a:bodyPr wrap="square" lIns="0" tIns="0" rIns="0" bIns="0" rtlCol="0" anchor="t"/>
           <a:lstStyle/>
           <a:p>
-            <a:pPr algn="r" indent="0" marL="0">
+            <a:pPr marL="0" indent="0" algn="r">
               <a:buNone/>
             </a:pPr>
             <a:r>
@@ -11681,7 +11495,7 @@
           <a:bodyPr wrap="square" lIns="0" tIns="0" rIns="0" bIns="0" rtlCol="0" anchor="t"/>
           <a:lstStyle/>
           <a:p>
-            <a:pPr indent="0" marL="0">
+            <a:pPr marL="0" indent="0">
               <a:buNone/>
             </a:pPr>
             <a:r>
@@ -11701,14 +11515,14 @@
       </p:sp>
       <p:pic>
         <p:nvPicPr>
-          <p:cNvPr id="9" name="Image 0" descr="Recorte fiel de 04-traslado/MK-07-ruta-traslado.png">    </p:cNvPr>
+          <p:cNvPr id="9" name="Image 0" descr="Recorte fiel de 04-traslado/MK-07-ruta-traslado.png"/>
           <p:cNvPicPr>
             <a:picLocks noChangeAspect="1"/>
           </p:cNvPicPr>
           <p:nvPr/>
         </p:nvPicPr>
         <p:blipFill>
-          <a:blip r:embed="rId1"/>
+          <a:blip r:embed="rId3"/>
           <a:stretch>
             <a:fillRect/>
           </a:stretch>
@@ -11744,7 +11558,7 @@
           <a:bodyPr wrap="square" lIns="0" tIns="0" rIns="0" bIns="0" rtlCol="0" anchor="t"/>
           <a:lstStyle/>
           <a:p>
-            <a:pPr indent="0" marL="0">
+            <a:pPr marL="0" indent="0">
               <a:buNone/>
             </a:pPr>
             <a:r>
@@ -11783,7 +11597,7 @@
           <a:bodyPr wrap="square" lIns="0" tIns="0" rIns="0" bIns="0" rtlCol="0" anchor="t"/>
           <a:lstStyle/>
           <a:p>
-            <a:pPr indent="0" marL="0">
+            <a:pPr marL="0" indent="0">
               <a:buNone/>
             </a:pPr>
             <a:r>
@@ -11800,7 +11614,7 @@
             <a:endParaRPr lang="es-PE" sz="2000" dirty="0"/>
           </a:p>
           <a:p>
-            <a:pPr indent="0" marL="0">
+            <a:pPr marL="0" indent="0">
               <a:buNone/>
             </a:pPr>
             <a:r>
@@ -11817,7 +11631,7 @@
             <a:endParaRPr lang="es-PE" sz="2000" dirty="0"/>
           </a:p>
           <a:p>
-            <a:pPr indent="0" marL="0">
+            <a:pPr marL="0" indent="0">
               <a:buNone/>
             </a:pPr>
             <a:r>
@@ -11856,7 +11670,7 @@
           <a:bodyPr wrap="square" lIns="0" tIns="0" rIns="0" bIns="0" rtlCol="0" anchor="t"/>
           <a:lstStyle/>
           <a:p>
-            <a:pPr indent="0" marL="0">
+            <a:pPr marL="0" indent="0">
               <a:buNone/>
             </a:pPr>
             <a:r>
@@ -11895,7 +11709,7 @@
           <a:bodyPr wrap="square" lIns="0" tIns="0" rIns="0" bIns="0" rtlCol="0" anchor="t"/>
           <a:lstStyle/>
           <a:p>
-            <a:pPr indent="0" marL="0">
+            <a:pPr marL="0" indent="0">
               <a:buNone/>
             </a:pPr>
             <a:r>
@@ -11915,14 +11729,14 @@
       </p:sp>
       <p:pic>
         <p:nvPicPr>
-          <p:cNvPr id="14" name="Image 1" descr="Recorte fiel de 05-recepcion/MK-08-recepcion-variante.png">    </p:cNvPr>
+          <p:cNvPr id="14" name="Image 1" descr="Recorte fiel de 05-recepcion/MK-08-recepcion-variante.png"/>
           <p:cNvPicPr>
             <a:picLocks noChangeAspect="1"/>
           </p:cNvPicPr>
           <p:nvPr/>
         </p:nvPicPr>
         <p:blipFill>
-          <a:blip r:embed="rId2"/>
+          <a:blip r:embed="rId4"/>
           <a:stretch>
             <a:fillRect/>
           </a:stretch>
@@ -11958,7 +11772,7 @@
           <a:bodyPr wrap="square" lIns="0" tIns="0" rIns="0" bIns="0" rtlCol="0" anchor="t"/>
           <a:lstStyle/>
           <a:p>
-            <a:pPr indent="0" marL="0">
+            <a:pPr marL="0" indent="0">
               <a:buNone/>
             </a:pPr>
             <a:r>
@@ -11997,7 +11811,7 @@
           <a:bodyPr wrap="square" lIns="0" tIns="0" rIns="0" bIns="0" rtlCol="0" anchor="t"/>
           <a:lstStyle/>
           <a:p>
-            <a:pPr indent="0" marL="0">
+            <a:pPr marL="0" indent="0">
               <a:buNone/>
             </a:pPr>
             <a:r>
@@ -12061,7 +11875,7 @@
           <a:bodyPr wrap="square" lIns="0" tIns="0" rIns="0" bIns="0" rtlCol="0" anchor="t"/>
           <a:lstStyle/>
           <a:p>
-            <a:pPr algn="ctr" indent="0" marL="0">
+            <a:pPr marL="0" indent="0" algn="ctr">
               <a:buNone/>
             </a:pPr>
             <a:r>
@@ -12125,7 +11939,7 @@
           <a:bodyPr wrap="square" lIns="0" tIns="0" rIns="0" bIns="0" rtlCol="0" anchor="t"/>
           <a:lstStyle/>
           <a:p>
-            <a:pPr algn="ctr" indent="0" marL="0">
+            <a:pPr marL="0" indent="0" algn="ctr">
               <a:buNone/>
             </a:pPr>
             <a:r>
@@ -12159,6 +11973,7 @@
         <a:solidFill>
           <a:srgbClr val="FFFFFF"/>
         </a:solidFill>
+        <a:effectLst/>
       </p:bgPr>
     </p:bg>
     <p:spTree>
@@ -12196,7 +12011,7 @@
           <a:bodyPr wrap="square" lIns="0" tIns="0" rIns="0" bIns="0" rtlCol="0" anchor="t"/>
           <a:lstStyle/>
           <a:p>
-            <a:pPr indent="0" marL="0">
+            <a:pPr marL="0" indent="0">
               <a:buNone/>
             </a:pPr>
             <a:r>
@@ -12235,7 +12050,7 @@
           <a:bodyPr wrap="square" lIns="0" tIns="0" rIns="0" bIns="0" rtlCol="0" anchor="t"/>
           <a:lstStyle/>
           <a:p>
-            <a:pPr indent="0" marL="0">
+            <a:pPr marL="0" indent="0">
               <a:buNone/>
             </a:pPr>
             <a:r>
@@ -12274,7 +12089,7 @@
           <a:bodyPr wrap="square" lIns="0" tIns="0" rIns="0" bIns="0" rtlCol="0" anchor="t"/>
           <a:lstStyle/>
           <a:p>
-            <a:pPr indent="0" marL="0">
+            <a:pPr marL="0" indent="0">
               <a:buNone/>
             </a:pPr>
             <a:r>
@@ -12336,7 +12151,7 @@
           <a:bodyPr wrap="square" lIns="0" tIns="0" rIns="0" bIns="0" rtlCol="0" anchor="t"/>
           <a:lstStyle/>
           <a:p>
-            <a:pPr algn="r" indent="0" marL="0">
+            <a:pPr marL="0" indent="0" algn="r">
               <a:buNone/>
             </a:pPr>
             <a:r>
@@ -12356,14 +12171,14 @@
       </p:sp>
       <p:pic>
         <p:nvPicPr>
-          <p:cNvPr id="8" name="Image 0" descr="Recorte fiel de 06-supervision/MK-09-mapa-territorial.png">    </p:cNvPr>
+          <p:cNvPr id="8" name="Image 0" descr="Recorte fiel de 06-supervision/MK-09-mapa-territorial.png"/>
           <p:cNvPicPr>
             <a:picLocks noChangeAspect="1"/>
           </p:cNvPicPr>
           <p:nvPr/>
         </p:nvPicPr>
         <p:blipFill>
-          <a:blip r:embed="rId1"/>
+          <a:blip r:embed="rId3"/>
           <a:stretch>
             <a:fillRect/>
           </a:stretch>
@@ -12380,14 +12195,14 @@
       </p:pic>
       <p:pic>
         <p:nvPicPr>
-          <p:cNvPr id="9" name="Image 1" descr="Recorte fiel de 06-supervision/MK-09-mapa-territorial.png">    </p:cNvPr>
+          <p:cNvPr id="9" name="Image 1" descr="Recorte fiel de 06-supervision/MK-09-mapa-territorial.png"/>
           <p:cNvPicPr>
             <a:picLocks noChangeAspect="1"/>
           </p:cNvPicPr>
           <p:nvPr/>
         </p:nvPicPr>
         <p:blipFill>
-          <a:blip r:embed="rId2"/>
+          <a:blip r:embed="rId4"/>
           <a:stretch>
             <a:fillRect/>
           </a:stretch>
@@ -12448,7 +12263,7 @@
           <a:bodyPr wrap="square" lIns="0" tIns="0" rIns="0" bIns="0" rtlCol="0" anchor="t"/>
           <a:lstStyle/>
           <a:p>
-            <a:pPr algn="ctr" indent="0" marL="0">
+            <a:pPr marL="0" indent="0" algn="ctr">
               <a:buNone/>
             </a:pPr>
             <a:r>
@@ -12487,7 +12302,7 @@
           <a:bodyPr wrap="square" lIns="0" tIns="0" rIns="0" bIns="0" rtlCol="0" anchor="t"/>
           <a:lstStyle/>
           <a:p>
-            <a:pPr indent="0" marL="0">
+            <a:pPr marL="0" indent="0">
               <a:buNone/>
             </a:pPr>
             <a:r>
@@ -12526,7 +12341,7 @@
           <a:bodyPr wrap="square" lIns="0" tIns="0" rIns="0" bIns="0" rtlCol="0" anchor="t"/>
           <a:lstStyle/>
           <a:p>
-            <a:pPr indent="0" marL="0">
+            <a:pPr marL="0" indent="0">
               <a:buNone/>
             </a:pPr>
             <a:r>
@@ -12590,7 +12405,7 @@
           <a:bodyPr wrap="square" lIns="0" tIns="0" rIns="0" bIns="0" rtlCol="0" anchor="t"/>
           <a:lstStyle/>
           <a:p>
-            <a:pPr algn="ctr" indent="0" marL="0">
+            <a:pPr marL="0" indent="0" algn="ctr">
               <a:buNone/>
             </a:pPr>
             <a:r>
@@ -12654,7 +12469,7 @@
           <a:bodyPr wrap="square" lIns="0" tIns="0" rIns="0" bIns="0" rtlCol="0" anchor="t"/>
           <a:lstStyle/>
           <a:p>
-            <a:pPr algn="ctr" indent="0" marL="0">
+            <a:pPr marL="0" indent="0" algn="ctr">
               <a:buNone/>
             </a:pPr>
             <a:r>
@@ -12693,7 +12508,7 @@
           <a:bodyPr wrap="square" lIns="0" tIns="0" rIns="0" bIns="0" rtlCol="0" anchor="t"/>
           <a:lstStyle/>
           <a:p>
-            <a:pPr indent="0" marL="0">
+            <a:pPr marL="0" indent="0">
               <a:buNone/>
             </a:pPr>
             <a:r>
@@ -12732,7 +12547,7 @@
           <a:bodyPr wrap="square" lIns="0" tIns="0" rIns="0" bIns="0" rtlCol="0" anchor="t"/>
           <a:lstStyle/>
           <a:p>
-            <a:pPr indent="0" marL="0">
+            <a:pPr marL="0" indent="0">
               <a:buNone/>
             </a:pPr>
             <a:r>
@@ -12796,7 +12611,7 @@
           <a:bodyPr wrap="square" lIns="0" tIns="0" rIns="0" bIns="0" rtlCol="0" anchor="t"/>
           <a:lstStyle/>
           <a:p>
-            <a:pPr algn="ctr" indent="0" marL="0">
+            <a:pPr marL="0" indent="0" algn="ctr">
               <a:buNone/>
             </a:pPr>
             <a:r>
@@ -12860,7 +12675,7 @@
           <a:bodyPr wrap="square" lIns="0" tIns="0" rIns="0" bIns="0" rtlCol="0" anchor="t"/>
           <a:lstStyle/>
           <a:p>
-            <a:pPr algn="ctr" indent="0" marL="0">
+            <a:pPr marL="0" indent="0" algn="ctr">
               <a:buNone/>
             </a:pPr>
             <a:r>
@@ -12899,7 +12714,7 @@
           <a:bodyPr wrap="square" lIns="0" tIns="0" rIns="0" bIns="0" rtlCol="0" anchor="t"/>
           <a:lstStyle/>
           <a:p>
-            <a:pPr indent="0" marL="0">
+            <a:pPr marL="0" indent="0">
               <a:buNone/>
             </a:pPr>
             <a:r>
@@ -12938,7 +12753,7 @@
           <a:bodyPr wrap="square" lIns="0" tIns="0" rIns="0" bIns="0" rtlCol="0" anchor="t"/>
           <a:lstStyle/>
           <a:p>
-            <a:pPr indent="0" marL="0">
+            <a:pPr marL="0" indent="0">
               <a:buNone/>
             </a:pPr>
             <a:r>
@@ -13002,7 +12817,7 @@
           <a:bodyPr wrap="square" lIns="0" tIns="0" rIns="0" bIns="0" rtlCol="0" anchor="t"/>
           <a:lstStyle/>
           <a:p>
-            <a:pPr algn="ctr" indent="0" marL="0">
+            <a:pPr marL="0" indent="0" algn="ctr">
               <a:buNone/>
             </a:pPr>
             <a:r>
@@ -13041,7 +12856,7 @@
           <a:bodyPr wrap="square" lIns="0" tIns="0" rIns="0" bIns="0" rtlCol="0" anchor="t"/>
           <a:lstStyle/>
           <a:p>
-            <a:pPr indent="0" marL="0">
+            <a:pPr marL="0" indent="0">
               <a:buNone/>
             </a:pPr>
             <a:r>
@@ -13075,6 +12890,7 @@
         <a:solidFill>
           <a:srgbClr val="FFFFFF"/>
         </a:solidFill>
+        <a:effectLst/>
       </p:bgPr>
     </p:bg>
     <p:spTree>
@@ -13112,7 +12928,7 @@
           <a:bodyPr wrap="square" lIns="0" tIns="0" rIns="0" bIns="0" rtlCol="0" anchor="t"/>
           <a:lstStyle/>
           <a:p>
-            <a:pPr indent="0" marL="0">
+            <a:pPr marL="0" indent="0">
               <a:buNone/>
             </a:pPr>
             <a:r>
@@ -13151,7 +12967,7 @@
           <a:bodyPr wrap="square" lIns="0" tIns="0" rIns="0" bIns="0" rtlCol="0" anchor="t"/>
           <a:lstStyle/>
           <a:p>
-            <a:pPr indent="0" marL="0">
+            <a:pPr marL="0" indent="0">
               <a:buNone/>
             </a:pPr>
             <a:r>
@@ -13190,7 +13006,7 @@
           <a:bodyPr wrap="square" lIns="0" tIns="0" rIns="0" bIns="0" rtlCol="0" anchor="t"/>
           <a:lstStyle/>
           <a:p>
-            <a:pPr indent="0" marL="0">
+            <a:pPr marL="0" indent="0">
               <a:buNone/>
             </a:pPr>
             <a:r>
@@ -13252,7 +13068,7 @@
           <a:bodyPr wrap="square" lIns="0" tIns="0" rIns="0" bIns="0" rtlCol="0" anchor="t"/>
           <a:lstStyle/>
           <a:p>
-            <a:pPr algn="r" indent="0" marL="0">
+            <a:pPr marL="0" indent="0" algn="r">
               <a:buNone/>
             </a:pPr>
             <a:r>
@@ -13291,7 +13107,7 @@
           <a:bodyPr wrap="square" lIns="0" tIns="0" rIns="0" bIns="0" rtlCol="0" anchor="t"/>
           <a:lstStyle/>
           <a:p>
-            <a:pPr indent="0" marL="0">
+            <a:pPr marL="0" indent="0">
               <a:buNone/>
             </a:pPr>
             <a:r>
@@ -13330,7 +13146,7 @@
           <a:bodyPr wrap="square" lIns="0" tIns="0" rIns="0" bIns="0" rtlCol="0" anchor="t"/>
           <a:lstStyle/>
           <a:p>
-            <a:pPr indent="0" marL="0">
+            <a:pPr marL="0" indent="0">
               <a:buNone/>
             </a:pPr>
             <a:r>
@@ -13369,7 +13185,7 @@
           <a:bodyPr wrap="square" lIns="0" tIns="0" rIns="0" bIns="0" rtlCol="0" anchor="t"/>
           <a:lstStyle/>
           <a:p>
-            <a:pPr indent="0" marL="0">
+            <a:pPr marL="0" indent="0">
               <a:buNone/>
             </a:pPr>
             <a:r>
@@ -13408,7 +13224,7 @@
           <a:bodyPr wrap="square" lIns="0" tIns="0" rIns="0" bIns="0" rtlCol="0" anchor="t"/>
           <a:lstStyle/>
           <a:p>
-            <a:pPr indent="0" marL="0">
+            <a:pPr marL="0" indent="0">
               <a:buNone/>
             </a:pPr>
             <a:r>
@@ -13447,7 +13263,7 @@
           <a:bodyPr wrap="square" lIns="0" tIns="0" rIns="0" bIns="0" rtlCol="0" anchor="t"/>
           <a:lstStyle/>
           <a:p>
-            <a:pPr indent="0" marL="0">
+            <a:pPr marL="0" indent="0">
               <a:buNone/>
             </a:pPr>
             <a:r>
@@ -13486,7 +13302,7 @@
           <a:bodyPr wrap="square" lIns="0" tIns="0" rIns="0" bIns="0" rtlCol="0" anchor="t"/>
           <a:lstStyle/>
           <a:p>
-            <a:pPr indent="0" marL="0">
+            <a:pPr marL="0" indent="0">
               <a:buNone/>
             </a:pPr>
             <a:r>
@@ -13598,7 +13414,7 @@
           <a:bodyPr wrap="square" lIns="0" tIns="0" rIns="0" bIns="0" rtlCol="0" anchor="t"/>
           <a:lstStyle/>
           <a:p>
-            <a:pPr indent="0" marL="0">
+            <a:pPr marL="0" indent="0">
               <a:buNone/>
             </a:pPr>
             <a:r>
@@ -13637,7 +13453,7 @@
           <a:bodyPr wrap="square" lIns="0" tIns="0" rIns="0" bIns="0" rtlCol="0" anchor="t"/>
           <a:lstStyle/>
           <a:p>
-            <a:pPr indent="0" marL="0">
+            <a:pPr marL="0" indent="0">
               <a:buNone/>
             </a:pPr>
             <a:r>
@@ -13671,6 +13487,7 @@
         <a:solidFill>
           <a:srgbClr val="FFFFFF"/>
         </a:solidFill>
+        <a:effectLst/>
       </p:bgPr>
     </p:bg>
     <p:spTree>
@@ -13708,7 +13525,7 @@
           <a:bodyPr wrap="square" lIns="0" tIns="0" rIns="0" bIns="0" rtlCol="0" anchor="t"/>
           <a:lstStyle/>
           <a:p>
-            <a:pPr indent="0" marL="0">
+            <a:pPr marL="0" indent="0">
               <a:buNone/>
             </a:pPr>
             <a:r>
@@ -13734,7 +13551,7 @@
         </p:nvSpPr>
         <p:spPr>
           <a:xfrm>
-            <a:off x="640080" y="694944"/>
+            <a:off x="640080" y="674848"/>
             <a:ext cx="13350240" cy="530352"/>
           </a:xfrm>
           <a:prstGeom prst="rect">
@@ -13747,7 +13564,7 @@
           <a:bodyPr wrap="square" lIns="0" tIns="0" rIns="0" bIns="0" rtlCol="0" anchor="t"/>
           <a:lstStyle/>
           <a:p>
-            <a:pPr indent="0" marL="0">
+            <a:pPr marL="0" indent="0">
               <a:buNone/>
             </a:pPr>
             <a:r>
@@ -13759,7 +13576,7 @@
                 <a:ea typeface="Segoe UI" pitchFamily="34" charset="-122"/>
                 <a:cs typeface="Segoe UI" pitchFamily="34" charset="-120"/>
               </a:rPr>
-              <a:t>Informe final y conclusión</a:t>
+              <a:t>Conclusión</a:t>
             </a:r>
             <a:endParaRPr lang="es-PE" sz="3000" dirty="0"/>
           </a:p>
@@ -13786,7 +13603,7 @@
           <a:bodyPr wrap="square" lIns="0" tIns="0" rIns="0" bIns="0" rtlCol="0" anchor="t"/>
           <a:lstStyle/>
           <a:p>
-            <a:pPr indent="0" marL="0">
+            <a:pPr marL="0" indent="0">
               <a:buNone/>
             </a:pPr>
             <a:r>
@@ -13848,7 +13665,7 @@
           <a:bodyPr wrap="square" lIns="0" tIns="0" rIns="0" bIns="0" rtlCol="0" anchor="t"/>
           <a:lstStyle/>
           <a:p>
-            <a:pPr algn="r" indent="0" marL="0">
+            <a:pPr marL="0" indent="0" algn="r">
               <a:buNone/>
             </a:pPr>
             <a:r>
@@ -13868,14 +13685,14 @@
       </p:sp>
       <p:pic>
         <p:nvPicPr>
-          <p:cNvPr id="8" name="Image 0" descr="Recorte fiel de 06-supervision/MK-10-informe-final.png">    </p:cNvPr>
+          <p:cNvPr id="8" name="Image 0" descr="Recorte fiel de 06-supervision/MK-10-informe-final.png"/>
           <p:cNvPicPr>
             <a:picLocks noChangeAspect="1"/>
           </p:cNvPicPr>
           <p:nvPr/>
         </p:nvPicPr>
         <p:blipFill>
-          <a:blip r:embed="rId1"/>
+          <a:blip r:embed="rId3"/>
           <a:stretch>
             <a:fillRect/>
           </a:stretch>
@@ -13936,7 +13753,7 @@
           <a:bodyPr wrap="square" lIns="0" tIns="0" rIns="0" bIns="0" rtlCol="0" anchor="t"/>
           <a:lstStyle/>
           <a:p>
-            <a:pPr algn="ctr" indent="0" marL="0">
+            <a:pPr marL="0" indent="0" algn="ctr">
               <a:buNone/>
             </a:pPr>
             <a:r>
@@ -13975,7 +13792,7 @@
           <a:bodyPr wrap="square" lIns="0" tIns="0" rIns="0" bIns="0" rtlCol="0" anchor="t"/>
           <a:lstStyle/>
           <a:p>
-            <a:pPr indent="0" marL="0">
+            <a:pPr marL="0" indent="0">
               <a:buNone/>
             </a:pPr>
             <a:r>
@@ -14014,7 +13831,7 @@
           <a:bodyPr wrap="square" lIns="0" tIns="0" rIns="0" bIns="0" rtlCol="0" anchor="t"/>
           <a:lstStyle/>
           <a:p>
-            <a:pPr indent="0" marL="0">
+            <a:pPr marL="0" indent="0">
               <a:buNone/>
             </a:pPr>
             <a:r>
@@ -14031,7 +13848,7 @@
             <a:endParaRPr lang="es-PE" sz="1800" dirty="0"/>
           </a:p>
           <a:p>
-            <a:pPr indent="0" marL="0">
+            <a:pPr marL="0" indent="0">
               <a:buNone/>
             </a:pPr>
             <a:r>
@@ -14048,7 +13865,7 @@
             <a:endParaRPr lang="es-PE" sz="1800" dirty="0"/>
           </a:p>
           <a:p>
-            <a:pPr indent="0" marL="0">
+            <a:pPr marL="0" indent="0">
               <a:buNone/>
             </a:pPr>
             <a:r>
@@ -14112,7 +13929,7 @@
           <a:bodyPr wrap="square" lIns="0" tIns="0" rIns="0" bIns="0" rtlCol="0" anchor="t"/>
           <a:lstStyle/>
           <a:p>
-            <a:pPr algn="ctr" indent="0" marL="0">
+            <a:pPr marL="0" indent="0" algn="ctr">
               <a:buNone/>
             </a:pPr>
             <a:r>
@@ -14176,7 +13993,7 @@
           <a:bodyPr wrap="square" lIns="0" tIns="0" rIns="0" bIns="0" rtlCol="0" anchor="t"/>
           <a:lstStyle/>
           <a:p>
-            <a:pPr algn="ctr" indent="0" marL="0">
+            <a:pPr marL="0" indent="0" algn="ctr">
               <a:buNone/>
             </a:pPr>
             <a:r>
@@ -14215,7 +14032,7 @@
           <a:bodyPr wrap="square" lIns="0" tIns="0" rIns="0" bIns="0" rtlCol="0" anchor="t"/>
           <a:lstStyle/>
           <a:p>
-            <a:pPr indent="0" marL="0">
+            <a:pPr marL="0" indent="0">
               <a:buNone/>
             </a:pPr>
             <a:r>
@@ -14254,7 +14071,7 @@
           <a:bodyPr wrap="square" lIns="0" tIns="0" rIns="0" bIns="0" rtlCol="0" anchor="t"/>
           <a:lstStyle/>
           <a:p>
-            <a:pPr indent="0" marL="0">
+            <a:pPr marL="0" indent="0">
               <a:buNone/>
             </a:pPr>
             <a:r>
@@ -14271,7 +14088,7 @@
             <a:endParaRPr lang="es-PE" sz="1800" dirty="0"/>
           </a:p>
           <a:p>
-            <a:pPr indent="0" marL="0">
+            <a:pPr marL="0" indent="0">
               <a:buNone/>
             </a:pPr>
             <a:r>
@@ -14288,7 +14105,7 @@
             <a:endParaRPr lang="es-PE" sz="1800" dirty="0"/>
           </a:p>
           <a:p>
-            <a:pPr indent="0" marL="0">
+            <a:pPr marL="0" indent="0">
               <a:buNone/>
             </a:pPr>
             <a:r>
@@ -14352,7 +14169,7 @@
           <a:bodyPr wrap="square" lIns="0" tIns="0" rIns="0" bIns="0" rtlCol="0" anchor="t"/>
           <a:lstStyle/>
           <a:p>
-            <a:pPr algn="ctr" indent="0" marL="0">
+            <a:pPr marL="0" indent="0" algn="ctr">
               <a:buNone/>
             </a:pPr>
             <a:r>
@@ -14391,7 +14208,7 @@
           <a:bodyPr wrap="square" lIns="0" tIns="0" rIns="0" bIns="0" rtlCol="0" anchor="t"/>
           <a:lstStyle/>
           <a:p>
-            <a:pPr indent="0" marL="0">
+            <a:pPr marL="0" indent="0">
               <a:buNone/>
             </a:pPr>
             <a:r>
@@ -14425,6 +14242,7 @@
         <a:solidFill>
           <a:srgbClr val="FFFFFF"/>
         </a:solidFill>
+        <a:effectLst/>
       </p:bgPr>
     </p:bg>
     <p:spTree>
@@ -14462,7 +14280,7 @@
           <a:bodyPr wrap="square" lIns="0" tIns="0" rIns="0" bIns="0" rtlCol="0" anchor="t"/>
           <a:lstStyle/>
           <a:p>
-            <a:pPr indent="0" marL="0">
+            <a:pPr marL="0" indent="0">
               <a:buNone/>
             </a:pPr>
             <a:r>
@@ -14501,7 +14319,7 @@
           <a:bodyPr wrap="square" lIns="0" tIns="0" rIns="0" bIns="0" rtlCol="0" anchor="t"/>
           <a:lstStyle/>
           <a:p>
-            <a:pPr indent="0" marL="0">
+            <a:pPr marL="0" indent="0">
               <a:buNone/>
             </a:pPr>
             <a:r>
@@ -14540,7 +14358,7 @@
           <a:bodyPr wrap="square" lIns="0" tIns="0" rIns="0" bIns="0" rtlCol="0" anchor="t"/>
           <a:lstStyle/>
           <a:p>
-            <a:pPr indent="0" marL="0">
+            <a:pPr marL="0" indent="0">
               <a:buNone/>
             </a:pPr>
             <a:r>
@@ -14602,7 +14420,7 @@
           <a:bodyPr wrap="square" lIns="0" tIns="0" rIns="0" bIns="0" rtlCol="0" anchor="t"/>
           <a:lstStyle/>
           <a:p>
-            <a:pPr algn="r" indent="0" marL="0">
+            <a:pPr marL="0" indent="0" algn="r">
               <a:buNone/>
             </a:pPr>
             <a:r>
@@ -14641,7 +14459,7 @@
           <a:bodyPr wrap="square" lIns="0" tIns="0" rIns="0" bIns="0" rtlCol="0" anchor="t"/>
           <a:lstStyle/>
           <a:p>
-            <a:pPr indent="0" marL="0">
+            <a:pPr marL="0" indent="0">
               <a:buNone/>
             </a:pPr>
             <a:r>
@@ -14703,7 +14521,7 @@
           <a:bodyPr wrap="square" lIns="0" tIns="0" rIns="0" bIns="0" rtlCol="0" anchor="t"/>
           <a:lstStyle/>
           <a:p>
-            <a:pPr indent="0" marL="0">
+            <a:pPr marL="0" indent="0">
               <a:buNone/>
             </a:pPr>
             <a:r>
@@ -14742,7 +14560,7 @@
           <a:bodyPr wrap="square" lIns="0" tIns="0" rIns="0" bIns="0" rtlCol="0" anchor="t"/>
           <a:lstStyle/>
           <a:p>
-            <a:pPr indent="0" marL="0">
+            <a:pPr marL="0" indent="0">
               <a:buNone/>
             </a:pPr>
             <a:r>
@@ -14804,7 +14622,7 @@
           <a:bodyPr wrap="square" lIns="0" tIns="0" rIns="0" bIns="0" rtlCol="0" anchor="t"/>
           <a:lstStyle/>
           <a:p>
-            <a:pPr indent="0" marL="0">
+            <a:pPr marL="0" indent="0">
               <a:buNone/>
             </a:pPr>
             <a:r>
@@ -14843,7 +14661,7 @@
           <a:bodyPr wrap="square" lIns="0" tIns="0" rIns="0" bIns="0" rtlCol="0" anchor="t"/>
           <a:lstStyle/>
           <a:p>
-            <a:pPr indent="0" marL="0">
+            <a:pPr marL="0" indent="0">
               <a:buNone/>
             </a:pPr>
             <a:r>
@@ -14905,7 +14723,7 @@
           <a:bodyPr wrap="square" lIns="0" tIns="0" rIns="0" bIns="0" rtlCol="0" anchor="t"/>
           <a:lstStyle/>
           <a:p>
-            <a:pPr indent="0" marL="0">
+            <a:pPr marL="0" indent="0">
               <a:buNone/>
             </a:pPr>
             <a:r>
@@ -14944,7 +14762,7 @@
           <a:bodyPr wrap="square" lIns="0" tIns="0" rIns="0" bIns="0" rtlCol="0" anchor="t"/>
           <a:lstStyle/>
           <a:p>
-            <a:pPr indent="0" marL="0">
+            <a:pPr marL="0" indent="0">
               <a:buNone/>
             </a:pPr>
             <a:r>
@@ -14983,7 +14801,7 @@
           <a:bodyPr wrap="square" lIns="0" tIns="0" rIns="0" bIns="0" rtlCol="0" anchor="t"/>
           <a:lstStyle/>
           <a:p>
-            <a:pPr indent="0" marL="0">
+            <a:pPr marL="0" indent="0">
               <a:buNone/>
             </a:pPr>
             <a:r>
@@ -15022,7 +14840,7 @@
           <a:bodyPr wrap="square" lIns="0" tIns="0" rIns="0" bIns="0" rtlCol="0" anchor="t"/>
           <a:lstStyle/>
           <a:p>
-            <a:pPr indent="0" marL="0">
+            <a:pPr marL="0" indent="0">
               <a:buNone/>
             </a:pPr>
             <a:r>
@@ -15056,6 +14874,7 @@
         <a:solidFill>
           <a:srgbClr val="FFFFFF"/>
         </a:solidFill>
+        <a:effectLst/>
       </p:bgPr>
     </p:bg>
     <p:spTree>
@@ -15093,7 +14912,7 @@
           <a:bodyPr wrap="square" lIns="0" tIns="0" rIns="0" bIns="0" rtlCol="0" anchor="t"/>
           <a:lstStyle/>
           <a:p>
-            <a:pPr indent="0" marL="0">
+            <a:pPr marL="0" indent="0">
               <a:buNone/>
             </a:pPr>
             <a:r>
@@ -15132,7 +14951,7 @@
           <a:bodyPr wrap="square" lIns="0" tIns="0" rIns="0" bIns="0" rtlCol="0" anchor="t"/>
           <a:lstStyle/>
           <a:p>
-            <a:pPr indent="0" marL="0">
+            <a:pPr marL="0" indent="0">
               <a:buNone/>
             </a:pPr>
             <a:r>
@@ -15171,7 +14990,7 @@
           <a:bodyPr wrap="square" lIns="0" tIns="0" rIns="0" bIns="0" rtlCol="0" anchor="t"/>
           <a:lstStyle/>
           <a:p>
-            <a:pPr indent="0" marL="0">
+            <a:pPr marL="0" indent="0">
               <a:buNone/>
             </a:pPr>
             <a:r>
@@ -15233,7 +15052,7 @@
           <a:bodyPr wrap="square" lIns="0" tIns="0" rIns="0" bIns="0" rtlCol="0" anchor="t"/>
           <a:lstStyle/>
           <a:p>
-            <a:pPr algn="r" indent="0" marL="0">
+            <a:pPr marL="0" indent="0" algn="r">
               <a:buNone/>
             </a:pPr>
             <a:r>
@@ -15272,7 +15091,7 @@
           <a:bodyPr wrap="square" lIns="0" tIns="0" rIns="0" bIns="0" rtlCol="0" anchor="t"/>
           <a:lstStyle/>
           <a:p>
-            <a:pPr indent="0" marL="0">
+            <a:pPr marL="0" indent="0">
               <a:buNone/>
             </a:pPr>
             <a:r>
@@ -15311,7 +15130,7 @@
           <a:bodyPr wrap="square" lIns="0" tIns="0" rIns="0" bIns="0" rtlCol="0" anchor="t"/>
           <a:lstStyle/>
           <a:p>
-            <a:pPr indent="0" marL="0">
+            <a:pPr marL="0" indent="0">
               <a:buNone/>
             </a:pPr>
             <a:r>
@@ -15350,7 +15169,7 @@
           <a:bodyPr wrap="square" lIns="0" tIns="0" rIns="0" bIns="0" rtlCol="0" anchor="t"/>
           <a:lstStyle/>
           <a:p>
-            <a:pPr indent="0" marL="0">
+            <a:pPr marL="0" indent="0">
               <a:buNone/>
             </a:pPr>
             <a:r>
@@ -15389,7 +15208,7 @@
           <a:bodyPr wrap="square" lIns="0" tIns="0" rIns="0" bIns="0" rtlCol="0" anchor="t"/>
           <a:lstStyle/>
           <a:p>
-            <a:pPr indent="0" marL="0">
+            <a:pPr marL="0" indent="0">
               <a:buNone/>
             </a:pPr>
             <a:r>
@@ -15451,7 +15270,7 @@
           <a:bodyPr wrap="square" lIns="0" tIns="0" rIns="0" bIns="0" rtlCol="0" anchor="t"/>
           <a:lstStyle/>
           <a:p>
-            <a:pPr indent="0" marL="0">
+            <a:pPr marL="0" indent="0">
               <a:buNone/>
             </a:pPr>
             <a:r>
@@ -15490,7 +15309,7 @@
           <a:bodyPr wrap="square" lIns="0" tIns="0" rIns="0" bIns="0" rtlCol="0" anchor="t"/>
           <a:lstStyle/>
           <a:p>
-            <a:pPr indent="0" marL="0">
+            <a:pPr marL="0" indent="0">
               <a:buNone/>
             </a:pPr>
             <a:r>
@@ -15529,7 +15348,7 @@
           <a:bodyPr wrap="square" lIns="0" tIns="0" rIns="0" bIns="0" rtlCol="0" anchor="t"/>
           <a:lstStyle/>
           <a:p>
-            <a:pPr indent="0" marL="0">
+            <a:pPr marL="0" indent="0">
               <a:buNone/>
             </a:pPr>
             <a:r>
@@ -15568,7 +15387,7 @@
           <a:bodyPr wrap="square" lIns="0" tIns="0" rIns="0" bIns="0" rtlCol="0" anchor="t"/>
           <a:lstStyle/>
           <a:p>
-            <a:pPr indent="0" marL="0">
+            <a:pPr marL="0" indent="0">
               <a:buNone/>
             </a:pPr>
             <a:r>
@@ -15630,7 +15449,7 @@
           <a:bodyPr wrap="square" lIns="0" tIns="0" rIns="0" bIns="0" rtlCol="0" anchor="t"/>
           <a:lstStyle/>
           <a:p>
-            <a:pPr indent="0" marL="0">
+            <a:pPr marL="0" indent="0">
               <a:buNone/>
             </a:pPr>
             <a:r>
@@ -15669,7 +15488,7 @@
           <a:bodyPr wrap="square" lIns="0" tIns="0" rIns="0" bIns="0" rtlCol="0" anchor="t"/>
           <a:lstStyle/>
           <a:p>
-            <a:pPr indent="0" marL="0">
+            <a:pPr marL="0" indent="0">
               <a:buNone/>
             </a:pPr>
             <a:r>
@@ -15686,7 +15505,7 @@
             <a:endParaRPr lang="es-PE" sz="2000" dirty="0"/>
           </a:p>
           <a:p>
-            <a:pPr indent="0" marL="0">
+            <a:pPr marL="0" indent="0">
               <a:buNone/>
             </a:pPr>
             <a:r>
@@ -15725,7 +15544,7 @@
           <a:bodyPr wrap="square" lIns="0" tIns="0" rIns="0" bIns="0" rtlCol="0" anchor="t"/>
           <a:lstStyle/>
           <a:p>
-            <a:pPr indent="0" marL="0">
+            <a:pPr marL="0" indent="0">
               <a:buNone/>
             </a:pPr>
             <a:r>
@@ -15764,7 +15583,7 @@
           <a:bodyPr wrap="square" lIns="0" tIns="0" rIns="0" bIns="0" rtlCol="0" anchor="t"/>
           <a:lstStyle/>
           <a:p>
-            <a:pPr indent="0" marL="0">
+            <a:pPr marL="0" indent="0">
               <a:buNone/>
             </a:pPr>
             <a:r>
@@ -15826,7 +15645,7 @@
           <a:bodyPr wrap="square" lIns="0" tIns="0" rIns="0" bIns="0" rtlCol="0" anchor="t"/>
           <a:lstStyle/>
           <a:p>
-            <a:pPr indent="0" marL="0">
+            <a:pPr marL="0" indent="0">
               <a:buNone/>
             </a:pPr>
             <a:r>
@@ -15865,7 +15684,7 @@
           <a:bodyPr wrap="square" lIns="0" tIns="0" rIns="0" bIns="0" rtlCol="0" anchor="t"/>
           <a:lstStyle/>
           <a:p>
-            <a:pPr indent="0" marL="0">
+            <a:pPr marL="0" indent="0">
               <a:buNone/>
             </a:pPr>
             <a:r>
@@ -15904,7 +15723,7 @@
           <a:bodyPr wrap="square" lIns="0" tIns="0" rIns="0" bIns="0" rtlCol="0" anchor="t"/>
           <a:lstStyle/>
           <a:p>
-            <a:pPr indent="0" marL="0">
+            <a:pPr marL="0" indent="0">
               <a:buNone/>
             </a:pPr>
             <a:r>
@@ -15943,7 +15762,7 @@
           <a:bodyPr wrap="square" lIns="0" tIns="0" rIns="0" bIns="0" rtlCol="0" anchor="t"/>
           <a:lstStyle/>
           <a:p>
-            <a:pPr indent="0" marL="0">
+            <a:pPr marL="0" indent="0">
               <a:buNone/>
             </a:pPr>
             <a:r>
@@ -16005,7 +15824,7 @@
           <a:bodyPr wrap="square" lIns="0" tIns="0" rIns="0" bIns="0" rtlCol="0" anchor="t"/>
           <a:lstStyle/>
           <a:p>
-            <a:pPr indent="0" marL="0">
+            <a:pPr marL="0" indent="0">
               <a:buNone/>
             </a:pPr>
             <a:r>
@@ -16044,7 +15863,7 @@
           <a:bodyPr wrap="square" lIns="0" tIns="0" rIns="0" bIns="0" rtlCol="0" anchor="t"/>
           <a:lstStyle/>
           <a:p>
-            <a:pPr indent="0" marL="0">
+            <a:pPr marL="0" indent="0">
               <a:buNone/>
             </a:pPr>
             <a:r>
@@ -16083,7 +15902,7 @@
           <a:bodyPr wrap="square" lIns="0" tIns="0" rIns="0" bIns="0" rtlCol="0" anchor="t"/>
           <a:lstStyle/>
           <a:p>
-            <a:pPr indent="0" marL="0">
+            <a:pPr marL="0" indent="0">
               <a:buNone/>
             </a:pPr>
             <a:r>
@@ -16122,7 +15941,7 @@
           <a:bodyPr wrap="square" lIns="0" tIns="0" rIns="0" bIns="0" rtlCol="0" anchor="t"/>
           <a:lstStyle/>
           <a:p>
-            <a:pPr indent="0" marL="0">
+            <a:pPr marL="0" indent="0">
               <a:buNone/>
             </a:pPr>
             <a:r>
@@ -16161,7 +15980,7 @@
           <a:bodyPr wrap="square" lIns="0" tIns="0" rIns="0" bIns="0" rtlCol="0" anchor="t"/>
           <a:lstStyle/>
           <a:p>
-            <a:pPr indent="0" marL="0">
+            <a:pPr marL="0" indent="0">
               <a:buNone/>
             </a:pPr>
             <a:r>
@@ -16195,6 +16014,7 @@
         <a:solidFill>
           <a:srgbClr val="FFFFFF"/>
         </a:solidFill>
+        <a:effectLst/>
       </p:bgPr>
     </p:bg>
     <p:spTree>
@@ -16232,7 +16052,7 @@
           <a:bodyPr wrap="square" lIns="0" tIns="0" rIns="0" bIns="0" rtlCol="0" anchor="t"/>
           <a:lstStyle/>
           <a:p>
-            <a:pPr indent="0" marL="0">
+            <a:pPr marL="0" indent="0">
               <a:buNone/>
             </a:pPr>
             <a:r>
@@ -16271,7 +16091,7 @@
           <a:bodyPr wrap="square" lIns="0" tIns="0" rIns="0" bIns="0" rtlCol="0" anchor="t"/>
           <a:lstStyle/>
           <a:p>
-            <a:pPr indent="0" marL="0">
+            <a:pPr marL="0" indent="0">
               <a:buNone/>
             </a:pPr>
             <a:r>
@@ -16310,7 +16130,7 @@
           <a:bodyPr wrap="square" lIns="0" tIns="0" rIns="0" bIns="0" rtlCol="0" anchor="t"/>
           <a:lstStyle/>
           <a:p>
-            <a:pPr indent="0" marL="0">
+            <a:pPr marL="0" indent="0">
               <a:buNone/>
             </a:pPr>
             <a:r>
@@ -16372,7 +16192,7 @@
           <a:bodyPr wrap="square" lIns="0" tIns="0" rIns="0" bIns="0" rtlCol="0" anchor="t"/>
           <a:lstStyle/>
           <a:p>
-            <a:pPr algn="r" indent="0" marL="0">
+            <a:pPr marL="0" indent="0" algn="r">
               <a:buNone/>
             </a:pPr>
             <a:r>
@@ -16411,7 +16231,7 @@
           <a:bodyPr wrap="square" lIns="0" tIns="0" rIns="0" bIns="0" rtlCol="0" anchor="t"/>
           <a:lstStyle/>
           <a:p>
-            <a:pPr indent="0" marL="0">
+            <a:pPr marL="0" indent="0">
               <a:buNone/>
             </a:pPr>
             <a:r>
@@ -16450,7 +16270,7 @@
           <a:bodyPr wrap="square" lIns="0" tIns="0" rIns="0" bIns="0" rtlCol="0" anchor="t"/>
           <a:lstStyle/>
           <a:p>
-            <a:pPr indent="0" marL="0">
+            <a:pPr marL="0" indent="0">
               <a:buNone/>
             </a:pPr>
             <a:r>
@@ -16489,7 +16309,7 @@
           <a:bodyPr wrap="square" lIns="0" tIns="0" rIns="0" bIns="0" rtlCol="0" anchor="t"/>
           <a:lstStyle/>
           <a:p>
-            <a:pPr indent="0" marL="0">
+            <a:pPr marL="0" indent="0">
               <a:buNone/>
             </a:pPr>
             <a:r>
@@ -16506,7 +16326,7 @@
             <a:endParaRPr lang="es-PE" sz="1900" dirty="0"/>
           </a:p>
           <a:p>
-            <a:pPr indent="0" marL="0">
+            <a:pPr marL="0" indent="0">
               <a:buNone/>
             </a:pPr>
             <a:r>
@@ -16545,7 +16365,7 @@
           <a:bodyPr wrap="square" lIns="0" tIns="0" rIns="0" bIns="0" rtlCol="0" anchor="t"/>
           <a:lstStyle/>
           <a:p>
-            <a:pPr indent="0" marL="0">
+            <a:pPr marL="0" indent="0">
               <a:buNone/>
             </a:pPr>
             <a:r>
@@ -16584,7 +16404,7 @@
           <a:bodyPr wrap="square" lIns="0" tIns="0" rIns="0" bIns="0" rtlCol="0" anchor="t"/>
           <a:lstStyle/>
           <a:p>
-            <a:pPr indent="0" marL="0">
+            <a:pPr marL="0" indent="0">
               <a:buNone/>
             </a:pPr>
             <a:r>
@@ -16623,7 +16443,7 @@
           <a:bodyPr wrap="square" lIns="0" tIns="0" rIns="0" bIns="0" rtlCol="0" anchor="t"/>
           <a:lstStyle/>
           <a:p>
-            <a:pPr indent="0" marL="0">
+            <a:pPr marL="0" indent="0">
               <a:buNone/>
             </a:pPr>
             <a:r>
@@ -16685,7 +16505,7 @@
           <a:bodyPr wrap="square" lIns="0" tIns="0" rIns="0" bIns="0" rtlCol="0" anchor="t"/>
           <a:lstStyle/>
           <a:p>
-            <a:pPr indent="0" marL="0">
+            <a:pPr marL="0" indent="0">
               <a:buNone/>
             </a:pPr>
             <a:r>
@@ -16747,7 +16567,7 @@
           <a:bodyPr wrap="square" lIns="0" tIns="0" rIns="0" bIns="0" rtlCol="0" anchor="t"/>
           <a:lstStyle/>
           <a:p>
-            <a:pPr indent="0" marL="0">
+            <a:pPr marL="0" indent="0">
               <a:buNone/>
             </a:pPr>
             <a:r>
@@ -16809,7 +16629,7 @@
           <a:bodyPr wrap="square" lIns="0" tIns="0" rIns="0" bIns="0" rtlCol="0" anchor="t"/>
           <a:lstStyle/>
           <a:p>
-            <a:pPr indent="0" marL="0">
+            <a:pPr marL="0" indent="0">
               <a:buNone/>
             </a:pPr>
             <a:r>
@@ -16896,7 +16716,7 @@
           <a:bodyPr wrap="square" lIns="0" tIns="0" rIns="0" bIns="0" rtlCol="0" anchor="t"/>
           <a:lstStyle/>
           <a:p>
-            <a:pPr indent="0" marL="0">
+            <a:pPr marL="0" indent="0">
               <a:buNone/>
             </a:pPr>
             <a:r>
@@ -16960,7 +16780,7 @@
           <a:bodyPr wrap="square" lIns="0" tIns="0" rIns="0" bIns="0" rtlCol="0" anchor="t"/>
           <a:lstStyle/>
           <a:p>
-            <a:pPr indent="0" marL="0">
+            <a:pPr marL="0" indent="0">
               <a:buNone/>
             </a:pPr>
             <a:r>
@@ -17024,7 +16844,7 @@
           <a:bodyPr wrap="square" lIns="0" tIns="0" rIns="0" bIns="0" rtlCol="0" anchor="t"/>
           <a:lstStyle/>
           <a:p>
-            <a:pPr indent="0" marL="0">
+            <a:pPr marL="0" indent="0">
               <a:buNone/>
             </a:pPr>
             <a:r>
@@ -17088,7 +16908,7 @@
           <a:bodyPr wrap="square" lIns="0" tIns="0" rIns="0" bIns="0" rtlCol="0" anchor="t"/>
           <a:lstStyle/>
           <a:p>
-            <a:pPr indent="0" marL="0">
+            <a:pPr marL="0" indent="0">
               <a:buNone/>
             </a:pPr>
             <a:r>
@@ -17152,7 +16972,7 @@
           <a:bodyPr wrap="square" lIns="0" tIns="0" rIns="0" bIns="0" rtlCol="0" anchor="t"/>
           <a:lstStyle/>
           <a:p>
-            <a:pPr indent="0" marL="0">
+            <a:pPr marL="0" indent="0">
               <a:buNone/>
             </a:pPr>
             <a:r>
@@ -17312,7 +17132,7 @@
           <a:bodyPr wrap="square" lIns="0" tIns="0" rIns="0" bIns="0" rtlCol="0" anchor="t"/>
           <a:lstStyle/>
           <a:p>
-            <a:pPr indent="0" marL="0">
+            <a:pPr marL="0" indent="0">
               <a:buNone/>
             </a:pPr>
             <a:r>
@@ -17351,7 +17171,7 @@
           <a:bodyPr wrap="square" lIns="0" tIns="0" rIns="0" bIns="0" rtlCol="0" anchor="t"/>
           <a:lstStyle/>
           <a:p>
-            <a:pPr indent="0" marL="0">
+            <a:pPr marL="0" indent="0">
               <a:buNone/>
             </a:pPr>
             <a:r>
@@ -17368,7 +17188,7 @@
             <a:endParaRPr lang="es-PE" sz="1700" dirty="0"/>
           </a:p>
           <a:p>
-            <a:pPr indent="0" marL="0">
+            <a:pPr marL="0" indent="0">
               <a:buNone/>
             </a:pPr>
             <a:r>
@@ -17431,7 +17251,7 @@
           <a:bodyPr wrap="square" lIns="0" tIns="0" rIns="0" bIns="0" rtlCol="0" anchor="t"/>
           <a:lstStyle/>
           <a:p>
-            <a:pPr indent="0" marL="0">
+            <a:pPr marL="0" indent="0">
               <a:buNone/>
             </a:pPr>
             <a:r>
@@ -17465,6 +17285,7 @@
         <a:solidFill>
           <a:srgbClr val="FFFFFF"/>
         </a:solidFill>
+        <a:effectLst/>
       </p:bgPr>
     </p:bg>
     <p:spTree>
@@ -17502,7 +17323,7 @@
           <a:bodyPr wrap="square" lIns="0" tIns="0" rIns="0" bIns="0" rtlCol="0" anchor="t"/>
           <a:lstStyle/>
           <a:p>
-            <a:pPr indent="0" marL="0">
+            <a:pPr marL="0" indent="0">
               <a:buNone/>
             </a:pPr>
             <a:r>
@@ -17541,7 +17362,7 @@
           <a:bodyPr wrap="square" lIns="0" tIns="0" rIns="0" bIns="0" rtlCol="0" anchor="t"/>
           <a:lstStyle/>
           <a:p>
-            <a:pPr indent="0" marL="0">
+            <a:pPr marL="0" indent="0">
               <a:buNone/>
             </a:pPr>
             <a:r>
@@ -17580,7 +17401,7 @@
           <a:bodyPr wrap="square" lIns="0" tIns="0" rIns="0" bIns="0" rtlCol="0" anchor="t"/>
           <a:lstStyle/>
           <a:p>
-            <a:pPr indent="0" marL="0">
+            <a:pPr marL="0" indent="0">
               <a:buNone/>
             </a:pPr>
             <a:r>
@@ -17642,7 +17463,7 @@
           <a:bodyPr wrap="square" lIns="0" tIns="0" rIns="0" bIns="0" rtlCol="0" anchor="t"/>
           <a:lstStyle/>
           <a:p>
-            <a:pPr algn="r" indent="0" marL="0">
+            <a:pPr marL="0" indent="0" algn="r">
               <a:buNone/>
             </a:pPr>
             <a:r>
@@ -17681,7 +17502,7 @@
           <a:bodyPr wrap="square" lIns="0" tIns="0" rIns="0" bIns="0" rtlCol="0" anchor="t"/>
           <a:lstStyle/>
           <a:p>
-            <a:pPr indent="0" marL="0">
+            <a:pPr marL="0" indent="0">
               <a:buNone/>
             </a:pPr>
             <a:r>
@@ -17745,7 +17566,7 @@
           <a:bodyPr wrap="square" lIns="0" tIns="0" rIns="0" bIns="0" rtlCol="0" anchor="t"/>
           <a:lstStyle/>
           <a:p>
-            <a:pPr indent="0" marL="0">
+            <a:pPr marL="0" indent="0">
               <a:buNone/>
             </a:pPr>
             <a:r>
@@ -17784,7 +17605,7 @@
           <a:bodyPr wrap="square" lIns="0" tIns="0" rIns="0" bIns="0" rtlCol="0" anchor="t"/>
           <a:lstStyle/>
           <a:p>
-            <a:pPr indent="0" marL="0">
+            <a:pPr marL="0" indent="0">
               <a:buNone/>
             </a:pPr>
             <a:r>
@@ -17872,7 +17693,7 @@
           <a:bodyPr wrap="square" lIns="0" tIns="0" rIns="0" bIns="0" rtlCol="0" anchor="t"/>
           <a:lstStyle/>
           <a:p>
-            <a:pPr indent="0" marL="0">
+            <a:pPr marL="0" indent="0">
               <a:buNone/>
             </a:pPr>
             <a:r>
@@ -17911,7 +17732,7 @@
           <a:bodyPr wrap="square" lIns="0" tIns="0" rIns="0" bIns="0" rtlCol="0" anchor="t"/>
           <a:lstStyle/>
           <a:p>
-            <a:pPr indent="0" marL="0">
+            <a:pPr marL="0" indent="0">
               <a:buNone/>
             </a:pPr>
             <a:r>
@@ -17999,7 +17820,7 @@
           <a:bodyPr wrap="square" lIns="0" tIns="0" rIns="0" bIns="0" rtlCol="0" anchor="t"/>
           <a:lstStyle/>
           <a:p>
-            <a:pPr indent="0" marL="0">
+            <a:pPr marL="0" indent="0">
               <a:buNone/>
             </a:pPr>
             <a:r>
@@ -18038,7 +17859,7 @@
           <a:bodyPr wrap="square" lIns="0" tIns="0" rIns="0" bIns="0" rtlCol="0" anchor="t"/>
           <a:lstStyle/>
           <a:p>
-            <a:pPr indent="0" marL="0">
+            <a:pPr marL="0" indent="0">
               <a:buNone/>
             </a:pPr>
             <a:r>
@@ -18077,7 +17898,7 @@
           <a:bodyPr wrap="square" lIns="0" tIns="0" rIns="0" bIns="0" rtlCol="0" anchor="t"/>
           <a:lstStyle/>
           <a:p>
-            <a:pPr indent="0" marL="0">
+            <a:pPr marL="0" indent="0">
               <a:buNone/>
             </a:pPr>
             <a:r>
@@ -18116,7 +17937,7 @@
           <a:bodyPr wrap="square" lIns="0" tIns="0" rIns="0" bIns="0" rtlCol="0" anchor="t"/>
           <a:lstStyle/>
           <a:p>
-            <a:pPr indent="0" marL="0">
+            <a:pPr marL="0" indent="0">
               <a:buNone/>
             </a:pPr>
             <a:r>
@@ -18155,7 +17976,7 @@
           <a:bodyPr wrap="square" lIns="0" tIns="0" rIns="0" bIns="0" rtlCol="0" anchor="t"/>
           <a:lstStyle/>
           <a:p>
-            <a:pPr indent="0" marL="0">
+            <a:pPr marL="0" indent="0">
               <a:buNone/>
             </a:pPr>
             <a:r>
@@ -18219,7 +18040,7 @@
           <a:bodyPr wrap="square" lIns="0" tIns="0" rIns="0" bIns="0" rtlCol="0" anchor="t"/>
           <a:lstStyle/>
           <a:p>
-            <a:pPr indent="0" marL="0">
+            <a:pPr marL="0" indent="0">
               <a:buNone/>
             </a:pPr>
             <a:r>
@@ -18258,7 +18079,7 @@
           <a:bodyPr wrap="square" lIns="0" tIns="0" rIns="0" bIns="0" rtlCol="0" anchor="t"/>
           <a:lstStyle/>
           <a:p>
-            <a:pPr indent="0" marL="0">
+            <a:pPr marL="0" indent="0">
               <a:buNone/>
             </a:pPr>
             <a:r>
@@ -18346,7 +18167,7 @@
           <a:bodyPr wrap="square" lIns="0" tIns="0" rIns="0" bIns="0" rtlCol="0" anchor="t"/>
           <a:lstStyle/>
           <a:p>
-            <a:pPr indent="0" marL="0">
+            <a:pPr marL="0" indent="0">
               <a:buNone/>
             </a:pPr>
             <a:r>
@@ -18385,7 +18206,7 @@
           <a:bodyPr wrap="square" lIns="0" tIns="0" rIns="0" bIns="0" rtlCol="0" anchor="t"/>
           <a:lstStyle/>
           <a:p>
-            <a:pPr indent="0" marL="0">
+            <a:pPr marL="0" indent="0">
               <a:buNone/>
             </a:pPr>
             <a:r>
@@ -18473,7 +18294,7 @@
           <a:bodyPr wrap="square" lIns="0" tIns="0" rIns="0" bIns="0" rtlCol="0" anchor="t"/>
           <a:lstStyle/>
           <a:p>
-            <a:pPr indent="0" marL="0">
+            <a:pPr marL="0" indent="0">
               <a:buNone/>
             </a:pPr>
             <a:r>
@@ -18512,7 +18333,7 @@
           <a:bodyPr wrap="square" lIns="0" tIns="0" rIns="0" bIns="0" rtlCol="0" anchor="t"/>
           <a:lstStyle/>
           <a:p>
-            <a:pPr indent="0" marL="0">
+            <a:pPr marL="0" indent="0">
               <a:buNone/>
             </a:pPr>
             <a:r>
@@ -18600,7 +18421,7 @@
           <a:bodyPr wrap="square" lIns="0" tIns="0" rIns="0" bIns="0" rtlCol="0" anchor="t"/>
           <a:lstStyle/>
           <a:p>
-            <a:pPr indent="0" marL="0">
+            <a:pPr marL="0" indent="0">
               <a:buNone/>
             </a:pPr>
             <a:r>
@@ -18639,7 +18460,7 @@
           <a:bodyPr wrap="square" lIns="0" tIns="0" rIns="0" bIns="0" rtlCol="0" anchor="t"/>
           <a:lstStyle/>
           <a:p>
-            <a:pPr indent="0" marL="0">
+            <a:pPr marL="0" indent="0">
               <a:buNone/>
             </a:pPr>
             <a:r>
@@ -18701,7 +18522,7 @@
           <a:bodyPr wrap="square" lIns="0" tIns="0" rIns="0" bIns="0" rtlCol="0" anchor="t"/>
           <a:lstStyle/>
           <a:p>
-            <a:pPr indent="0" marL="0">
+            <a:pPr marL="0" indent="0">
               <a:buNone/>
             </a:pPr>
             <a:r>
@@ -18740,7 +18561,7 @@
           <a:bodyPr wrap="square" lIns="0" tIns="0" rIns="0" bIns="0" rtlCol="0" anchor="t"/>
           <a:lstStyle/>
           <a:p>
-            <a:pPr indent="0" marL="0">
+            <a:pPr marL="0" indent="0">
               <a:buNone/>
             </a:pPr>
             <a:r>
@@ -18779,7 +18600,7 @@
           <a:bodyPr wrap="square" lIns="0" tIns="0" rIns="0" bIns="0" rtlCol="0" anchor="t"/>
           <a:lstStyle/>
           <a:p>
-            <a:pPr indent="0" marL="0">
+            <a:pPr marL="0" indent="0">
               <a:buNone/>
             </a:pPr>
             <a:r>
@@ -18818,7 +18639,7 @@
           <a:bodyPr wrap="square" lIns="0" tIns="0" rIns="0" bIns="0" rtlCol="0" anchor="t"/>
           <a:lstStyle/>
           <a:p>
-            <a:pPr indent="0" marL="0">
+            <a:pPr marL="0" indent="0">
               <a:buNone/>
             </a:pPr>
             <a:r>
@@ -18852,6 +18673,7 @@
         <a:solidFill>
           <a:srgbClr val="FFFFFF"/>
         </a:solidFill>
+        <a:effectLst/>
       </p:bgPr>
     </p:bg>
     <p:spTree>
@@ -18889,7 +18711,7 @@
           <a:bodyPr wrap="square" lIns="0" tIns="0" rIns="0" bIns="0" rtlCol="0" anchor="t"/>
           <a:lstStyle/>
           <a:p>
-            <a:pPr indent="0" marL="0">
+            <a:pPr marL="0" indent="0">
               <a:buNone/>
             </a:pPr>
             <a:r>
@@ -18928,7 +18750,7 @@
           <a:bodyPr wrap="square" lIns="0" tIns="0" rIns="0" bIns="0" rtlCol="0" anchor="t"/>
           <a:lstStyle/>
           <a:p>
-            <a:pPr indent="0" marL="0">
+            <a:pPr marL="0" indent="0">
               <a:buNone/>
             </a:pPr>
             <a:r>
@@ -18967,7 +18789,7 @@
           <a:bodyPr wrap="square" lIns="0" tIns="0" rIns="0" bIns="0" rtlCol="0" anchor="t"/>
           <a:lstStyle/>
           <a:p>
-            <a:pPr indent="0" marL="0">
+            <a:pPr marL="0" indent="0">
               <a:buNone/>
             </a:pPr>
             <a:r>
@@ -19029,7 +18851,7 @@
           <a:bodyPr wrap="square" lIns="0" tIns="0" rIns="0" bIns="0" rtlCol="0" anchor="t"/>
           <a:lstStyle/>
           <a:p>
-            <a:pPr algn="r" indent="0" marL="0">
+            <a:pPr marL="0" indent="0" algn="r">
               <a:buNone/>
             </a:pPr>
             <a:r>
@@ -19093,7 +18915,7 @@
           <a:bodyPr wrap="square" lIns="0" tIns="0" rIns="0" bIns="0" rtlCol="0" anchor="t"/>
           <a:lstStyle/>
           <a:p>
-            <a:pPr indent="0" marL="0">
+            <a:pPr marL="0" indent="0">
               <a:buNone/>
             </a:pPr>
             <a:r>
@@ -19156,7 +18978,7 @@
           <a:bodyPr wrap="square" lIns="0" tIns="0" rIns="0" bIns="0" rtlCol="0" anchor="t"/>
           <a:lstStyle/>
           <a:p>
-            <a:pPr indent="0" marL="0">
+            <a:pPr marL="0" indent="0">
               <a:buNone/>
             </a:pPr>
             <a:r>
@@ -19195,7 +19017,7 @@
           <a:bodyPr wrap="square" lIns="0" tIns="0" rIns="0" bIns="0" rtlCol="0" anchor="t"/>
           <a:lstStyle/>
           <a:p>
-            <a:pPr indent="0" marL="0">
+            <a:pPr marL="0" indent="0">
               <a:buNone/>
             </a:pPr>
             <a:r>
@@ -19234,7 +19056,7 @@
           <a:bodyPr wrap="square" lIns="0" tIns="0" rIns="0" bIns="0" rtlCol="0" anchor="t"/>
           <a:lstStyle/>
           <a:p>
-            <a:pPr indent="0" marL="0">
+            <a:pPr marL="0" indent="0">
               <a:buNone/>
             </a:pPr>
             <a:r>
@@ -19273,7 +19095,7 @@
           <a:bodyPr wrap="square" lIns="0" tIns="0" rIns="0" bIns="0" rtlCol="0" anchor="t"/>
           <a:lstStyle/>
           <a:p>
-            <a:pPr indent="0" marL="0">
+            <a:pPr marL="0" indent="0">
               <a:buNone/>
             </a:pPr>
             <a:r>
@@ -19337,7 +19159,7 @@
           <a:bodyPr wrap="square" lIns="0" tIns="0" rIns="0" bIns="0" rtlCol="0" anchor="t"/>
           <a:lstStyle/>
           <a:p>
-            <a:pPr indent="0" marL="0">
+            <a:pPr marL="0" indent="0">
               <a:buNone/>
             </a:pPr>
             <a:r>
@@ -19376,7 +19198,7 @@
           <a:bodyPr wrap="square" lIns="0" tIns="0" rIns="0" bIns="0" rtlCol="0" anchor="t"/>
           <a:lstStyle/>
           <a:p>
-            <a:pPr indent="0" marL="0">
+            <a:pPr marL="0" indent="0">
               <a:buNone/>
             </a:pPr>
             <a:r>
@@ -19440,7 +19262,7 @@
           <a:bodyPr wrap="square" lIns="0" tIns="0" rIns="0" bIns="0" rtlCol="0" anchor="t"/>
           <a:lstStyle/>
           <a:p>
-            <a:pPr indent="0" marL="0">
+            <a:pPr marL="0" indent="0">
               <a:buNone/>
             </a:pPr>
             <a:r>
@@ -19479,7 +19301,7 @@
           <a:bodyPr wrap="square" lIns="0" tIns="0" rIns="0" bIns="0" rtlCol="0" anchor="t"/>
           <a:lstStyle/>
           <a:p>
-            <a:pPr indent="0" marL="0">
+            <a:pPr marL="0" indent="0">
               <a:buNone/>
             </a:pPr>
             <a:r>
@@ -19543,7 +19365,7 @@
           <a:bodyPr wrap="square" lIns="0" tIns="0" rIns="0" bIns="0" rtlCol="0" anchor="t"/>
           <a:lstStyle/>
           <a:p>
-            <a:pPr indent="0" marL="0">
+            <a:pPr marL="0" indent="0">
               <a:buNone/>
             </a:pPr>
             <a:r>
@@ -19582,7 +19404,7 @@
           <a:bodyPr wrap="square" lIns="0" tIns="0" rIns="0" bIns="0" rtlCol="0" anchor="t"/>
           <a:lstStyle/>
           <a:p>
-            <a:pPr indent="0" marL="0">
+            <a:pPr marL="0" indent="0">
               <a:buNone/>
             </a:pPr>
             <a:r>
@@ -19646,7 +19468,7 @@
           <a:bodyPr wrap="square" lIns="0" tIns="0" rIns="0" bIns="0" rtlCol="0" anchor="t"/>
           <a:lstStyle/>
           <a:p>
-            <a:pPr indent="0" marL="0">
+            <a:pPr marL="0" indent="0">
               <a:buNone/>
             </a:pPr>
             <a:r>
@@ -19685,7 +19507,7 @@
           <a:bodyPr wrap="square" lIns="0" tIns="0" rIns="0" bIns="0" rtlCol="0" anchor="t"/>
           <a:lstStyle/>
           <a:p>
-            <a:pPr indent="0" marL="0">
+            <a:pPr marL="0" indent="0">
               <a:buNone/>
             </a:pPr>
             <a:r>
@@ -19796,7 +19618,7 @@
           <a:bodyPr wrap="square" lIns="0" tIns="0" rIns="0" bIns="0" rtlCol="0" anchor="t"/>
           <a:lstStyle/>
           <a:p>
-            <a:pPr indent="0" marL="0">
+            <a:pPr marL="0" indent="0">
               <a:buNone/>
             </a:pPr>
             <a:r>
@@ -19835,7 +19657,7 @@
           <a:bodyPr wrap="square" lIns="0" tIns="0" rIns="0" bIns="0" rtlCol="0" anchor="t"/>
           <a:lstStyle/>
           <a:p>
-            <a:pPr indent="0" marL="0">
+            <a:pPr marL="0" indent="0">
               <a:buNone/>
             </a:pPr>
             <a:r>
@@ -19874,7 +19696,7 @@
           <a:bodyPr wrap="square" lIns="0" tIns="0" rIns="0" bIns="0" rtlCol="0" anchor="t"/>
           <a:lstStyle/>
           <a:p>
-            <a:pPr indent="0" marL="0">
+            <a:pPr marL="0" indent="0">
               <a:buNone/>
             </a:pPr>
             <a:r>
@@ -19913,7 +19735,7 @@
           <a:bodyPr wrap="square" lIns="0" tIns="0" rIns="0" bIns="0" rtlCol="0" anchor="t"/>
           <a:lstStyle/>
           <a:p>
-            <a:pPr indent="0" marL="0">
+            <a:pPr marL="0" indent="0">
               <a:buNone/>
             </a:pPr>
             <a:r>
@@ -19977,7 +19799,7 @@
           <a:bodyPr wrap="square" lIns="0" tIns="0" rIns="0" bIns="0" rtlCol="0" anchor="t"/>
           <a:lstStyle/>
           <a:p>
-            <a:pPr indent="0" marL="0">
+            <a:pPr marL="0" indent="0">
               <a:buNone/>
             </a:pPr>
             <a:r>
@@ -20016,7 +19838,7 @@
           <a:bodyPr wrap="square" lIns="0" tIns="0" rIns="0" bIns="0" rtlCol="0" anchor="t"/>
           <a:lstStyle/>
           <a:p>
-            <a:pPr indent="0" marL="0">
+            <a:pPr marL="0" indent="0">
               <a:buNone/>
             </a:pPr>
             <a:r>
@@ -20080,7 +19902,7 @@
           <a:bodyPr wrap="square" lIns="0" tIns="0" rIns="0" bIns="0" rtlCol="0" anchor="t"/>
           <a:lstStyle/>
           <a:p>
-            <a:pPr indent="0" marL="0">
+            <a:pPr marL="0" indent="0">
               <a:buNone/>
             </a:pPr>
             <a:r>
@@ -20119,7 +19941,7 @@
           <a:bodyPr wrap="square" lIns="0" tIns="0" rIns="0" bIns="0" rtlCol="0" anchor="t"/>
           <a:lstStyle/>
           <a:p>
-            <a:pPr indent="0" marL="0">
+            <a:pPr marL="0" indent="0">
               <a:buNone/>
             </a:pPr>
             <a:r>
@@ -20183,7 +20005,7 @@
           <a:bodyPr wrap="square" lIns="0" tIns="0" rIns="0" bIns="0" rtlCol="0" anchor="t"/>
           <a:lstStyle/>
           <a:p>
-            <a:pPr indent="0" marL="0">
+            <a:pPr marL="0" indent="0">
               <a:buNone/>
             </a:pPr>
             <a:r>
@@ -20222,7 +20044,7 @@
           <a:bodyPr wrap="square" lIns="0" tIns="0" rIns="0" bIns="0" rtlCol="0" anchor="t"/>
           <a:lstStyle/>
           <a:p>
-            <a:pPr indent="0" marL="0">
+            <a:pPr marL="0" indent="0">
               <a:buNone/>
             </a:pPr>
             <a:r>
@@ -20286,7 +20108,7 @@
           <a:bodyPr wrap="square" lIns="0" tIns="0" rIns="0" bIns="0" rtlCol="0" anchor="t"/>
           <a:lstStyle/>
           <a:p>
-            <a:pPr indent="0" marL="0">
+            <a:pPr marL="0" indent="0">
               <a:buNone/>
             </a:pPr>
             <a:r>
@@ -20325,7 +20147,7 @@
           <a:bodyPr wrap="square" lIns="0" tIns="0" rIns="0" bIns="0" rtlCol="0" anchor="t"/>
           <a:lstStyle/>
           <a:p>
-            <a:pPr indent="0" marL="0">
+            <a:pPr marL="0" indent="0">
               <a:buNone/>
             </a:pPr>
             <a:r>
@@ -20555,7 +20377,7 @@
           <a:bodyPr wrap="square" lIns="0" tIns="0" rIns="0" bIns="0" rtlCol="0" anchor="t"/>
           <a:lstStyle/>
           <a:p>
-            <a:pPr indent="0" marL="0">
+            <a:pPr marL="0" indent="0">
               <a:buNone/>
             </a:pPr>
             <a:r>
@@ -20594,7 +20416,7 @@
           <a:bodyPr wrap="square" lIns="0" tIns="0" rIns="0" bIns="0" rtlCol="0" anchor="t"/>
           <a:lstStyle/>
           <a:p>
-            <a:pPr indent="0" marL="0">
+            <a:pPr marL="0" indent="0">
               <a:buNone/>
             </a:pPr>
             <a:r>
@@ -20628,6 +20450,7 @@
         <a:solidFill>
           <a:srgbClr val="FFFFFF"/>
         </a:solidFill>
+        <a:effectLst/>
       </p:bgPr>
     </p:bg>
     <p:spTree>
@@ -20665,7 +20488,7 @@
           <a:bodyPr wrap="square" lIns="0" tIns="0" rIns="0" bIns="0" rtlCol="0" anchor="t"/>
           <a:lstStyle/>
           <a:p>
-            <a:pPr indent="0" marL="0">
+            <a:pPr marL="0" indent="0">
               <a:buNone/>
             </a:pPr>
             <a:r>
@@ -20704,7 +20527,7 @@
           <a:bodyPr wrap="square" lIns="0" tIns="0" rIns="0" bIns="0" rtlCol="0" anchor="t"/>
           <a:lstStyle/>
           <a:p>
-            <a:pPr indent="0" marL="0">
+            <a:pPr marL="0" indent="0">
               <a:buNone/>
             </a:pPr>
             <a:r>
@@ -20743,7 +20566,7 @@
           <a:bodyPr wrap="square" lIns="0" tIns="0" rIns="0" bIns="0" rtlCol="0" anchor="t"/>
           <a:lstStyle/>
           <a:p>
-            <a:pPr indent="0" marL="0">
+            <a:pPr marL="0" indent="0">
               <a:buNone/>
             </a:pPr>
             <a:r>
@@ -20805,7 +20628,7 @@
           <a:bodyPr wrap="square" lIns="0" tIns="0" rIns="0" bIns="0" rtlCol="0" anchor="t"/>
           <a:lstStyle/>
           <a:p>
-            <a:pPr algn="r" indent="0" marL="0">
+            <a:pPr marL="0" indent="0" algn="r">
               <a:buNone/>
             </a:pPr>
             <a:r>
@@ -20844,7 +20667,7 @@
           <a:bodyPr wrap="square" lIns="0" tIns="0" rIns="0" bIns="0" rtlCol="0" anchor="t"/>
           <a:lstStyle/>
           <a:p>
-            <a:pPr indent="0" marL="0">
+            <a:pPr marL="0" indent="0">
               <a:buNone/>
             </a:pPr>
             <a:r>
@@ -20933,7 +20756,7 @@
           <a:bodyPr wrap="square" lIns="0" tIns="0" rIns="0" bIns="0" rtlCol="0" anchor="t"/>
           <a:lstStyle/>
           <a:p>
-            <a:pPr indent="0" marL="0">
+            <a:pPr marL="0" indent="0">
               <a:buNone/>
             </a:pPr>
             <a:r>
@@ -20972,7 +20795,7 @@
           <a:bodyPr wrap="square" lIns="0" tIns="0" rIns="0" bIns="0" rtlCol="0" anchor="t"/>
           <a:lstStyle/>
           <a:p>
-            <a:pPr indent="0" marL="0">
+            <a:pPr marL="0" indent="0">
               <a:buNone/>
             </a:pPr>
             <a:r>
@@ -20989,7 +20812,7 @@
             <a:endParaRPr lang="es-PE" sz="1400" dirty="0"/>
           </a:p>
           <a:p>
-            <a:pPr indent="0" marL="0">
+            <a:pPr marL="0" indent="0">
               <a:buNone/>
             </a:pPr>
             <a:r>
@@ -21078,7 +20901,7 @@
           <a:bodyPr wrap="square" lIns="0" tIns="0" rIns="0" bIns="0" rtlCol="0" anchor="t"/>
           <a:lstStyle/>
           <a:p>
-            <a:pPr indent="0" marL="0">
+            <a:pPr marL="0" indent="0">
               <a:buNone/>
             </a:pPr>
             <a:r>
@@ -21117,7 +20940,7 @@
           <a:bodyPr wrap="square" lIns="0" tIns="0" rIns="0" bIns="0" rtlCol="0" anchor="t"/>
           <a:lstStyle/>
           <a:p>
-            <a:pPr indent="0" marL="0">
+            <a:pPr marL="0" indent="0">
               <a:buNone/>
             </a:pPr>
             <a:r>
@@ -21134,7 +20957,7 @@
             <a:endParaRPr lang="es-PE" sz="1400" dirty="0"/>
           </a:p>
           <a:p>
-            <a:pPr indent="0" marL="0">
+            <a:pPr marL="0" indent="0">
               <a:buNone/>
             </a:pPr>
             <a:r>
@@ -21151,7 +20974,7 @@
             <a:endParaRPr lang="es-PE" sz="1400" dirty="0"/>
           </a:p>
           <a:p>
-            <a:pPr indent="0" marL="0">
+            <a:pPr marL="0" indent="0">
               <a:buNone/>
             </a:pPr>
             <a:r>
@@ -21240,7 +21063,7 @@
           <a:bodyPr wrap="square" lIns="0" tIns="0" rIns="0" bIns="0" rtlCol="0" anchor="t"/>
           <a:lstStyle/>
           <a:p>
-            <a:pPr indent="0" marL="0">
+            <a:pPr marL="0" indent="0">
               <a:buNone/>
             </a:pPr>
             <a:r>
@@ -21279,7 +21102,7 @@
           <a:bodyPr wrap="square" lIns="0" tIns="0" rIns="0" bIns="0" rtlCol="0" anchor="t"/>
           <a:lstStyle/>
           <a:p>
-            <a:pPr indent="0" marL="0">
+            <a:pPr marL="0" indent="0">
               <a:buNone/>
             </a:pPr>
             <a:r>
@@ -21296,7 +21119,7 @@
             <a:endParaRPr lang="es-PE" sz="1400" dirty="0"/>
           </a:p>
           <a:p>
-            <a:pPr indent="0" marL="0">
+            <a:pPr marL="0" indent="0">
               <a:buNone/>
             </a:pPr>
             <a:r>
@@ -21313,7 +21136,7 @@
             <a:endParaRPr lang="es-PE" sz="1400" dirty="0"/>
           </a:p>
           <a:p>
-            <a:pPr indent="0" marL="0">
+            <a:pPr marL="0" indent="0">
               <a:buNone/>
             </a:pPr>
             <a:r>
@@ -21402,7 +21225,7 @@
           <a:bodyPr wrap="square" lIns="0" tIns="0" rIns="0" bIns="0" rtlCol="0" anchor="t"/>
           <a:lstStyle/>
           <a:p>
-            <a:pPr indent="0" marL="0">
+            <a:pPr marL="0" indent="0">
               <a:buNone/>
             </a:pPr>
             <a:r>
@@ -21441,7 +21264,7 @@
           <a:bodyPr wrap="square" lIns="0" tIns="0" rIns="0" bIns="0" rtlCol="0" anchor="t"/>
           <a:lstStyle/>
           <a:p>
-            <a:pPr indent="0" marL="0">
+            <a:pPr marL="0" indent="0">
               <a:buNone/>
             </a:pPr>
             <a:r>
@@ -21458,7 +21281,7 @@
             <a:endParaRPr lang="es-PE" sz="1400" dirty="0"/>
           </a:p>
           <a:p>
-            <a:pPr indent="0" marL="0">
+            <a:pPr marL="0" indent="0">
               <a:buNone/>
             </a:pPr>
             <a:r>
@@ -21547,7 +21370,7 @@
           <a:bodyPr wrap="square" lIns="0" tIns="0" rIns="0" bIns="0" rtlCol="0" anchor="t"/>
           <a:lstStyle/>
           <a:p>
-            <a:pPr indent="0" marL="0">
+            <a:pPr marL="0" indent="0">
               <a:buNone/>
             </a:pPr>
             <a:r>
@@ -21586,7 +21409,7 @@
           <a:bodyPr wrap="square" lIns="0" tIns="0" rIns="0" bIns="0" rtlCol="0" anchor="t"/>
           <a:lstStyle/>
           <a:p>
-            <a:pPr indent="0" marL="0">
+            <a:pPr marL="0" indent="0">
               <a:buNone/>
             </a:pPr>
             <a:r>
@@ -21603,7 +21426,7 @@
             <a:endParaRPr lang="es-PE" sz="1400" dirty="0"/>
           </a:p>
           <a:p>
-            <a:pPr indent="0" marL="0">
+            <a:pPr marL="0" indent="0">
               <a:buNone/>
             </a:pPr>
             <a:r>
@@ -21620,7 +21443,7 @@
             <a:endParaRPr lang="es-PE" sz="1400" dirty="0"/>
           </a:p>
           <a:p>
-            <a:pPr indent="0" marL="0">
+            <a:pPr marL="0" indent="0">
               <a:buNone/>
             </a:pPr>
             <a:r>
@@ -21637,7 +21460,7 @@
             <a:endParaRPr lang="es-PE" sz="1400" dirty="0"/>
           </a:p>
           <a:p>
-            <a:pPr indent="0" marL="0">
+            <a:pPr marL="0" indent="0">
               <a:buNone/>
             </a:pPr>
             <a:r>
@@ -21726,7 +21549,7 @@
           <a:bodyPr wrap="square" lIns="0" tIns="0" rIns="0" bIns="0" rtlCol="0" anchor="t"/>
           <a:lstStyle/>
           <a:p>
-            <a:pPr indent="0" marL="0">
+            <a:pPr marL="0" indent="0">
               <a:buNone/>
             </a:pPr>
             <a:r>
@@ -21765,7 +21588,7 @@
           <a:bodyPr wrap="square" lIns="0" tIns="0" rIns="0" bIns="0" rtlCol="0" anchor="t"/>
           <a:lstStyle/>
           <a:p>
-            <a:pPr indent="0" marL="0">
+            <a:pPr marL="0" indent="0">
               <a:buNone/>
             </a:pPr>
             <a:r>
@@ -21782,7 +21605,7 @@
             <a:endParaRPr lang="es-PE" sz="1400" dirty="0"/>
           </a:p>
           <a:p>
-            <a:pPr indent="0" marL="0">
+            <a:pPr marL="0" indent="0">
               <a:buNone/>
             </a:pPr>
             <a:r>
@@ -21799,7 +21622,7 @@
             <a:endParaRPr lang="es-PE" sz="1400" dirty="0"/>
           </a:p>
           <a:p>
-            <a:pPr indent="0" marL="0">
+            <a:pPr marL="0" indent="0">
               <a:buNone/>
             </a:pPr>
             <a:r>
@@ -21816,7 +21639,7 @@
             <a:endParaRPr lang="es-PE" sz="1400" dirty="0"/>
           </a:p>
           <a:p>
-            <a:pPr indent="0" marL="0">
+            <a:pPr marL="0" indent="0">
               <a:buNone/>
             </a:pPr>
             <a:r>
@@ -21905,7 +21728,7 @@
           <a:bodyPr wrap="square" lIns="0" tIns="0" rIns="0" bIns="0" rtlCol="0" anchor="t"/>
           <a:lstStyle/>
           <a:p>
-            <a:pPr indent="0" marL="0">
+            <a:pPr marL="0" indent="0">
               <a:buNone/>
             </a:pPr>
             <a:r>
@@ -21944,7 +21767,7 @@
           <a:bodyPr wrap="square" lIns="0" tIns="0" rIns="0" bIns="0" rtlCol="0" anchor="t"/>
           <a:lstStyle/>
           <a:p>
-            <a:pPr indent="0" marL="0">
+            <a:pPr marL="0" indent="0">
               <a:buNone/>
             </a:pPr>
             <a:r>
@@ -21961,7 +21784,7 @@
             <a:endParaRPr lang="es-PE" sz="1400" dirty="0"/>
           </a:p>
           <a:p>
-            <a:pPr indent="0" marL="0">
+            <a:pPr marL="0" indent="0">
               <a:buNone/>
             </a:pPr>
             <a:r>
@@ -21978,7 +21801,7 @@
             <a:endParaRPr lang="es-PE" sz="1400" dirty="0"/>
           </a:p>
           <a:p>
-            <a:pPr indent="0" marL="0">
+            <a:pPr marL="0" indent="0">
               <a:buNone/>
             </a:pPr>
             <a:r>
@@ -22067,7 +21890,7 @@
           <a:bodyPr wrap="square" lIns="0" tIns="0" rIns="0" bIns="0" rtlCol="0" anchor="t"/>
           <a:lstStyle/>
           <a:p>
-            <a:pPr indent="0" marL="0">
+            <a:pPr marL="0" indent="0">
               <a:buNone/>
             </a:pPr>
             <a:r>
@@ -22106,7 +21929,7 @@
           <a:bodyPr wrap="square" lIns="0" tIns="0" rIns="0" bIns="0" rtlCol="0" anchor="t"/>
           <a:lstStyle/>
           <a:p>
-            <a:pPr indent="0" marL="0">
+            <a:pPr marL="0" indent="0">
               <a:buNone/>
             </a:pPr>
             <a:r>
@@ -22123,7 +21946,7 @@
             <a:endParaRPr lang="es-PE" sz="1400" dirty="0"/>
           </a:p>
           <a:p>
-            <a:pPr indent="0" marL="0">
+            <a:pPr marL="0" indent="0">
               <a:buNone/>
             </a:pPr>
             <a:r>
@@ -22140,7 +21963,7 @@
             <a:endParaRPr lang="es-PE" sz="1400" dirty="0"/>
           </a:p>
           <a:p>
-            <a:pPr indent="0" marL="0">
+            <a:pPr marL="0" indent="0">
               <a:buNone/>
             </a:pPr>
             <a:r>
@@ -22229,7 +22052,7 @@
           <a:bodyPr wrap="square" lIns="0" tIns="0" rIns="0" bIns="0" rtlCol="0" anchor="t"/>
           <a:lstStyle/>
           <a:p>
-            <a:pPr indent="0" marL="0">
+            <a:pPr marL="0" indent="0">
               <a:buNone/>
             </a:pPr>
             <a:r>
@@ -22268,7 +22091,7 @@
           <a:bodyPr wrap="square" lIns="0" tIns="0" rIns="0" bIns="0" rtlCol="0" anchor="t"/>
           <a:lstStyle/>
           <a:p>
-            <a:pPr indent="0" marL="0">
+            <a:pPr marL="0" indent="0">
               <a:buNone/>
             </a:pPr>
             <a:r>
@@ -22285,7 +22108,7 @@
             <a:endParaRPr lang="es-PE" sz="1400" dirty="0"/>
           </a:p>
           <a:p>
-            <a:pPr indent="0" marL="0">
+            <a:pPr marL="0" indent="0">
               <a:buNone/>
             </a:pPr>
             <a:r>
@@ -22302,7 +22125,7 @@
             <a:endParaRPr lang="es-PE" sz="1400" dirty="0"/>
           </a:p>
           <a:p>
-            <a:pPr indent="0" marL="0">
+            <a:pPr marL="0" indent="0">
               <a:buNone/>
             </a:pPr>
             <a:r>
@@ -22319,7 +22142,7 @@
             <a:endParaRPr lang="es-PE" sz="1400" dirty="0"/>
           </a:p>
           <a:p>
-            <a:pPr indent="0" marL="0">
+            <a:pPr marL="0" indent="0">
               <a:buNone/>
             </a:pPr>
             <a:r>
@@ -22381,7 +22204,7 @@
           <a:bodyPr wrap="square" lIns="0" tIns="0" rIns="0" bIns="0" rtlCol="0" anchor="t"/>
           <a:lstStyle/>
           <a:p>
-            <a:pPr indent="0" marL="0">
+            <a:pPr marL="0" indent="0">
               <a:buNone/>
             </a:pPr>
             <a:r>
@@ -22420,7 +22243,7 @@
           <a:bodyPr wrap="square" lIns="0" tIns="0" rIns="0" bIns="0" rtlCol="0" anchor="t"/>
           <a:lstStyle/>
           <a:p>
-            <a:pPr indent="0" marL="0">
+            <a:pPr marL="0" indent="0">
               <a:buNone/>
             </a:pPr>
             <a:r>
@@ -22482,7 +22305,7 @@
           <a:bodyPr wrap="square" lIns="0" tIns="0" rIns="0" bIns="0" rtlCol="0" anchor="t"/>
           <a:lstStyle/>
           <a:p>
-            <a:pPr indent="0" marL="0">
+            <a:pPr marL="0" indent="0">
               <a:buNone/>
             </a:pPr>
             <a:r>
@@ -22521,7 +22344,7 @@
           <a:bodyPr wrap="square" lIns="0" tIns="0" rIns="0" bIns="0" rtlCol="0" anchor="t"/>
           <a:lstStyle/>
           <a:p>
-            <a:pPr indent="0" marL="0">
+            <a:pPr marL="0" indent="0">
               <a:buNone/>
             </a:pPr>
             <a:r>
@@ -22583,7 +22406,7 @@
           <a:bodyPr wrap="square" lIns="0" tIns="0" rIns="0" bIns="0" rtlCol="0" anchor="t"/>
           <a:lstStyle/>
           <a:p>
-            <a:pPr indent="0" marL="0">
+            <a:pPr marL="0" indent="0">
               <a:buNone/>
             </a:pPr>
             <a:r>
@@ -22622,7 +22445,7 @@
           <a:bodyPr wrap="square" lIns="0" tIns="0" rIns="0" bIns="0" rtlCol="0" anchor="t"/>
           <a:lstStyle/>
           <a:p>
-            <a:pPr indent="0" marL="0">
+            <a:pPr marL="0" indent="0">
               <a:buNone/>
             </a:pPr>
             <a:r>
@@ -22684,7 +22507,7 @@
           <a:bodyPr wrap="square" lIns="0" tIns="0" rIns="0" bIns="0" rtlCol="0" anchor="t"/>
           <a:lstStyle/>
           <a:p>
-            <a:pPr indent="0" marL="0">
+            <a:pPr marL="0" indent="0">
               <a:buNone/>
             </a:pPr>
             <a:r>
@@ -22723,7 +22546,7 @@
           <a:bodyPr wrap="square" lIns="0" tIns="0" rIns="0" bIns="0" rtlCol="0" anchor="t"/>
           <a:lstStyle/>
           <a:p>
-            <a:pPr indent="0" marL="0">
+            <a:pPr marL="0" indent="0">
               <a:buNone/>
             </a:pPr>
             <a:r>
@@ -22785,7 +22608,7 @@
           <a:bodyPr wrap="square" lIns="0" tIns="0" rIns="0" bIns="0" rtlCol="0" anchor="t"/>
           <a:lstStyle/>
           <a:p>
-            <a:pPr indent="0" marL="0">
+            <a:pPr marL="0" indent="0">
               <a:buNone/>
             </a:pPr>
             <a:r>
@@ -22824,7 +22647,7 @@
           <a:bodyPr wrap="square" lIns="0" tIns="0" rIns="0" bIns="0" rtlCol="0" anchor="t"/>
           <a:lstStyle/>
           <a:p>
-            <a:pPr indent="0" marL="0">
+            <a:pPr marL="0" indent="0">
               <a:buNone/>
             </a:pPr>
             <a:r>
@@ -22886,7 +22709,7 @@
           <a:bodyPr wrap="square" lIns="0" tIns="0" rIns="0" bIns="0" rtlCol="0" anchor="t"/>
           <a:lstStyle/>
           <a:p>
-            <a:pPr indent="0" marL="0">
+            <a:pPr marL="0" indent="0">
               <a:buNone/>
             </a:pPr>
             <a:r>
@@ -22925,7 +22748,7 @@
           <a:bodyPr wrap="square" lIns="0" tIns="0" rIns="0" bIns="0" rtlCol="0" anchor="t"/>
           <a:lstStyle/>
           <a:p>
-            <a:pPr indent="0" marL="0">
+            <a:pPr marL="0" indent="0">
               <a:buNone/>
             </a:pPr>
             <a:r>
@@ -23033,7 +22856,7 @@
           <a:bodyPr wrap="square" lIns="0" tIns="0" rIns="0" bIns="0" rtlCol="0" anchor="t"/>
           <a:lstStyle/>
           <a:p>
-            <a:pPr indent="0" marL="0">
+            <a:pPr marL="0" indent="0">
               <a:buNone/>
             </a:pPr>
             <a:r>
@@ -23072,7 +22895,7 @@
           <a:bodyPr wrap="square" lIns="0" tIns="0" rIns="0" bIns="0" rtlCol="0" anchor="t"/>
           <a:lstStyle/>
           <a:p>
-            <a:pPr indent="0" marL="0">
+            <a:pPr marL="0" indent="0">
               <a:buNone/>
             </a:pPr>
             <a:r>
@@ -23180,7 +23003,7 @@
           <a:bodyPr wrap="square" lIns="0" tIns="0" rIns="0" bIns="0" rtlCol="0" anchor="t"/>
           <a:lstStyle/>
           <a:p>
-            <a:pPr indent="0" marL="0">
+            <a:pPr marL="0" indent="0">
               <a:buNone/>
             </a:pPr>
             <a:r>
@@ -23219,7 +23042,7 @@
           <a:bodyPr wrap="square" lIns="0" tIns="0" rIns="0" bIns="0" rtlCol="0" anchor="t"/>
           <a:lstStyle/>
           <a:p>
-            <a:pPr indent="0" marL="0">
+            <a:pPr marL="0" indent="0">
               <a:buNone/>
             </a:pPr>
             <a:r>
@@ -23327,7 +23150,7 @@
           <a:bodyPr wrap="square" lIns="0" tIns="0" rIns="0" bIns="0" rtlCol="0" anchor="t"/>
           <a:lstStyle/>
           <a:p>
-            <a:pPr indent="0" marL="0">
+            <a:pPr marL="0" indent="0">
               <a:buNone/>
             </a:pPr>
             <a:r>
@@ -23366,7 +23189,7 @@
           <a:bodyPr wrap="square" lIns="0" tIns="0" rIns="0" bIns="0" rtlCol="0" anchor="t"/>
           <a:lstStyle/>
           <a:p>
-            <a:pPr indent="0" marL="0">
+            <a:pPr marL="0" indent="0">
               <a:buNone/>
             </a:pPr>
             <a:r>
@@ -23405,7 +23228,7 @@
           <a:bodyPr wrap="square" lIns="0" tIns="0" rIns="0" bIns="0" rtlCol="0" anchor="t"/>
           <a:lstStyle/>
           <a:p>
-            <a:pPr indent="0" marL="0">
+            <a:pPr marL="0" indent="0">
               <a:buNone/>
             </a:pPr>
             <a:r>
@@ -23439,6 +23262,7 @@
         <a:solidFill>
           <a:srgbClr val="FFFFFF"/>
         </a:solidFill>
+        <a:effectLst/>
       </p:bgPr>
     </p:bg>
     <p:spTree>
@@ -23476,7 +23300,7 @@
           <a:bodyPr wrap="square" lIns="0" tIns="0" rIns="0" bIns="0" rtlCol="0" anchor="t"/>
           <a:lstStyle/>
           <a:p>
-            <a:pPr indent="0" marL="0">
+            <a:pPr marL="0" indent="0">
               <a:buNone/>
             </a:pPr>
             <a:r>
@@ -23515,7 +23339,7 @@
           <a:bodyPr wrap="square" lIns="0" tIns="0" rIns="0" bIns="0" rtlCol="0" anchor="t"/>
           <a:lstStyle/>
           <a:p>
-            <a:pPr indent="0" marL="0">
+            <a:pPr marL="0" indent="0">
               <a:buNone/>
             </a:pPr>
             <a:r>
@@ -23554,7 +23378,7 @@
           <a:bodyPr wrap="square" lIns="0" tIns="0" rIns="0" bIns="0" rtlCol="0" anchor="t"/>
           <a:lstStyle/>
           <a:p>
-            <a:pPr indent="0" marL="0">
+            <a:pPr marL="0" indent="0">
               <a:buNone/>
             </a:pPr>
             <a:r>
@@ -23616,7 +23440,7 @@
           <a:bodyPr wrap="square" lIns="0" tIns="0" rIns="0" bIns="0" rtlCol="0" anchor="t"/>
           <a:lstStyle/>
           <a:p>
-            <a:pPr algn="r" indent="0" marL="0">
+            <a:pPr marL="0" indent="0" algn="r">
               <a:buNone/>
             </a:pPr>
             <a:r>
@@ -23655,7 +23479,7 @@
           <a:bodyPr wrap="square" lIns="0" tIns="0" rIns="0" bIns="0" rtlCol="0" anchor="t"/>
           <a:lstStyle/>
           <a:p>
-            <a:pPr indent="0" marL="0">
+            <a:pPr marL="0" indent="0">
               <a:buNone/>
             </a:pPr>
             <a:r>
@@ -23744,7 +23568,7 @@
           <a:bodyPr wrap="square" lIns="0" tIns="0" rIns="0" bIns="0" rtlCol="0" anchor="t"/>
           <a:lstStyle/>
           <a:p>
-            <a:pPr indent="0" marL="0">
+            <a:pPr marL="0" indent="0">
               <a:buNone/>
             </a:pPr>
             <a:r>
@@ -23783,7 +23607,7 @@
           <a:bodyPr wrap="square" lIns="0" tIns="0" rIns="0" bIns="0" rtlCol="0" anchor="t"/>
           <a:lstStyle/>
           <a:p>
-            <a:pPr indent="0" marL="0">
+            <a:pPr marL="0" indent="0">
               <a:buNone/>
             </a:pPr>
             <a:r>
@@ -23800,7 +23624,7 @@
             <a:endParaRPr lang="es-PE" sz="1400" dirty="0"/>
           </a:p>
           <a:p>
-            <a:pPr indent="0" marL="0">
+            <a:pPr marL="0" indent="0">
               <a:buNone/>
             </a:pPr>
             <a:r>
@@ -23817,7 +23641,7 @@
             <a:endParaRPr lang="es-PE" sz="1400" dirty="0"/>
           </a:p>
           <a:p>
-            <a:pPr indent="0" marL="0">
+            <a:pPr marL="0" indent="0">
               <a:buNone/>
             </a:pPr>
             <a:r>
@@ -23906,7 +23730,7 @@
           <a:bodyPr wrap="square" lIns="0" tIns="0" rIns="0" bIns="0" rtlCol="0" anchor="t"/>
           <a:lstStyle/>
           <a:p>
-            <a:pPr indent="0" marL="0">
+            <a:pPr marL="0" indent="0">
               <a:buNone/>
             </a:pPr>
             <a:r>
@@ -23945,7 +23769,7 @@
           <a:bodyPr wrap="square" lIns="0" tIns="0" rIns="0" bIns="0" rtlCol="0" anchor="t"/>
           <a:lstStyle/>
           <a:p>
-            <a:pPr indent="0" marL="0">
+            <a:pPr marL="0" indent="0">
               <a:buNone/>
             </a:pPr>
             <a:r>
@@ -23962,7 +23786,7 @@
             <a:endParaRPr lang="es-PE" sz="1400" dirty="0"/>
           </a:p>
           <a:p>
-            <a:pPr indent="0" marL="0">
+            <a:pPr marL="0" indent="0">
               <a:buNone/>
             </a:pPr>
             <a:r>
@@ -23979,7 +23803,7 @@
             <a:endParaRPr lang="es-PE" sz="1400" dirty="0"/>
           </a:p>
           <a:p>
-            <a:pPr indent="0" marL="0">
+            <a:pPr marL="0" indent="0">
               <a:buNone/>
             </a:pPr>
             <a:r>
@@ -23996,7 +23820,7 @@
             <a:endParaRPr lang="es-PE" sz="1400" dirty="0"/>
           </a:p>
           <a:p>
-            <a:pPr indent="0" marL="0">
+            <a:pPr marL="0" indent="0">
               <a:buNone/>
             </a:pPr>
             <a:r>
@@ -24085,7 +23909,7 @@
           <a:bodyPr wrap="square" lIns="0" tIns="0" rIns="0" bIns="0" rtlCol="0" anchor="t"/>
           <a:lstStyle/>
           <a:p>
-            <a:pPr indent="0" marL="0">
+            <a:pPr marL="0" indent="0">
               <a:buNone/>
             </a:pPr>
             <a:r>
@@ -24124,7 +23948,7 @@
           <a:bodyPr wrap="square" lIns="0" tIns="0" rIns="0" bIns="0" rtlCol="0" anchor="t"/>
           <a:lstStyle/>
           <a:p>
-            <a:pPr indent="0" marL="0">
+            <a:pPr marL="0" indent="0">
               <a:buNone/>
             </a:pPr>
             <a:r>
@@ -24141,7 +23965,7 @@
             <a:endParaRPr lang="es-PE" sz="1400" dirty="0"/>
           </a:p>
           <a:p>
-            <a:pPr indent="0" marL="0">
+            <a:pPr marL="0" indent="0">
               <a:buNone/>
             </a:pPr>
             <a:r>
@@ -24158,7 +23982,7 @@
             <a:endParaRPr lang="es-PE" sz="1400" dirty="0"/>
           </a:p>
           <a:p>
-            <a:pPr indent="0" marL="0">
+            <a:pPr marL="0" indent="0">
               <a:buNone/>
             </a:pPr>
             <a:r>
@@ -24175,7 +23999,7 @@
             <a:endParaRPr lang="es-PE" sz="1400" dirty="0"/>
           </a:p>
           <a:p>
-            <a:pPr indent="0" marL="0">
+            <a:pPr marL="0" indent="0">
               <a:buNone/>
             </a:pPr>
             <a:r>
@@ -24264,7 +24088,7 @@
           <a:bodyPr wrap="square" lIns="0" tIns="0" rIns="0" bIns="0" rtlCol="0" anchor="t"/>
           <a:lstStyle/>
           <a:p>
-            <a:pPr indent="0" marL="0">
+            <a:pPr marL="0" indent="0">
               <a:buNone/>
             </a:pPr>
             <a:r>
@@ -24303,7 +24127,7 @@
           <a:bodyPr wrap="square" lIns="0" tIns="0" rIns="0" bIns="0" rtlCol="0" anchor="t"/>
           <a:lstStyle/>
           <a:p>
-            <a:pPr indent="0" marL="0">
+            <a:pPr marL="0" indent="0">
               <a:buNone/>
             </a:pPr>
             <a:r>
@@ -24320,7 +24144,7 @@
             <a:endParaRPr lang="es-PE" sz="1400" dirty="0"/>
           </a:p>
           <a:p>
-            <a:pPr indent="0" marL="0">
+            <a:pPr marL="0" indent="0">
               <a:buNone/>
             </a:pPr>
             <a:r>
@@ -24337,7 +24161,7 @@
             <a:endParaRPr lang="es-PE" sz="1400" dirty="0"/>
           </a:p>
           <a:p>
-            <a:pPr indent="0" marL="0">
+            <a:pPr marL="0" indent="0">
               <a:buNone/>
             </a:pPr>
             <a:r>
@@ -24426,7 +24250,7 @@
           <a:bodyPr wrap="square" lIns="0" tIns="0" rIns="0" bIns="0" rtlCol="0" anchor="t"/>
           <a:lstStyle/>
           <a:p>
-            <a:pPr indent="0" marL="0">
+            <a:pPr marL="0" indent="0">
               <a:buNone/>
             </a:pPr>
             <a:r>
@@ -24465,7 +24289,7 @@
           <a:bodyPr wrap="square" lIns="0" tIns="0" rIns="0" bIns="0" rtlCol="0" anchor="t"/>
           <a:lstStyle/>
           <a:p>
-            <a:pPr indent="0" marL="0">
+            <a:pPr marL="0" indent="0">
               <a:buNone/>
             </a:pPr>
             <a:r>
@@ -24482,7 +24306,7 @@
             <a:endParaRPr lang="es-PE" sz="1400" dirty="0"/>
           </a:p>
           <a:p>
-            <a:pPr indent="0" marL="0">
+            <a:pPr marL="0" indent="0">
               <a:buNone/>
             </a:pPr>
             <a:r>
@@ -24499,7 +24323,7 @@
             <a:endParaRPr lang="es-PE" sz="1400" dirty="0"/>
           </a:p>
           <a:p>
-            <a:pPr indent="0" marL="0">
+            <a:pPr marL="0" indent="0">
               <a:buNone/>
             </a:pPr>
             <a:r>
@@ -24516,7 +24340,7 @@
             <a:endParaRPr lang="es-PE" sz="1400" dirty="0"/>
           </a:p>
           <a:p>
-            <a:pPr indent="0" marL="0">
+            <a:pPr marL="0" indent="0">
               <a:buNone/>
             </a:pPr>
             <a:r>
@@ -24605,7 +24429,7 @@
           <a:bodyPr wrap="square" lIns="0" tIns="0" rIns="0" bIns="0" rtlCol="0" anchor="t"/>
           <a:lstStyle/>
           <a:p>
-            <a:pPr indent="0" marL="0">
+            <a:pPr marL="0" indent="0">
               <a:buNone/>
             </a:pPr>
             <a:r>
@@ -24644,7 +24468,7 @@
           <a:bodyPr wrap="square" lIns="0" tIns="0" rIns="0" bIns="0" rtlCol="0" anchor="t"/>
           <a:lstStyle/>
           <a:p>
-            <a:pPr indent="0" marL="0">
+            <a:pPr marL="0" indent="0">
               <a:buNone/>
             </a:pPr>
             <a:r>
@@ -24661,7 +24485,7 @@
             <a:endParaRPr lang="es-PE" sz="1400" dirty="0"/>
           </a:p>
           <a:p>
-            <a:pPr indent="0" marL="0">
+            <a:pPr marL="0" indent="0">
               <a:buNone/>
             </a:pPr>
             <a:r>
@@ -24678,7 +24502,7 @@
             <a:endParaRPr lang="es-PE" sz="1400" dirty="0"/>
           </a:p>
           <a:p>
-            <a:pPr indent="0" marL="0">
+            <a:pPr marL="0" indent="0">
               <a:buNone/>
             </a:pPr>
             <a:r>
@@ -24695,7 +24519,7 @@
             <a:endParaRPr lang="es-PE" sz="1400" dirty="0"/>
           </a:p>
           <a:p>
-            <a:pPr indent="0" marL="0">
+            <a:pPr marL="0" indent="0">
               <a:buNone/>
             </a:pPr>
             <a:r>
@@ -24712,7 +24536,7 @@
             <a:endParaRPr lang="es-PE" sz="1400" dirty="0"/>
           </a:p>
           <a:p>
-            <a:pPr indent="0" marL="0">
+            <a:pPr marL="0" indent="0">
               <a:buNone/>
             </a:pPr>
             <a:r>
@@ -24801,7 +24625,7 @@
           <a:bodyPr wrap="square" lIns="0" tIns="0" rIns="0" bIns="0" rtlCol="0" anchor="t"/>
           <a:lstStyle/>
           <a:p>
-            <a:pPr indent="0" marL="0">
+            <a:pPr marL="0" indent="0">
               <a:buNone/>
             </a:pPr>
             <a:r>
@@ -24840,7 +24664,7 @@
           <a:bodyPr wrap="square" lIns="0" tIns="0" rIns="0" bIns="0" rtlCol="0" anchor="t"/>
           <a:lstStyle/>
           <a:p>
-            <a:pPr indent="0" marL="0">
+            <a:pPr marL="0" indent="0">
               <a:buNone/>
             </a:pPr>
             <a:r>
@@ -24857,7 +24681,7 @@
             <a:endParaRPr lang="es-PE" sz="1400" dirty="0"/>
           </a:p>
           <a:p>
-            <a:pPr indent="0" marL="0">
+            <a:pPr marL="0" indent="0">
               <a:buNone/>
             </a:pPr>
             <a:r>
@@ -24874,7 +24698,7 @@
             <a:endParaRPr lang="es-PE" sz="1400" dirty="0"/>
           </a:p>
           <a:p>
-            <a:pPr indent="0" marL="0">
+            <a:pPr marL="0" indent="0">
               <a:buNone/>
             </a:pPr>
             <a:r>
@@ -24963,7 +24787,7 @@
           <a:bodyPr wrap="square" lIns="0" tIns="0" rIns="0" bIns="0" rtlCol="0" anchor="t"/>
           <a:lstStyle/>
           <a:p>
-            <a:pPr indent="0" marL="0">
+            <a:pPr marL="0" indent="0">
               <a:buNone/>
             </a:pPr>
             <a:r>
@@ -25002,7 +24826,7 @@
           <a:bodyPr wrap="square" lIns="0" tIns="0" rIns="0" bIns="0" rtlCol="0" anchor="t"/>
           <a:lstStyle/>
           <a:p>
-            <a:pPr indent="0" marL="0">
+            <a:pPr marL="0" indent="0">
               <a:buNone/>
             </a:pPr>
             <a:r>
@@ -25019,7 +24843,7 @@
             <a:endParaRPr lang="es-PE" sz="1400" dirty="0"/>
           </a:p>
           <a:p>
-            <a:pPr indent="0" marL="0">
+            <a:pPr marL="0" indent="0">
               <a:buNone/>
             </a:pPr>
             <a:r>
@@ -25036,7 +24860,7 @@
             <a:endParaRPr lang="es-PE" sz="1400" dirty="0"/>
           </a:p>
           <a:p>
-            <a:pPr indent="0" marL="0">
+            <a:pPr marL="0" indent="0">
               <a:buNone/>
             </a:pPr>
             <a:r>
@@ -25053,7 +24877,7 @@
             <a:endParaRPr lang="es-PE" sz="1400" dirty="0"/>
           </a:p>
           <a:p>
-            <a:pPr indent="0" marL="0">
+            <a:pPr marL="0" indent="0">
               <a:buNone/>
             </a:pPr>
             <a:r>
@@ -25142,7 +24966,7 @@
           <a:bodyPr wrap="square" lIns="0" tIns="0" rIns="0" bIns="0" rtlCol="0" anchor="t"/>
           <a:lstStyle/>
           <a:p>
-            <a:pPr indent="0" marL="0">
+            <a:pPr marL="0" indent="0">
               <a:buNone/>
             </a:pPr>
             <a:r>
@@ -25181,7 +25005,7 @@
           <a:bodyPr wrap="square" lIns="0" tIns="0" rIns="0" bIns="0" rtlCol="0" anchor="t"/>
           <a:lstStyle/>
           <a:p>
-            <a:pPr indent="0" marL="0">
+            <a:pPr marL="0" indent="0">
               <a:buNone/>
             </a:pPr>
             <a:r>
@@ -25198,7 +25022,7 @@
             <a:endParaRPr lang="es-PE" sz="1400" dirty="0"/>
           </a:p>
           <a:p>
-            <a:pPr indent="0" marL="0">
+            <a:pPr marL="0" indent="0">
               <a:buNone/>
             </a:pPr>
             <a:r>
@@ -25215,7 +25039,7 @@
             <a:endParaRPr lang="es-PE" sz="1400" dirty="0"/>
           </a:p>
           <a:p>
-            <a:pPr indent="0" marL="0">
+            <a:pPr marL="0" indent="0">
               <a:buNone/>
             </a:pPr>
             <a:r>
@@ -25277,7 +25101,7 @@
           <a:bodyPr wrap="square" lIns="0" tIns="0" rIns="0" bIns="0" rtlCol="0" anchor="t"/>
           <a:lstStyle/>
           <a:p>
-            <a:pPr indent="0" marL="0">
+            <a:pPr marL="0" indent="0">
               <a:buNone/>
             </a:pPr>
             <a:r>
@@ -25316,7 +25140,7 @@
           <a:bodyPr wrap="square" lIns="0" tIns="0" rIns="0" bIns="0" rtlCol="0" anchor="t"/>
           <a:lstStyle/>
           <a:p>
-            <a:pPr indent="0" marL="0">
+            <a:pPr marL="0" indent="0">
               <a:buNone/>
             </a:pPr>
             <a:r>
@@ -25378,7 +25202,7 @@
           <a:bodyPr wrap="square" lIns="0" tIns="0" rIns="0" bIns="0" rtlCol="0" anchor="t"/>
           <a:lstStyle/>
           <a:p>
-            <a:pPr indent="0" marL="0">
+            <a:pPr marL="0" indent="0">
               <a:buNone/>
             </a:pPr>
             <a:r>
@@ -25417,7 +25241,7 @@
           <a:bodyPr wrap="square" lIns="0" tIns="0" rIns="0" bIns="0" rtlCol="0" anchor="t"/>
           <a:lstStyle/>
           <a:p>
-            <a:pPr indent="0" marL="0">
+            <a:pPr marL="0" indent="0">
               <a:buNone/>
             </a:pPr>
             <a:r>
@@ -25479,7 +25303,7 @@
           <a:bodyPr wrap="square" lIns="0" tIns="0" rIns="0" bIns="0" rtlCol="0" anchor="t"/>
           <a:lstStyle/>
           <a:p>
-            <a:pPr indent="0" marL="0">
+            <a:pPr marL="0" indent="0">
               <a:buNone/>
             </a:pPr>
             <a:r>
@@ -25518,7 +25342,7 @@
           <a:bodyPr wrap="square" lIns="0" tIns="0" rIns="0" bIns="0" rtlCol="0" anchor="t"/>
           <a:lstStyle/>
           <a:p>
-            <a:pPr indent="0" marL="0">
+            <a:pPr marL="0" indent="0">
               <a:buNone/>
             </a:pPr>
             <a:r>
@@ -25580,7 +25404,7 @@
           <a:bodyPr wrap="square" lIns="0" tIns="0" rIns="0" bIns="0" rtlCol="0" anchor="t"/>
           <a:lstStyle/>
           <a:p>
-            <a:pPr indent="0" marL="0">
+            <a:pPr marL="0" indent="0">
               <a:buNone/>
             </a:pPr>
             <a:r>
@@ -25619,7 +25443,7 @@
           <a:bodyPr wrap="square" lIns="0" tIns="0" rIns="0" bIns="0" rtlCol="0" anchor="t"/>
           <a:lstStyle/>
           <a:p>
-            <a:pPr indent="0" marL="0">
+            <a:pPr marL="0" indent="0">
               <a:buNone/>
             </a:pPr>
             <a:r>
@@ -25681,7 +25505,7 @@
           <a:bodyPr wrap="square" lIns="0" tIns="0" rIns="0" bIns="0" rtlCol="0" anchor="t"/>
           <a:lstStyle/>
           <a:p>
-            <a:pPr indent="0" marL="0">
+            <a:pPr marL="0" indent="0">
               <a:buNone/>
             </a:pPr>
             <a:r>
@@ -25720,7 +25544,7 @@
           <a:bodyPr wrap="square" lIns="0" tIns="0" rIns="0" bIns="0" rtlCol="0" anchor="t"/>
           <a:lstStyle/>
           <a:p>
-            <a:pPr indent="0" marL="0">
+            <a:pPr marL="0" indent="0">
               <a:buNone/>
             </a:pPr>
             <a:r>
@@ -25782,7 +25606,7 @@
           <a:bodyPr wrap="square" lIns="0" tIns="0" rIns="0" bIns="0" rtlCol="0" anchor="t"/>
           <a:lstStyle/>
           <a:p>
-            <a:pPr indent="0" marL="0">
+            <a:pPr marL="0" indent="0">
               <a:buNone/>
             </a:pPr>
             <a:r>
@@ -25821,7 +25645,7 @@
           <a:bodyPr wrap="square" lIns="0" tIns="0" rIns="0" bIns="0" rtlCol="0" anchor="t"/>
           <a:lstStyle/>
           <a:p>
-            <a:pPr indent="0" marL="0">
+            <a:pPr marL="0" indent="0">
               <a:buNone/>
             </a:pPr>
             <a:r>
@@ -25929,7 +25753,7 @@
           <a:bodyPr wrap="square" lIns="0" tIns="0" rIns="0" bIns="0" rtlCol="0" anchor="t"/>
           <a:lstStyle/>
           <a:p>
-            <a:pPr indent="0" marL="0">
+            <a:pPr marL="0" indent="0">
               <a:buNone/>
             </a:pPr>
             <a:r>
@@ -25968,7 +25792,7 @@
           <a:bodyPr wrap="square" lIns="0" tIns="0" rIns="0" bIns="0" rtlCol="0" anchor="t"/>
           <a:lstStyle/>
           <a:p>
-            <a:pPr indent="0" marL="0">
+            <a:pPr marL="0" indent="0">
               <a:buNone/>
             </a:pPr>
             <a:r>
@@ -26076,7 +25900,7 @@
           <a:bodyPr wrap="square" lIns="0" tIns="0" rIns="0" bIns="0" rtlCol="0" anchor="t"/>
           <a:lstStyle/>
           <a:p>
-            <a:pPr indent="0" marL="0">
+            <a:pPr marL="0" indent="0">
               <a:buNone/>
             </a:pPr>
             <a:r>
@@ -26115,7 +25939,7 @@
           <a:bodyPr wrap="square" lIns="0" tIns="0" rIns="0" bIns="0" rtlCol="0" anchor="t"/>
           <a:lstStyle/>
           <a:p>
-            <a:pPr indent="0" marL="0">
+            <a:pPr marL="0" indent="0">
               <a:buNone/>
             </a:pPr>
             <a:r>
@@ -26202,7 +26026,7 @@
           <a:bodyPr wrap="square" lIns="0" tIns="0" rIns="0" bIns="0" rtlCol="0" anchor="t"/>
           <a:lstStyle/>
           <a:p>
-            <a:pPr indent="0" marL="0">
+            <a:pPr marL="0" indent="0">
               <a:buNone/>
             </a:pPr>
             <a:r>
@@ -26521,4 +26345,299 @@
     </a:ext>
   </a:extLst>
 </a:theme>
+</file>
+
+<file path=ppt/theme/theme2.xml><?xml version="1.0" encoding="utf-8"?>
+<a:theme xmlns:a="http://schemas.openxmlformats.org/drawingml/2006/main" name="Tema de Office">
+  <a:themeElements>
+    <a:clrScheme name="Office">
+      <a:dk1>
+        <a:sysClr val="windowText" lastClr="000000"/>
+      </a:dk1>
+      <a:lt1>
+        <a:sysClr val="window" lastClr="FFFFFF"/>
+      </a:lt1>
+      <a:dk2>
+        <a:srgbClr val="44546A"/>
+      </a:dk2>
+      <a:lt2>
+        <a:srgbClr val="E7E6E6"/>
+      </a:lt2>
+      <a:accent1>
+        <a:srgbClr val="4472C4"/>
+      </a:accent1>
+      <a:accent2>
+        <a:srgbClr val="ED7D31"/>
+      </a:accent2>
+      <a:accent3>
+        <a:srgbClr val="A5A5A5"/>
+      </a:accent3>
+      <a:accent4>
+        <a:srgbClr val="FFC000"/>
+      </a:accent4>
+      <a:accent5>
+        <a:srgbClr val="5B9BD5"/>
+      </a:accent5>
+      <a:accent6>
+        <a:srgbClr val="70AD47"/>
+      </a:accent6>
+      <a:hlink>
+        <a:srgbClr val="0563C1"/>
+      </a:hlink>
+      <a:folHlink>
+        <a:srgbClr val="954F72"/>
+      </a:folHlink>
+    </a:clrScheme>
+    <a:fontScheme name="Office">
+      <a:majorFont>
+        <a:latin typeface="Calibri Light" panose="020F0302020204030204"/>
+        <a:ea typeface=""/>
+        <a:cs typeface=""/>
+        <a:font script="Jpan" typeface="游ゴシック Light"/>
+        <a:font script="Hang" typeface="맑은 고딕"/>
+        <a:font script="Hans" typeface="等线 Light"/>
+        <a:font script="Hant" typeface="新細明體"/>
+        <a:font script="Arab" typeface="Times New Roman"/>
+        <a:font script="Hebr" typeface="Times New Roman"/>
+        <a:font script="Thai" typeface="Angsana New"/>
+        <a:font script="Ethi" typeface="Nyala"/>
+        <a:font script="Beng" typeface="Vrinda"/>
+        <a:font script="Gujr" typeface="Shruti"/>
+        <a:font script="Khmr" typeface="MoolBoran"/>
+        <a:font script="Knda" typeface="Tunga"/>
+        <a:font script="Guru" typeface="Raavi"/>
+        <a:font script="Cans" typeface="Euphemia"/>
+        <a:font script="Cher" typeface="Plantagenet Cherokee"/>
+        <a:font script="Yiii" typeface="Microsoft Yi Baiti"/>
+        <a:font script="Tibt" typeface="Microsoft Himalaya"/>
+        <a:font script="Thaa" typeface="MV Boli"/>
+        <a:font script="Deva" typeface="Mangal"/>
+        <a:font script="Telu" typeface="Gautami"/>
+        <a:font script="Taml" typeface="Latha"/>
+        <a:font script="Syrc" typeface="Estrangelo Edessa"/>
+        <a:font script="Orya" typeface="Kalinga"/>
+        <a:font script="Mlym" typeface="Kartika"/>
+        <a:font script="Laoo" typeface="DokChampa"/>
+        <a:font script="Sinh" typeface="Iskoola Pota"/>
+        <a:font script="Mong" typeface="Mongolian Baiti"/>
+        <a:font script="Viet" typeface="Times New Roman"/>
+        <a:font script="Uigh" typeface="Microsoft Uighur"/>
+        <a:font script="Geor" typeface="Sylfaen"/>
+        <a:font script="Armn" typeface="Arial"/>
+        <a:font script="Bugi" typeface="Leelawadee UI"/>
+        <a:font script="Bopo" typeface="Microsoft JhengHei"/>
+        <a:font script="Java" typeface="Javanese Text"/>
+        <a:font script="Lisu" typeface="Segoe UI"/>
+        <a:font script="Mymr" typeface="Myanmar Text"/>
+        <a:font script="Nkoo" typeface="Ebrima"/>
+        <a:font script="Olck" typeface="Nirmala UI"/>
+        <a:font script="Osma" typeface="Ebrima"/>
+        <a:font script="Phag" typeface="Phagspa"/>
+        <a:font script="Syrn" typeface="Estrangelo Edessa"/>
+        <a:font script="Syrj" typeface="Estrangelo Edessa"/>
+        <a:font script="Syre" typeface="Estrangelo Edessa"/>
+        <a:font script="Sora" typeface="Nirmala UI"/>
+        <a:font script="Tale" typeface="Microsoft Tai Le"/>
+        <a:font script="Talu" typeface="Microsoft New Tai Lue"/>
+        <a:font script="Tfng" typeface="Ebrima"/>
+      </a:majorFont>
+      <a:minorFont>
+        <a:latin typeface="Calibri" panose="020F0502020204030204"/>
+        <a:ea typeface=""/>
+        <a:cs typeface=""/>
+        <a:font script="Jpan" typeface="游ゴシック"/>
+        <a:font script="Hang" typeface="맑은 고딕"/>
+        <a:font script="Hans" typeface="等线"/>
+        <a:font script="Hant" typeface="新細明體"/>
+        <a:font script="Arab" typeface="Arial"/>
+        <a:font script="Hebr" typeface="Arial"/>
+        <a:font script="Thai" typeface="Cordia New"/>
+        <a:font script="Ethi" typeface="Nyala"/>
+        <a:font script="Beng" typeface="Vrinda"/>
+        <a:font script="Gujr" typeface="Shruti"/>
+        <a:font script="Khmr" typeface="DaunPenh"/>
+        <a:font script="Knda" typeface="Tunga"/>
+        <a:font script="Guru" typeface="Raavi"/>
+        <a:font script="Cans" typeface="Euphemia"/>
+        <a:font script="Cher" typeface="Plantagenet Cherokee"/>
+        <a:font script="Yiii" typeface="Microsoft Yi Baiti"/>
+        <a:font script="Tibt" typeface="Microsoft Himalaya"/>
+        <a:font script="Thaa" typeface="MV Boli"/>
+        <a:font script="Deva" typeface="Mangal"/>
+        <a:font script="Telu" typeface="Gautami"/>
+        <a:font script="Taml" typeface="Latha"/>
+        <a:font script="Syrc" typeface="Estrangelo Edessa"/>
+        <a:font script="Orya" typeface="Kalinga"/>
+        <a:font script="Mlym" typeface="Kartika"/>
+        <a:font script="Laoo" typeface="DokChampa"/>
+        <a:font script="Sinh" typeface="Iskoola Pota"/>
+        <a:font script="Mong" typeface="Mongolian Baiti"/>
+        <a:font script="Viet" typeface="Arial"/>
+        <a:font script="Uigh" typeface="Microsoft Uighur"/>
+        <a:font script="Geor" typeface="Sylfaen"/>
+        <a:font script="Armn" typeface="Arial"/>
+        <a:font script="Bugi" typeface="Leelawadee UI"/>
+        <a:font script="Bopo" typeface="Microsoft JhengHei"/>
+        <a:font script="Java" typeface="Javanese Text"/>
+        <a:font script="Lisu" typeface="Segoe UI"/>
+        <a:font script="Mymr" typeface="Myanmar Text"/>
+        <a:font script="Nkoo" typeface="Ebrima"/>
+        <a:font script="Olck" typeface="Nirmala UI"/>
+        <a:font script="Osma" typeface="Ebrima"/>
+        <a:font script="Phag" typeface="Phagspa"/>
+        <a:font script="Syrn" typeface="Estrangelo Edessa"/>
+        <a:font script="Syrj" typeface="Estrangelo Edessa"/>
+        <a:font script="Syre" typeface="Estrangelo Edessa"/>
+        <a:font script="Sora" typeface="Nirmala UI"/>
+        <a:font script="Tale" typeface="Microsoft Tai Le"/>
+        <a:font script="Talu" typeface="Microsoft New Tai Lue"/>
+        <a:font script="Tfng" typeface="Ebrima"/>
+      </a:minorFont>
+    </a:fontScheme>
+    <a:fmtScheme name="Office">
+      <a:fillStyleLst>
+        <a:solidFill>
+          <a:schemeClr val="phClr"/>
+        </a:solidFill>
+        <a:gradFill rotWithShape="1">
+          <a:gsLst>
+            <a:gs pos="0">
+              <a:schemeClr val="phClr">
+                <a:lumMod val="110000"/>
+                <a:satMod val="105000"/>
+                <a:tint val="67000"/>
+              </a:schemeClr>
+            </a:gs>
+            <a:gs pos="50000">
+              <a:schemeClr val="phClr">
+                <a:lumMod val="105000"/>
+                <a:satMod val="103000"/>
+                <a:tint val="73000"/>
+              </a:schemeClr>
+            </a:gs>
+            <a:gs pos="100000">
+              <a:schemeClr val="phClr">
+                <a:lumMod val="105000"/>
+                <a:satMod val="109000"/>
+                <a:tint val="81000"/>
+              </a:schemeClr>
+            </a:gs>
+          </a:gsLst>
+          <a:lin ang="5400000" scaled="0"/>
+        </a:gradFill>
+        <a:gradFill rotWithShape="1">
+          <a:gsLst>
+            <a:gs pos="0">
+              <a:schemeClr val="phClr">
+                <a:satMod val="103000"/>
+                <a:lumMod val="102000"/>
+                <a:tint val="94000"/>
+              </a:schemeClr>
+            </a:gs>
+            <a:gs pos="50000">
+              <a:schemeClr val="phClr">
+                <a:satMod val="110000"/>
+                <a:lumMod val="100000"/>
+                <a:shade val="100000"/>
+              </a:schemeClr>
+            </a:gs>
+            <a:gs pos="100000">
+              <a:schemeClr val="phClr">
+                <a:lumMod val="99000"/>
+                <a:satMod val="120000"/>
+                <a:shade val="78000"/>
+              </a:schemeClr>
+            </a:gs>
+          </a:gsLst>
+          <a:lin ang="5400000" scaled="0"/>
+        </a:gradFill>
+      </a:fillStyleLst>
+      <a:lnStyleLst>
+        <a:ln w="6350" cap="flat" cmpd="sng" algn="ctr">
+          <a:solidFill>
+            <a:schemeClr val="phClr"/>
+          </a:solidFill>
+          <a:prstDash val="solid"/>
+          <a:miter lim="800000"/>
+        </a:ln>
+        <a:ln w="12700" cap="flat" cmpd="sng" algn="ctr">
+          <a:solidFill>
+            <a:schemeClr val="phClr"/>
+          </a:solidFill>
+          <a:prstDash val="solid"/>
+          <a:miter lim="800000"/>
+        </a:ln>
+        <a:ln w="19050" cap="flat" cmpd="sng" algn="ctr">
+          <a:solidFill>
+            <a:schemeClr val="phClr"/>
+          </a:solidFill>
+          <a:prstDash val="solid"/>
+          <a:miter lim="800000"/>
+        </a:ln>
+      </a:lnStyleLst>
+      <a:effectStyleLst>
+        <a:effectStyle>
+          <a:effectLst/>
+        </a:effectStyle>
+        <a:effectStyle>
+          <a:effectLst/>
+        </a:effectStyle>
+        <a:effectStyle>
+          <a:effectLst>
+            <a:outerShdw blurRad="57150" dist="19050" dir="5400000" algn="ctr" rotWithShape="0">
+              <a:srgbClr val="000000">
+                <a:alpha val="63000"/>
+              </a:srgbClr>
+            </a:outerShdw>
+          </a:effectLst>
+        </a:effectStyle>
+      </a:effectStyleLst>
+      <a:bgFillStyleLst>
+        <a:solidFill>
+          <a:schemeClr val="phClr"/>
+        </a:solidFill>
+        <a:solidFill>
+          <a:schemeClr val="phClr">
+            <a:tint val="95000"/>
+            <a:satMod val="170000"/>
+          </a:schemeClr>
+        </a:solidFill>
+        <a:gradFill rotWithShape="1">
+          <a:gsLst>
+            <a:gs pos="0">
+              <a:schemeClr val="phClr">
+                <a:tint val="93000"/>
+                <a:satMod val="150000"/>
+                <a:shade val="98000"/>
+                <a:lumMod val="102000"/>
+              </a:schemeClr>
+            </a:gs>
+            <a:gs pos="50000">
+              <a:schemeClr val="phClr">
+                <a:tint val="98000"/>
+                <a:satMod val="130000"/>
+                <a:shade val="90000"/>
+                <a:lumMod val="103000"/>
+              </a:schemeClr>
+            </a:gs>
+            <a:gs pos="100000">
+              <a:schemeClr val="phClr">
+                <a:shade val="63000"/>
+                <a:satMod val="120000"/>
+              </a:schemeClr>
+            </a:gs>
+          </a:gsLst>
+          <a:lin ang="5400000" scaled="0"/>
+        </a:gradFill>
+      </a:bgFillStyleLst>
+    </a:fmtScheme>
+  </a:themeElements>
+  <a:objectDefaults/>
+  <a:extraClrSchemeLst/>
+  <a:extLst>
+    <a:ext uri="{05A4C25C-085E-4340-85A3-A5531E510DB2}">
+      <thm15:themeFamily xmlns:thm15="http://schemas.microsoft.com/office/thememl/2012/main" name="Office Theme" id="{62F939B6-93AF-4DB8-9C6B-D6C7DFDC589F}" vid="{4A3C46E8-61CC-4603-A589-7422A47A8E4A}"/>
+    </a:ext>
+  </a:extLst>
+</a:theme>
 </file>